--- a/slides/Teori_Pertemuan_05.pptx
+++ b/slides/Teori_Pertemuan_05.pptx
@@ -2,45 +2,48 @@
 <file path=ppt/presentation.xml><?xml version="1.0" encoding="utf-8"?>
 <p:presentation xmlns:p="http://schemas.openxmlformats.org/presentationml/2006/main">
   <p:sldMasterIdLst>
-    <p:sldMasterId xmlns:r="http://schemas.openxmlformats.org/officeDocument/2006/relationships" id="2147483648" r:id="R3f979fb7b27b4171"/>
+    <p:sldMasterId xmlns:r="http://schemas.openxmlformats.org/officeDocument/2006/relationships" id="2147483648" r:id="R498851256e5e42b5"/>
   </p:sldMasterIdLst>
   <p:notesMasterIdLst>
-    <p:notesMasterId xmlns:r="http://schemas.openxmlformats.org/officeDocument/2006/relationships" r:id="Rf455857789de45da"/>
+    <p:notesMasterId xmlns:r="http://schemas.openxmlformats.org/officeDocument/2006/relationships" r:id="Rc0e5904c4a044ad4"/>
   </p:notesMasterIdLst>
   <p:sldIdLst>
-    <p:sldId xmlns:r="http://schemas.openxmlformats.org/officeDocument/2006/relationships" id="256" r:id="R960d5afe6b4a487a"/>
-    <p:sldId xmlns:r="http://schemas.openxmlformats.org/officeDocument/2006/relationships" id="257" r:id="Rfd01d976ff874f46"/>
-    <p:sldId xmlns:r="http://schemas.openxmlformats.org/officeDocument/2006/relationships" id="258" r:id="R87935cb9cb7e4466"/>
-    <p:sldId xmlns:r="http://schemas.openxmlformats.org/officeDocument/2006/relationships" id="259" r:id="Rf2af61c2c62442c3"/>
-    <p:sldId xmlns:r="http://schemas.openxmlformats.org/officeDocument/2006/relationships" id="260" r:id="R3a768f3677a84f46"/>
-    <p:sldId xmlns:r="http://schemas.openxmlformats.org/officeDocument/2006/relationships" id="261" r:id="R1d0eca96de6b4ba1"/>
-    <p:sldId xmlns:r="http://schemas.openxmlformats.org/officeDocument/2006/relationships" id="262" r:id="R3c525d1bd20d4972"/>
-    <p:sldId xmlns:r="http://schemas.openxmlformats.org/officeDocument/2006/relationships" id="263" r:id="R4d9f7c7deb44477d"/>
-    <p:sldId xmlns:r="http://schemas.openxmlformats.org/officeDocument/2006/relationships" id="264" r:id="R4a84e10d5d9d461e"/>
-    <p:sldId xmlns:r="http://schemas.openxmlformats.org/officeDocument/2006/relationships" id="265" r:id="R8002fcd451004352"/>
-    <p:sldId xmlns:r="http://schemas.openxmlformats.org/officeDocument/2006/relationships" id="266" r:id="R25fd9cde495b4f69"/>
-    <p:sldId xmlns:r="http://schemas.openxmlformats.org/officeDocument/2006/relationships" id="267" r:id="Rc69fb68651904a63"/>
-    <p:sldId xmlns:r="http://schemas.openxmlformats.org/officeDocument/2006/relationships" id="268" r:id="Rac77ce3996634ffa"/>
-    <p:sldId xmlns:r="http://schemas.openxmlformats.org/officeDocument/2006/relationships" id="269" r:id="R5371e7f3061f4c4e"/>
-    <p:sldId xmlns:r="http://schemas.openxmlformats.org/officeDocument/2006/relationships" id="270" r:id="Rc679cc3e67c2478d"/>
-    <p:sldId xmlns:r="http://schemas.openxmlformats.org/officeDocument/2006/relationships" id="271" r:id="Rb14f2ec211c8411d"/>
-    <p:sldId xmlns:r="http://schemas.openxmlformats.org/officeDocument/2006/relationships" id="272" r:id="Rf4c4db1a4925406d"/>
-    <p:sldId xmlns:r="http://schemas.openxmlformats.org/officeDocument/2006/relationships" id="273" r:id="R252a1cbee070420e"/>
-    <p:sldId xmlns:r="http://schemas.openxmlformats.org/officeDocument/2006/relationships" id="274" r:id="Rc3d88f979459412b"/>
-    <p:sldId xmlns:r="http://schemas.openxmlformats.org/officeDocument/2006/relationships" id="275" r:id="Rbe0969ff239e46d6"/>
-    <p:sldId xmlns:r="http://schemas.openxmlformats.org/officeDocument/2006/relationships" id="276" r:id="Re6246271e81c4fb8"/>
-    <p:sldId xmlns:r="http://schemas.openxmlformats.org/officeDocument/2006/relationships" id="277" r:id="Rd34981bcf8404deb"/>
-    <p:sldId xmlns:r="http://schemas.openxmlformats.org/officeDocument/2006/relationships" id="278" r:id="Rae9790f0ec2b4046"/>
-    <p:sldId xmlns:r="http://schemas.openxmlformats.org/officeDocument/2006/relationships" id="279" r:id="R4a0b8e17aa544ec1"/>
-    <p:sldId xmlns:r="http://schemas.openxmlformats.org/officeDocument/2006/relationships" id="280" r:id="Rfd8451b31b57403d"/>
-    <p:sldId xmlns:r="http://schemas.openxmlformats.org/officeDocument/2006/relationships" id="281" r:id="Ra924b42cde7b4bf5"/>
-    <p:sldId xmlns:r="http://schemas.openxmlformats.org/officeDocument/2006/relationships" id="282" r:id="Rf5184227a3874ca7"/>
-    <p:sldId xmlns:r="http://schemas.openxmlformats.org/officeDocument/2006/relationships" id="283" r:id="R042c1a0711be4a99"/>
-    <p:sldId xmlns:r="http://schemas.openxmlformats.org/officeDocument/2006/relationships" id="284" r:id="R1e5630a0cb874055"/>
-    <p:sldId xmlns:r="http://schemas.openxmlformats.org/officeDocument/2006/relationships" id="285" r:id="R10caf8e4c311463b"/>
-    <p:sldId xmlns:r="http://schemas.openxmlformats.org/officeDocument/2006/relationships" id="286" r:id="Rdf3333df2c134c52"/>
-    <p:sldId xmlns:r="http://schemas.openxmlformats.org/officeDocument/2006/relationships" id="287" r:id="R9e6e4398ba4a4dbe"/>
-    <p:sldId xmlns:r="http://schemas.openxmlformats.org/officeDocument/2006/relationships" id="288" r:id="R74c55a1f8f164992"/>
+    <p:sldId xmlns:r="http://schemas.openxmlformats.org/officeDocument/2006/relationships" id="256" r:id="R847d78cc67b341c5"/>
+    <p:sldId xmlns:r="http://schemas.openxmlformats.org/officeDocument/2006/relationships" id="257" r:id="Rb024b3cfcff44499"/>
+    <p:sldId xmlns:r="http://schemas.openxmlformats.org/officeDocument/2006/relationships" id="258" r:id="R41f4026a1cd140c0"/>
+    <p:sldId xmlns:r="http://schemas.openxmlformats.org/officeDocument/2006/relationships" id="259" r:id="R1f8e52eabb46479e"/>
+    <p:sldId xmlns:r="http://schemas.openxmlformats.org/officeDocument/2006/relationships" id="260" r:id="Rcb7f2d992fc54b9f"/>
+    <p:sldId xmlns:r="http://schemas.openxmlformats.org/officeDocument/2006/relationships" id="261" r:id="R1df79c658a394e75"/>
+    <p:sldId xmlns:r="http://schemas.openxmlformats.org/officeDocument/2006/relationships" id="262" r:id="R2919e420d06b4859"/>
+    <p:sldId xmlns:r="http://schemas.openxmlformats.org/officeDocument/2006/relationships" id="263" r:id="Rfbf56eaeb3424c00"/>
+    <p:sldId xmlns:r="http://schemas.openxmlformats.org/officeDocument/2006/relationships" id="264" r:id="Rc7e2003acae14db2"/>
+    <p:sldId xmlns:r="http://schemas.openxmlformats.org/officeDocument/2006/relationships" id="265" r:id="R8e789491d4ec47a0"/>
+    <p:sldId xmlns:r="http://schemas.openxmlformats.org/officeDocument/2006/relationships" id="266" r:id="R7d5d2e61e9b6474f"/>
+    <p:sldId xmlns:r="http://schemas.openxmlformats.org/officeDocument/2006/relationships" id="267" r:id="Rb71d55c9c5f64bcb"/>
+    <p:sldId xmlns:r="http://schemas.openxmlformats.org/officeDocument/2006/relationships" id="268" r:id="R5008a79f6dde473f"/>
+    <p:sldId xmlns:r="http://schemas.openxmlformats.org/officeDocument/2006/relationships" id="269" r:id="R203275035ac54405"/>
+    <p:sldId xmlns:r="http://schemas.openxmlformats.org/officeDocument/2006/relationships" id="270" r:id="R226f65c1ecba484d"/>
+    <p:sldId xmlns:r="http://schemas.openxmlformats.org/officeDocument/2006/relationships" id="271" r:id="R7f2c3e6a03244335"/>
+    <p:sldId xmlns:r="http://schemas.openxmlformats.org/officeDocument/2006/relationships" id="272" r:id="Re5150eba612b4439"/>
+    <p:sldId xmlns:r="http://schemas.openxmlformats.org/officeDocument/2006/relationships" id="273" r:id="R16aa6006ec5645ce"/>
+    <p:sldId xmlns:r="http://schemas.openxmlformats.org/officeDocument/2006/relationships" id="274" r:id="Ra2bc75d51dea4e8a"/>
+    <p:sldId xmlns:r="http://schemas.openxmlformats.org/officeDocument/2006/relationships" id="275" r:id="R7024d9d2a2014ae2"/>
+    <p:sldId xmlns:r="http://schemas.openxmlformats.org/officeDocument/2006/relationships" id="276" r:id="R0981ae90ade041bf"/>
+    <p:sldId xmlns:r="http://schemas.openxmlformats.org/officeDocument/2006/relationships" id="277" r:id="R9257f4919ebc4f43"/>
+    <p:sldId xmlns:r="http://schemas.openxmlformats.org/officeDocument/2006/relationships" id="278" r:id="R9bb97ffa1ebe483f"/>
+    <p:sldId xmlns:r="http://schemas.openxmlformats.org/officeDocument/2006/relationships" id="279" r:id="Re0ce15037aad4c8d"/>
+    <p:sldId xmlns:r="http://schemas.openxmlformats.org/officeDocument/2006/relationships" id="280" r:id="Rc04de8881a914804"/>
+    <p:sldId xmlns:r="http://schemas.openxmlformats.org/officeDocument/2006/relationships" id="281" r:id="R7627da13efe243d9"/>
+    <p:sldId xmlns:r="http://schemas.openxmlformats.org/officeDocument/2006/relationships" id="282" r:id="R4a78a41e0da044a4"/>
+    <p:sldId xmlns:r="http://schemas.openxmlformats.org/officeDocument/2006/relationships" id="283" r:id="R1267730d7a154cc1"/>
+    <p:sldId xmlns:r="http://schemas.openxmlformats.org/officeDocument/2006/relationships" id="284" r:id="R96fc20cffd0c410b"/>
+    <p:sldId xmlns:r="http://schemas.openxmlformats.org/officeDocument/2006/relationships" id="285" r:id="R2e54955ce97e4f88"/>
+    <p:sldId xmlns:r="http://schemas.openxmlformats.org/officeDocument/2006/relationships" id="286" r:id="Rd8a8ac862bef4497"/>
+    <p:sldId xmlns:r="http://schemas.openxmlformats.org/officeDocument/2006/relationships" id="287" r:id="R82c401b403344425"/>
+    <p:sldId xmlns:r="http://schemas.openxmlformats.org/officeDocument/2006/relationships" id="288" r:id="R49b40544cfdf4136"/>
+    <p:sldId xmlns:r="http://schemas.openxmlformats.org/officeDocument/2006/relationships" id="289" r:id="R15d9a1339fd74f15"/>
+    <p:sldId xmlns:r="http://schemas.openxmlformats.org/officeDocument/2006/relationships" id="290" r:id="Rba625e0995ed4678"/>
+    <p:sldId xmlns:r="http://schemas.openxmlformats.org/officeDocument/2006/relationships" id="291" r:id="R7beb81d9557d4a7b"/>
   </p:sldIdLst>
   <p:sldSz cx="12192000" cy="6858000"/>
   <p:notesSz cx="6858000" cy="9144000"/>
@@ -581,6 +584,9 @@
           <a:bodyPr xmlns:a="http://schemas.openxmlformats.org/drawingml/2006/main"/>
           <a:lstStyle xmlns:a="http://schemas.openxmlformats.org/drawingml/2006/main"/>
           <a:p xmlns:a="http://schemas.openxmlformats.org/drawingml/2006/main">
+            <a:r>
+              <a:t>Exec-form ENTRYPOINT + CMD: docker run image arg mengganti argumen CMD; docker run --entrypoint executable image mengganti ENTRYPOINT. Shell form memiliki perilaku sinyal/argumen berbeda. CMD terakhir yang berlaku. https://docs.docker.com/reference/dockerfile/#entrypoint</a:t>
+            </a:r>
             <a:endParaRPr/>
           </a:p>
         </p:txBody>
@@ -649,6 +655,9 @@
           <a:bodyPr xmlns:a="http://schemas.openxmlformats.org/drawingml/2006/main"/>
           <a:lstStyle xmlns:a="http://schemas.openxmlformats.org/drawingml/2006/main"/>
           <a:p xmlns:a="http://schemas.openxmlformats.org/drawingml/2006/main">
+            <a:r>
+              <a:t>Setiap RUN baru mulai dari WORKDIR image, bukan hasil cd proses sebelumnya. ADD mengekstrak tar lokal yang dikenal dan mendukung HTTP/Git. URL arsip tidak otomatis diekstrak. Periksa checksum dan izin sumber remote. https://docs.docker.com/reference/dockerfile/#add</a:t>
+            </a:r>
             <a:endParaRPr/>
           </a:p>
         </p:txBody>
@@ -717,6 +726,9 @@
           <a:bodyPr xmlns:a="http://schemas.openxmlformats.org/drawingml/2006/main"/>
           <a:lstStyle xmlns:a="http://schemas.openxmlformats.org/drawingml/2006/main"/>
           <a:p xmlns:a="http://schemas.openxmlformats.org/drawingml/2006/main">
+            <a:r>
+              <a:t>ARG memiliki scope build dan tidak otomatis menjadi environment runtime. Nilai dapat berada pada history/provenance atau artefak yang dibuat. ARG tanpa default bisa kosong; aplikasi build harus memvalidasi jika wajib. ENV juga digunakan oleh instruksi build sesudah deklarasi. Keduanya tidak cocok untuk build secrets. https://docs.docker.com/build/building/variables/ https://docs.docker.com/build/building/secrets/</a:t>
+            </a:r>
             <a:endParaRPr/>
           </a:p>
         </p:txBody>
@@ -785,6 +797,9 @@
           <a:bodyPr xmlns:a="http://schemas.openxmlformats.org/drawingml/2006/main"/>
           <a:lstStyle xmlns:a="http://schemas.openxmlformats.org/drawingml/2006/main"/>
           <a:p xmlns:a="http://schemas.openxmlformats.org/drawingml/2006/main">
+            <a:r>
+              <a:t>EXPOSE adalah metadata; -p melakukan publish port. USER app pada contoh Alpine memerlukan user yang telah dibuat. Probe curl memerlukan curl terpasang dan endpoint /health tersedia. Exit0 sehat, exit1 tidak sehat. Docker standalone tidak otomatis restart karena unhealthy. https://docs.docker.com/reference/dockerfile/#healthcheck</a:t>
+            </a:r>
             <a:endParaRPr/>
           </a:p>
         </p:txBody>
@@ -921,6 +936,9 @@
           <a:bodyPr xmlns:a="http://schemas.openxmlformats.org/drawingml/2006/main"/>
           <a:lstStyle xmlns:a="http://schemas.openxmlformats.org/drawingml/2006/main"/>
           <a:p xmlns:a="http://schemas.openxmlformats.org/drawingml/2006/main">
+            <a:r>
+              <a:t>BuildKit menyusun graf stage, memakai cache, mentransfer input secara efisien dan dapat melewati file/stage yang tak digunakan. Tidak setiap baris menghasilkan filesystem layer. https://docs.docker.com/build/buildkit/ https://docs.docker.com/build/concepts/context/</a:t>
+            </a:r>
             <a:endParaRPr/>
           </a:p>
         </p:txBody>
@@ -989,6 +1007,9 @@
           <a:bodyPr xmlns:a="http://schemas.openxmlformats.org/drawingml/2006/main"/>
           <a:lstStyle xmlns:a="http://schemas.openxmlformats.org/drawingml/2006/main"/>
           <a:p xmlns:a="http://schemas.openxmlformats.org/drawingml/2006/main">
+            <a:r>
+              <a:t>COPY input dan instruksi memengaruhi cache. RUN biasanya tidak memeriksa ulang perubahan repository paket bila cache dipakai. --no-cache membuang cache langkah; --pull memeriksa base image baru. https://docs.docker.com/build/cache/invalidation/ https://docs.docker.com/build/cache/optimize/</a:t>
+            </a:r>
             <a:endParaRPr/>
           </a:p>
         </p:txBody>
@@ -1057,6 +1078,9 @@
           <a:bodyPr xmlns:a="http://schemas.openxmlformats.org/drawingml/2006/main"/>
           <a:lstStyle xmlns:a="http://schemas.openxmlformats.org/drawingml/2006/main"/>
           <a:p xmlns:a="http://schemas.openxmlformats.org/drawingml/2006/main">
+            <a:r>
+              <a:t>Pola ignore adalah contoh Node, perlu disesuaikan jika aplikasi memakai docs/tests/build artifact saat runtime. .dockerignore membatasi context/COPY, tidak menghapus secret yang sengaja ditulis lewat ENV/ARG/RUN. https://docs.docker.com/build/concepts/context/#dockerignore-files</a:t>
+            </a:r>
             <a:endParaRPr/>
           </a:p>
         </p:txBody>
@@ -1125,6 +1149,9 @@
           <a:bodyPr xmlns:a="http://schemas.openxmlformats.org/drawingml/2006/main"/>
           <a:lstStyle xmlns:a="http://schemas.openxmlformats.org/drawingml/2006/main"/>
           <a:p xmlns:a="http://schemas.openxmlformats.org/drawingml/2006/main">
+            <a:r>
+              <a:t>Ukuran image harus diukur untuk tag, platform, dan aplikasi yang sama. Pengurangan ukuran tidak menjamin performa atau keamanan. https://docs.docker.com/build/building/best-practices/</a:t>
+            </a:r>
             <a:endParaRPr/>
           </a:p>
         </p:txBody>
@@ -1193,6 +1220,9 @@
           <a:bodyPr xmlns:a="http://schemas.openxmlformats.org/drawingml/2006/main"/>
           <a:lstStyle xmlns:a="http://schemas.openxmlformats.org/drawingml/2006/main"/>
           <a:p xmlns:a="http://schemas.openxmlformats.org/drawingml/2006/main">
+            <a:r>
+              <a:t>Angka ukuran universal dihindari. Bandingkan docker image ls atau docker image inspect setelah menarik/build untuk platform yang sama. Alpine memakai musl; native library dapat membutuhkan penyesuaian. Distroless berisi komponen runtime/distro minimal tanpa shell/package manager standar. https://github.com/nodejs/docker-node/blob/main/README.md https://github.com/GoogleContainerTools/distroless</a:t>
+            </a:r>
             <a:endParaRPr/>
           </a:p>
         </p:txBody>
@@ -1261,6 +1291,9 @@
           <a:bodyPr xmlns:a="http://schemas.openxmlformats.org/drawingml/2006/main"/>
           <a:lstStyle xmlns:a="http://schemas.openxmlformats.org/drawingml/2006/main"/>
           <a:p xmlns:a="http://schemas.openxmlformats.org/drawingml/2006/main">
+            <a:r>
+              <a:t>Alur kelas: 0–10 menit recap/kasus; 10–35 menit Dockerfile; 35–55 menit cache/context; 55–70 menit multi-stage; 70–85 menit tag/keamanan; 85–100 menit persiapan Lab05. RPS sesi5 F2F LO2 Design.</a:t>
+            </a:r>
             <a:endParaRPr/>
           </a:p>
         </p:txBody>
@@ -1329,6 +1362,9 @@
           <a:bodyPr xmlns:a="http://schemas.openxmlformats.org/drawingml/2006/main"/>
           <a:lstStyle xmlns:a="http://schemas.openxmlformats.org/drawingml/2006/main"/>
           <a:p xmlns:a="http://schemas.openxmlformats.org/drawingml/2006/main">
+            <a:r>
+              <a:t>Multi-stage hanya menyalin artefak runtime yang dipilih. Ukuran akhir bergantung base dan dependency. Dalam Lab05, venv dibuat pada builder Python3.12-slim dan disalin ke runtime Python3.12-slim. https://docs.docker.com/build/building/multi-stage/</a:t>
+            </a:r>
             <a:endParaRPr/>
           </a:p>
         </p:txBody>
@@ -1397,6 +1433,9 @@
           <a:bodyPr xmlns:a="http://schemas.openxmlformats.org/drawingml/2006/main"/>
           <a:lstStyle xmlns:a="http://schemas.openxmlformats.org/drawingml/2006/main"/>
           <a:p xmlns:a="http://schemas.openxmlformats.org/drawingml/2006/main">
+            <a:r>
+              <a:t>Kode runnable: https://github.com/SeedFlora/meet5CloudService/tree/main/examples/theory-node . Build memakai -f Dockerfile.multistage. npm run build menghasilkan dist/server.js dengan menyalin source demo; aplikasi riil bisa memakai compiler TypeScript/bundler. Kedua stage Debian Bookworm. USER node UID1000. Kedua contoh Node dibuild/diuji 8Okt2026. Simple Alpine dan multi-stage Debian berbeda keluarga base sehingga ukuran keduanya bukan perbandingan terkendali tentang manfaat multi-stage. https://docs.docker.com/build/building/multi-stage/ https://docs.npmjs.com/cli/commands/npm-ci</a:t>
+            </a:r>
             <a:endParaRPr/>
           </a:p>
         </p:txBody>
@@ -1465,6 +1504,9 @@
           <a:bodyPr xmlns:a="http://schemas.openxmlformats.org/drawingml/2006/main"/>
           <a:lstStyle xmlns:a="http://schemas.openxmlformats.org/drawingml/2006/main"/>
           <a:p xmlns:a="http://schemas.openxmlformats.org/drawingml/2006/main">
+            <a:r>
+              <a:t>Build secret: docker build --secret id=token,src=token.txt .; Dockerfile memakai RUN --mount=type=secret,id=token ... dan membaca /run/secrets/token hanya selama RUN. Jangan menyalin secret ke output atau log. Runtime secret berbeda dari build secret. https://docs.docker.com/build/building/secrets/ https://docs.docker.com/build/building/best-practices/</a:t>
+            </a:r>
             <a:endParaRPr/>
           </a:p>
         </p:txBody>
@@ -1601,6 +1643,9 @@
           <a:bodyPr xmlns:a="http://schemas.openxmlformats.org/drawingml/2006/main"/>
           <a:lstStyle xmlns:a="http://schemas.openxmlformats.org/drawingml/2006/main"/>
           <a:p xmlns:a="http://schemas.openxmlformats.org/drawingml/2006/main">
+            <a:r>
+              <a:t>Nama tag, termasuk semver dan commit SHA, dapat ditimpa. Image digest sha256 mengidentifikasi konten. Rebuild commit yang sama dengan dependency/base baru dapat memberi image berbeda. https://docs.docker.com/reference/cli/docker/image/tag/ https://docs.docker.com/reference/cli/docker/image/pull/</a:t>
+            </a:r>
             <a:endParaRPr/>
           </a:p>
         </p:txBody>
@@ -1669,6 +1714,9 @@
           <a:bodyPr xmlns:a="http://schemas.openxmlformats.org/drawingml/2006/main"/>
           <a:lstStyle xmlns:a="http://schemas.openxmlformats.org/drawingml/2006/main"/>
           <a:p xmlns:a="http://schemas.openxmlformats.org/drawingml/2006/main">
+            <a:r>
+              <a:t>Docker Hub menjadi jalur RPS: tag ulang image lokal, login, push, pull. Buat repository/akun sendiri bila akan mencoba. Ini opsional dan tidak menjadi tugas lab. GHCR alternatif: PAT classic write:packages untuk login manual; GITHUB_TOKEN digunakan pada workflow sesuai izin. Paket pertama biasanya private. Path image tidak wajib sama nama repo Git; hubungkan dengan org.opencontainers.image.source. https://docs.docker.com/get-started/introduction/publish-your-image/ https://docs.github.com/en/packages/working-with-a-github-packages-registry/working-with-the-container-registry</a:t>
+            </a:r>
             <a:endParaRPr/>
           </a:p>
         </p:txBody>
@@ -1805,6 +1853,9 @@
           <a:bodyPr xmlns:a="http://schemas.openxmlformats.org/drawingml/2006/main"/>
           <a:lstStyle xmlns:a="http://schemas.openxmlformats.org/drawingml/2006/main"/>
           <a:p xmlns:a="http://schemas.openxmlformats.org/drawingml/2006/main">
+            <a:r>
+              <a:t>Non-root memperkecil dampak, tetapi bukan isolasi sempurna. Kernel, capabilities, mounts, user namespace dan konfigurasi daemon memengaruhi risiko. Proses exit terdeteksi Docker; HEALTHCHECK menambah status kesehatan aplikasi yang masih running. https://docs.docker.com/engine/security/ https://docs.docker.com/reference/dockerfile/#healthcheck</a:t>
+            </a:r>
             <a:endParaRPr/>
           </a:p>
         </p:txBody>
@@ -1873,6 +1924,9 @@
           <a:bodyPr xmlns:a="http://schemas.openxmlformats.org/drawingml/2006/main"/>
           <a:lstStyle xmlns:a="http://schemas.openxmlformats.org/drawingml/2006/main"/>
           <a:p xmlns:a="http://schemas.openxmlformats.org/drawingml/2006/main">
+            <a:r>
+              <a:t>Contoh Alpine menggunakan addgroup/adduser dan wget BusyBox yang tersedia pada base. Node24 masih didukung saat kelas. Server harus listen 0.0.0.0:3000 dan menyediakan /health. Pin digest untuk identitas base; perbarui dan scan secara berkala. https://docs.docker.com/build/building/best-practices/ https://docs.docker.com/reference/dockerfile/</a:t>
+            </a:r>
             <a:endParaRPr/>
           </a:p>
         </p:txBody>
@@ -1941,6 +1995,9 @@
           <a:bodyPr xmlns:a="http://schemas.openxmlformats.org/drawingml/2006/main"/>
           <a:lstStyle xmlns:a="http://schemas.openxmlformats.org/drawingml/2006/main"/>
           <a:p xmlns:a="http://schemas.openxmlformats.org/drawingml/2006/main">
+            <a:r>
+              <a:t>Output scanner harus berasal dari image dan database CVE yang dipakai saat scan. Status severity memerlukan penilaian paket/versi perbaikan dan jalur eksploitasi. Scanner tidak membuktikan image sepenuhnya aman. https://trivy.dev/latest/docs/target/container_image/ https://docs.docker.com/scout/ https://github.com/anchore/grype</a:t>
+            </a:r>
             <a:endParaRPr/>
           </a:p>
         </p:txBody>
@@ -2009,6 +2066,9 @@
           <a:bodyPr xmlns:a="http://schemas.openxmlformats.org/drawingml/2006/main"/>
           <a:lstStyle xmlns:a="http://schemas.openxmlformats.org/drawingml/2006/main"/>
           <a:p xmlns:a="http://schemas.openxmlformats.org/drawingml/2006/main">
+            <a:r>
+              <a:t>RPS COMP6991031 halaman3 sesi5 LO2 Design. C3 diterapkan saat memilih instruksi, membangun image, lalu menguji perilaku API. Lab05 halaman5 mendukung Node/Python, env, multi-stage, tag dan Docker Hub.</a:t>
+            </a:r>
             <a:endParaRPr/>
           </a:p>
         </p:txBody>
@@ -2077,6 +2137,9 @@
           <a:bodyPr xmlns:a="http://schemas.openxmlformats.org/drawingml/2006/main"/>
           <a:lstStyle xmlns:a="http://schemas.openxmlformats.org/drawingml/2006/main"/>
           <a:p xmlns:a="http://schemas.openxmlformats.org/drawingml/2006/main">
+            <a:r>
+              <a:t>--pull berbeda dari --no-cache. COPY --from membutuhkan source dan destination. Image prune menghapus image dangling; hindari prune massal pada komputer bersama. https://docs.docker.com/reference/dockerfile/ https://docs.docker.com/reference/cli/docker/buildx/build/</a:t>
+            </a:r>
             <a:endParaRPr/>
           </a:p>
         </p:txBody>
@@ -2145,6 +2208,9 @@
           <a:bodyPr xmlns:a="http://schemas.openxmlformats.org/drawingml/2006/main"/>
           <a:lstStyle xmlns:a="http://schemas.openxmlformats.org/drawingml/2006/main"/>
           <a:p xmlns:a="http://schemas.openxmlformats.org/drawingml/2006/main">
+            <a:r>
+              <a:t>Pertanyaan cek pemahaman: apakah EXPOSE membuka port host? Mengapa source berubah tidak harus memasang dependency ulang? Bagaimana tag berbeda dari digest? Mengapa ARG tidak dipakai untuk token? RPS sesi5 LO2 Design.</a:t>
+            </a:r>
             <a:endParaRPr/>
           </a:p>
         </p:txBody>
@@ -2214,7 +2280,7 @@
           <a:lstStyle xmlns:a="http://schemas.openxmlformats.org/drawingml/2006/main"/>
           <a:p xmlns:a="http://schemas.openxmlformats.org/drawingml/2006/main">
             <a:r>
-              <a:t>Jembatan ke Lab 05. Repo: https://github.com/SeedFlora/meet5CloudService. RPS: COMP6991031. Periksa langkah praktik dan perintah pada README repo. Bacaan: https://docs.docker.com/get-started/docker-concepts/building-images/writing-a-dockerfile/. Video: https://www.docker.com/resources/docker-intro-and-overview-on-demand-training/.</a:t>
+              <a:t>Praktik utama: https://github.com/SeedFlora/meet5CloudService . Tunjukkan Dockerfile FastAPI, .dockerignore, APP_ENV, UID10001 dan validasi HTTP. Registry dipakai hanya bila bermanfaat untuk proyek.</a:t>
             </a:r>
           </a:p>
         </p:txBody>
@@ -2284,32 +2350,217 @@
           <a:lstStyle xmlns:a="http://schemas.openxmlformats.org/drawingml/2006/main"/>
           <a:p xmlns:a="http://schemas.openxmlformats.org/drawingml/2006/main">
             <a:r>
-              <a:t>Pemantik 2 menit: Kasus kerja: tim menerima API catatan baru. Image harus bisa dibangun ulang, dijalankan tanpa root, dan diuji sebelum rilis.</a:t>
-            </a:r>
-          </a:p>
-          <a:p xmlns:a="http://schemas.openxmlformats.org/drawingml/2006/main">
-            <a:r>
-              <a:t>Tanya kelas: Prediksi: apa yang terjadi pada catatan ketika container dihapus dan dibuat lagi?</a:t>
-            </a:r>
-          </a:p>
-          <a:p xmlns:a="http://schemas.openxmlformats.org/drawingml/2006/main">
-            <a:r>
-              <a:t>Bacaan resmi: https://docs.docker.com/get-started/docker-concepts/building-images/writing-a-dockerfile/</a:t>
-            </a:r>
-          </a:p>
-          <a:p xmlns:a="http://schemas.openxmlformats.org/drawingml/2006/main">
-            <a:r>
-              <a:t>Video resmi: https://www.docker.com/resources/docker-intro-and-overview-on-demand-training/</a:t>
-            </a:r>
-          </a:p>
-          <a:p xmlns:a="http://schemas.openxmlformats.org/drawingml/2006/main">
-            <a:r>
-              <a:t>Praktik terhubung: https://github.com/SeedFlora/meet5CloudService</a:t>
-            </a:r>
-          </a:p>
-          <a:p xmlns:a="http://schemas.openxmlformats.org/drawingml/2006/main">
-            <a:r>
-              <a:t>Ilustrasi: dibuat khusus untuk materi kelas dengan imagegen, bukan foto atau bukti hasil lab. Verifikasi tautan sumber dilakukan 8 Oktober 2026; pemutaran stream video tidak diuji. Lokasi dan harga layanan dapat berubah. Untuk P08, INP menggantikan FID sebagai Core Web Vital (https://web.dev/articles/inp).</a:t>
+              <a:t>Kasus kerja: tim menerima API catatan baru. Tanya mengapa data hilang saat proses restart. Bacaan: https://docs.docker.com/get-started/docker-concepts/building-images/writing-a-dockerfile/ Video pengantar: https://www.docker.com/resources/docker-intro-and-overview-on-demand-training/ . Pilih bagian containerizing an application. Repo: https://github.com/SeedFlora/meet5CloudService . Ilustrasi dibuat khusus untuk materi kelas; bukan bukti hasil lab. Proyek kelompok3 dipresentasikan minggu7 dan14.</a:t>
+            </a:r>
+          </a:p>
+        </p:txBody>
+      </p:sp>
+      <p:sp>
+        <p:nvSpPr>
+          <p:cNvPr id="4" name="Slide Number Placeholder 3"/>
+          <p:cNvSpPr>
+            <a:spLocks xmlns:a="http://schemas.openxmlformats.org/drawingml/2006/main" noGrp="1"/>
+          </p:cNvSpPr>
+          <p:nvPr>
+            <p:ph type="sldNum" idx="5"/>
+          </p:nvPr>
+        </p:nvSpPr>
+        <p:spPr/>
+        <p:txBody>
+          <a:bodyPr xmlns:a="http://schemas.openxmlformats.org/drawingml/2006/main"/>
+          <a:lstStyle xmlns:a="http://schemas.openxmlformats.org/drawingml/2006/main"/>
+          <a:p xmlns:a="http://schemas.openxmlformats.org/drawingml/2006/main"/>
+        </p:txBody>
+      </p:sp>
+    </p:spTree>
+  </p:cSld>
+  <p:clrMapOvr>
+    <a:masterClrMapping xmlns:a="http://schemas.openxmlformats.org/drawingml/2006/main"/>
+  </p:clrMapOvr>
+</p:notes>
+</file>
+
+<file path=ppt/notesSlides/notesSlide34.xml><?xml version="1.0" encoding="utf-8"?>
+<p:notes xmlns:p="http://schemas.openxmlformats.org/presentationml/2006/main">
+  <p:cSld>
+    <p:spTree>
+      <p:nvGrpSpPr>
+        <p:cNvPr id="1" name=""/>
+        <p:cNvGrpSpPr/>
+        <p:nvPr/>
+      </p:nvGrpSpPr>
+      <p:grpSpPr>
+        <a:xfrm xmlns:a="http://schemas.openxmlformats.org/drawingml/2006/main"/>
+      </p:grpSpPr>
+      <p:sp>
+        <p:nvSpPr>
+          <p:cNvPr id="2" name="Slide Image Placeholder 1"/>
+          <p:cNvSpPr>
+            <a:spLocks xmlns:a="http://schemas.openxmlformats.org/drawingml/2006/main" noGrp="1"/>
+          </p:cNvSpPr>
+          <p:nvPr>
+            <p:ph type="sldImg" idx="0"/>
+          </p:nvPr>
+        </p:nvSpPr>
+        <p:spPr/>
+      </p:sp>
+      <p:sp>
+        <p:nvSpPr>
+          <p:cNvPr id="3" name="Notes Placeholder 2"/>
+          <p:cNvSpPr>
+            <a:spLocks xmlns:a="http://schemas.openxmlformats.org/drawingml/2006/main" noGrp="1"/>
+          </p:cNvSpPr>
+          <p:nvPr>
+            <p:ph type="body" idx="1"/>
+          </p:nvPr>
+        </p:nvSpPr>
+        <p:spPr/>
+        <p:txBody>
+          <a:bodyPr xmlns:a="http://schemas.openxmlformats.org/drawingml/2006/main"/>
+          <a:lstStyle xmlns:a="http://schemas.openxmlformats.org/drawingml/2006/main"/>
+          <a:p xmlns:a="http://schemas.openxmlformats.org/drawingml/2006/main">
+            <a:r>
+              <a:t>Screenshot output aktual lab ditata ulang agar terbaca. Tunjukkan sumber Dockerfile di https://github.com/SeedFlora/meet5CloudService . FROM Python3.12-slim yang sama menjaga kesesuaian interpreter/libc saat venv disalin. dependencies fastapi/uvicorn dipin pada requirements.txt, namun dependency transitif belum dikunci penuh. USER10001 mengurangi privilege. .dockerignore membatasi context. Tahap builder tidak berisi compiler; ini contoh pemisahan dependency/runtime, bukan janji image pasti lebih kecil. https://docs.docker.com/build/building/multi-stage/</a:t>
+            </a:r>
+          </a:p>
+        </p:txBody>
+      </p:sp>
+      <p:sp>
+        <p:nvSpPr>
+          <p:cNvPr id="4" name="Slide Number Placeholder 3"/>
+          <p:cNvSpPr>
+            <a:spLocks xmlns:a="http://schemas.openxmlformats.org/drawingml/2006/main" noGrp="1"/>
+          </p:cNvSpPr>
+          <p:nvPr>
+            <p:ph type="sldNum" idx="5"/>
+          </p:nvPr>
+        </p:nvSpPr>
+        <p:spPr/>
+        <p:txBody>
+          <a:bodyPr xmlns:a="http://schemas.openxmlformats.org/drawingml/2006/main"/>
+          <a:lstStyle xmlns:a="http://schemas.openxmlformats.org/drawingml/2006/main"/>
+          <a:p xmlns:a="http://schemas.openxmlformats.org/drawingml/2006/main"/>
+        </p:txBody>
+      </p:sp>
+    </p:spTree>
+  </p:cSld>
+  <p:clrMapOvr>
+    <a:masterClrMapping xmlns:a="http://schemas.openxmlformats.org/drawingml/2006/main"/>
+  </p:clrMapOvr>
+</p:notes>
+</file>
+
+<file path=ppt/notesSlides/notesSlide35.xml><?xml version="1.0" encoding="utf-8"?>
+<p:notes xmlns:p="http://schemas.openxmlformats.org/presentationml/2006/main">
+  <p:cSld>
+    <p:spTree>
+      <p:nvGrpSpPr>
+        <p:cNvPr id="1" name=""/>
+        <p:cNvGrpSpPr/>
+        <p:nvPr/>
+      </p:nvGrpSpPr>
+      <p:grpSpPr>
+        <a:xfrm xmlns:a="http://schemas.openxmlformats.org/drawingml/2006/main"/>
+      </p:grpSpPr>
+      <p:sp>
+        <p:nvSpPr>
+          <p:cNvPr id="2" name="Slide Image Placeholder 1"/>
+          <p:cNvSpPr>
+            <a:spLocks xmlns:a="http://schemas.openxmlformats.org/drawingml/2006/main" noGrp="1"/>
+          </p:cNvSpPr>
+          <p:nvPr>
+            <p:ph type="sldImg" idx="0"/>
+          </p:nvPr>
+        </p:nvSpPr>
+        <p:spPr/>
+      </p:sp>
+      <p:sp>
+        <p:nvSpPr>
+          <p:cNvPr id="3" name="Notes Placeholder 2"/>
+          <p:cNvSpPr>
+            <a:spLocks xmlns:a="http://schemas.openxmlformats.org/drawingml/2006/main" noGrp="1"/>
+          </p:cNvSpPr>
+          <p:nvPr>
+            <p:ph type="body" idx="1"/>
+          </p:nvPr>
+        </p:nvSpPr>
+        <p:spPr/>
+        <p:txBody>
+          <a:bodyPr xmlns:a="http://schemas.openxmlformats.org/drawingml/2006/main"/>
+          <a:lstStyle xmlns:a="http://schemas.openxmlformats.org/drawingml/2006/main"/>
+          <a:p xmlns:a="http://schemas.openxmlformats.org/drawingml/2006/main">
+            <a:r>
+              <a:t>Screenshot berasal dari output HTTP aktual lab yang ditata ulang; bukan screenshot browser. README memberi perintah PowerShell/Bash lengkap. Tunjukkan docker logs &lt;container&gt; dan docker exec &lt;container&gt; id. GET /docs membuka Swagger. APP_ENV terlihat pada /runtime. Endpoint /health hanya memeriksa proses API, belum database. Data _notes berada dalam memori Python sehingga docker restart pun menghapus catatan. Volume saja tidak membuat dict Python menjadi persisten; perlu menulis data ke file/database. Jalankan API browser http://127.0.0.1:8000/docs . Repo https://github.com/SeedFlora/meet5CloudService</a:t>
+            </a:r>
+          </a:p>
+        </p:txBody>
+      </p:sp>
+      <p:sp>
+        <p:nvSpPr>
+          <p:cNvPr id="4" name="Slide Number Placeholder 3"/>
+          <p:cNvSpPr>
+            <a:spLocks xmlns:a="http://schemas.openxmlformats.org/drawingml/2006/main" noGrp="1"/>
+          </p:cNvSpPr>
+          <p:nvPr>
+            <p:ph type="sldNum" idx="5"/>
+          </p:nvPr>
+        </p:nvSpPr>
+        <p:spPr/>
+        <p:txBody>
+          <a:bodyPr xmlns:a="http://schemas.openxmlformats.org/drawingml/2006/main"/>
+          <a:lstStyle xmlns:a="http://schemas.openxmlformats.org/drawingml/2006/main"/>
+          <a:p xmlns:a="http://schemas.openxmlformats.org/drawingml/2006/main"/>
+        </p:txBody>
+      </p:sp>
+    </p:spTree>
+  </p:cSld>
+  <p:clrMapOvr>
+    <a:masterClrMapping xmlns:a="http://schemas.openxmlformats.org/drawingml/2006/main"/>
+  </p:clrMapOvr>
+</p:notes>
+</file>
+
+<file path=ppt/notesSlides/notesSlide36.xml><?xml version="1.0" encoding="utf-8"?>
+<p:notes xmlns:p="http://schemas.openxmlformats.org/presentationml/2006/main">
+  <p:cSld>
+    <p:spTree>
+      <p:nvGrpSpPr>
+        <p:cNvPr id="1" name=""/>
+        <p:cNvGrpSpPr/>
+        <p:nvPr/>
+      </p:nvGrpSpPr>
+      <p:grpSpPr>
+        <a:xfrm xmlns:a="http://schemas.openxmlformats.org/drawingml/2006/main"/>
+      </p:grpSpPr>
+      <p:sp>
+        <p:nvSpPr>
+          <p:cNvPr id="2" name="Slide Image Placeholder 1"/>
+          <p:cNvSpPr>
+            <a:spLocks xmlns:a="http://schemas.openxmlformats.org/drawingml/2006/main" noGrp="1"/>
+          </p:cNvSpPr>
+          <p:nvPr>
+            <p:ph type="sldImg" idx="0"/>
+          </p:nvPr>
+        </p:nvSpPr>
+        <p:spPr/>
+      </p:sp>
+      <p:sp>
+        <p:nvSpPr>
+          <p:cNvPr id="3" name="Notes Placeholder 2"/>
+          <p:cNvSpPr>
+            <a:spLocks xmlns:a="http://schemas.openxmlformats.org/drawingml/2006/main" noGrp="1"/>
+          </p:cNvSpPr>
+          <p:nvPr>
+            <p:ph type="body" idx="1"/>
+          </p:nvPr>
+        </p:nvSpPr>
+        <p:spPr/>
+        <p:txBody>
+          <a:bodyPr xmlns:a="http://schemas.openxmlformats.org/drawingml/2006/main"/>
+          <a:lstStyle xmlns:a="http://schemas.openxmlformats.org/drawingml/2006/main"/>
+          <a:p xmlns:a="http://schemas.openxmlformats.org/drawingml/2006/main">
+            <a:r>
+              <a:t>Screenshot browser Chrome Budi diambil langsung saat audit kelas 8Okt2026. Container cloudlab-week05-review dibuild dari kode Lab05 lalu dijalankan dengan -p 127.0.0.1:18005:8000 -e APP_ENV=classroom. Uji browser: /docs -&gt; GET /health -&gt; Try it out -&gt; Execute. Screenshot respons 200 bukan hasil contoh yang diketik ulang. Perintah curl -i menunjukkan header dan body; Windows memakai curl.exe. Port utama panduan8000, port18005 dipakai hanya agar tidak berbenturan. /health menunjukkan liveness API, bukan kesiapan database. Semua respons FastAPI utama diverifikasi: health200, runtime200, docs200, create201, blank422, missing404; UID10001; restart mengosongkan memory.</a:t>
             </a:r>
           </a:p>
         </p:txBody>
@@ -2446,6 +2697,9 @@
           <a:bodyPr xmlns:a="http://schemas.openxmlformats.org/drawingml/2006/main"/>
           <a:lstStyle xmlns:a="http://schemas.openxmlformats.org/drawingml/2006/main"/>
           <a:p xmlns:a="http://schemas.openxmlformats.org/drawingml/2006/main">
+            <a:r>
+              <a:t>Bedakan layer filesystem dari konfigurasi image. Dockerfile saja tidak mengunci seluruh input. https://docs.docker.com/reference/dockerfile/ https://docs.docker.com/build/building/best-practices/</a:t>
+            </a:r>
             <a:endParaRPr/>
           </a:p>
         </p:txBody>
@@ -2514,6 +2768,9 @@
           <a:bodyPr xmlns:a="http://schemas.openxmlformats.org/drawingml/2006/main"/>
           <a:lstStyle xmlns:a="http://schemas.openxmlformats.org/drawingml/2006/main"/>
           <a:p xmlns:a="http://schemas.openxmlformats.org/drawingml/2006/main">
+            <a:r>
+              <a:t>Empat belas instruksi pada slide adalah subset yang dipilih untuk sesi ini, bukan seluruh instruction set Dockerfile. USER dapat menunjuk root/non-root. https://docs.docker.com/reference/dockerfile/</a:t>
+            </a:r>
             <a:endParaRPr/>
           </a:p>
         </p:txBody>
@@ -2582,6 +2839,9 @@
           <a:bodyPr xmlns:a="http://schemas.openxmlformats.org/drawingml/2006/main"/>
           <a:lstStyle xmlns:a="http://schemas.openxmlformats.org/drawingml/2006/main"/>
           <a:p xmlns:a="http://schemas.openxmlformats.org/drawingml/2006/main">
+            <a:r>
+              <a:t>Kode runnable lengkap: https://github.com/SeedFlora/meet5CloudService/tree/main/examples/theory-node . Pindah ke folder itu sebelum build. README memberi perintah satu baris yang bekerja pada Bash maupun PowerShell; untuk Windows gunakan curl.exe. Server listen 0.0.0.0:3000. npm ci memerlukan lockfile yang cocok. Contoh pengantar ini memakai UID0; slide21 menambahkan USER node. Lab05 utama memakai FastAPI. Node24 didukung pada tanggal kelas. https://nodejs.org/en/about/previous-releases https://docs.npmjs.com/cli/commands/npm-ci https://docs.docker.com/reference/dockerfile/</a:t>
+            </a:r>
             <a:endParaRPr/>
           </a:p>
         </p:txBody>
@@ -2718,6 +2978,9 @@
           <a:bodyPr xmlns:a="http://schemas.openxmlformats.org/drawingml/2006/main"/>
           <a:lstStyle xmlns:a="http://schemas.openxmlformats.org/drawingml/2006/main"/>
           <a:p xmlns:a="http://schemas.openxmlformats.org/drawingml/2006/main">
+            <a:r>
+              <a:t>FROM memulai stage dan boleh didahului ARG global, komentar atau parser directive. Tag versi tetap mutable. Digest mengidentifikasi konten image; pembaruan keamanan tetap harus dilakukan. Official Image tidak memberi jaminan bebas celah. https://docs.docker.com/reference/dockerfile/ https://docs.docker.com/build/building/best-practices/ https://github.com/GoogleContainerTools/distroless</a:t>
+            </a:r>
             <a:endParaRPr/>
           </a:p>
         </p:txBody>
@@ -2807,8 +3070,8 @@
   </p:cSld>
   <p:clrMap bg1="lt1" tx1="dk1" bg2="lt2" tx2="dk2" accent1="accent1" accent2="accent2" accent3="accent3" accent4="accent4" accent5="accent5" accent6="accent6" hlink="hlink" folHlink="folHlink"/>
   <p:sldLayoutIdLst>
-    <p:sldLayoutId xmlns:r="http://schemas.openxmlformats.org/officeDocument/2006/relationships" id="2147483649" r:id="R73a1200f7eef4ba1"/>
-    <p:sldLayoutId xmlns:r="http://schemas.openxmlformats.org/officeDocument/2006/relationships" id="2147483650" r:id="Rf0b55ecfe9cd4e2c"/>
+    <p:sldLayoutId xmlns:r="http://schemas.openxmlformats.org/officeDocument/2006/relationships" id="2147483649" r:id="R23b7a4d2e68e45d2"/>
+    <p:sldLayoutId xmlns:r="http://schemas.openxmlformats.org/officeDocument/2006/relationships" id="2147483650" r:id="Red37408ebad7459a"/>
   </p:sldLayoutIdLst>
   <p:hf sldNum="0" hdr="0" ftr="0" dt="0"/>
   <p:txStyles>
@@ -3361,7 +3624,7 @@
     <p:bg>
       <p:bgPr>
         <a:blipFill xmlns:a="http://schemas.openxmlformats.org/drawingml/2006/main" rotWithShape="1">
-          <a:blip xmlns:r="http://schemas.openxmlformats.org/officeDocument/2006/relationships" r:embed="R8694aa2e952e4ff8">
+          <a:blip xmlns:r="http://schemas.openxmlformats.org/officeDocument/2006/relationships" r:embed="R7ff13cfb80b0452a">
             <a:lum/>
           </a:blip>
           <a:srcRect l="0" t="0" r="0" b="0"/>
@@ -3389,7 +3652,7 @@
           <p:nvPr/>
         </p:nvPicPr>
         <p:blipFill>
-          <a:blip xmlns:r="http://schemas.openxmlformats.org/officeDocument/2006/relationships" xmlns:a="http://schemas.openxmlformats.org/drawingml/2006/main" r:embed="R7ccdc6272c5a43ab"/>
+          <a:blip xmlns:r="http://schemas.openxmlformats.org/officeDocument/2006/relationships" xmlns:a="http://schemas.openxmlformats.org/drawingml/2006/main" r:embed="Rece9b850ae4b4816"/>
           <a:stretch xmlns:a="http://schemas.openxmlformats.org/drawingml/2006/main">
             <a:fillRect l="0" t="0" r="0" b="0"/>
           </a:stretch>
@@ -3413,7 +3676,7 @@
           <p:nvPr/>
         </p:nvPicPr>
         <p:blipFill>
-          <a:blip xmlns:r="http://schemas.openxmlformats.org/officeDocument/2006/relationships" xmlns:a="http://schemas.openxmlformats.org/drawingml/2006/main" r:embed="R0442152b5eab44e8"/>
+          <a:blip xmlns:r="http://schemas.openxmlformats.org/officeDocument/2006/relationships" xmlns:a="http://schemas.openxmlformats.org/drawingml/2006/main" r:embed="R750b2b16030b4134"/>
           <a:stretch xmlns:a="http://schemas.openxmlformats.org/drawingml/2006/main">
             <a:fillRect l="0" t="0" r="0" b="0"/>
           </a:stretch>
@@ -3900,7 +4163,7 @@
           <p:nvPr/>
         </p:nvPicPr>
         <p:blipFill>
-          <a:blip xmlns:r="http://schemas.openxmlformats.org/officeDocument/2006/relationships" xmlns:a="http://schemas.openxmlformats.org/drawingml/2006/main" r:embed="R6340b8de297845d3"/>
+          <a:blip xmlns:r="http://schemas.openxmlformats.org/officeDocument/2006/relationships" xmlns:a="http://schemas.openxmlformats.org/drawingml/2006/main" r:embed="R8c0c25d032844d99"/>
           <a:stretch xmlns:a="http://schemas.openxmlformats.org/drawingml/2006/main">
             <a:fillRect l="0" t="0" r="0" b="0"/>
           </a:stretch>
@@ -3924,7 +4187,7 @@
           <p:nvPr/>
         </p:nvPicPr>
         <p:blipFill>
-          <a:blip xmlns:r="http://schemas.openxmlformats.org/officeDocument/2006/relationships" xmlns:a="http://schemas.openxmlformats.org/drawingml/2006/main" r:embed="R14a18906c0ba494e"/>
+          <a:blip xmlns:r="http://schemas.openxmlformats.org/officeDocument/2006/relationships" xmlns:a="http://schemas.openxmlformats.org/drawingml/2006/main" r:embed="R14f4da1f5ac9495b"/>
           <a:stretch xmlns:a="http://schemas.openxmlformats.org/drawingml/2006/main">
             <a:fillRect l="0" t="0" r="0" b="0"/>
           </a:stretch>
@@ -4260,7 +4523,7 @@
                 <a:ea typeface="Calibri"/>
                 <a:cs typeface="Calibri"/>
               </a:rPr>
-              <a:t>Eksekusi command + commit hasilnya jadi layer baru.</a:t>
+              <a:t>Jalankan command saat build. Perubahan filesystem menjadi bagian image.</a:t>
             </a:r>
             <a:endParaRPr sz="1100"/>
           </a:p>
@@ -4370,7 +4633,9 @@
           <a:noFill xmlns:a="http://schemas.openxmlformats.org/drawingml/2006/main"/>
         </p:spPr>
         <p:txBody>
-          <a:bodyPr xmlns:a="http://schemas.openxmlformats.org/drawingml/2006/main" wrap="square" anchor="t"/>
+          <a:bodyPr xmlns:a="http://schemas.openxmlformats.org/drawingml/2006/main" wrap="square" lIns="0" tIns="0" rIns="0" bIns="0" anchor="t">
+            <a:noAutofit/>
+          </a:bodyPr>
           <a:lstStyle xmlns:a="http://schemas.openxmlformats.org/drawingml/2006/main"/>
           <a:p xmlns:a="http://schemas.openxmlformats.org/drawingml/2006/main">
             <a:pPr marL="0" indent="0">
@@ -4378,17 +4643,81 @@
                 <a:spcPts val="300"/>
               </a:spcAft>
               <a:buNone/>
-            </a:pPr>
-            <a:r>
-              <a:rPr sz="1100">
-                <a:solidFill>
-                  <a:srgbClr val="10B981"/>
+              <a:defRPr sz="1200">
+                <a:solidFill>
+                  <a:srgbClr val="E5E7EB"/>
                 </a:solidFill>
                 <a:latin typeface="Consolas"/>
                 <a:ea typeface="Consolas"/>
                 <a:cs typeface="Consolas"/>
-              </a:rPr>
-              <a:t>RUN apt update &amp;&amp; apt install -y curl</a:t>
+              </a:defRPr>
+            </a:pPr>
+            <a:r>
+              <a:rPr sz="1200">
+                <a:solidFill>
+                  <a:srgbClr val="E5E7EB"/>
+                </a:solidFill>
+                <a:latin typeface="Consolas"/>
+                <a:ea typeface="Consolas"/>
+                <a:cs typeface="Consolas"/>
+              </a:rPr>
+              <a:t>RUN apt-get update &amp;&amp; \</a:t>
+            </a:r>
+            <a:endParaRPr sz="1100"/>
+          </a:p>
+          <a:p xmlns:a="http://schemas.openxmlformats.org/drawingml/2006/main">
+            <a:pPr marL="0" indent="0">
+              <a:spcAft>
+                <a:spcPts val="300"/>
+              </a:spcAft>
+              <a:buNone/>
+              <a:defRPr sz="1200">
+                <a:solidFill>
+                  <a:srgbClr val="E5E7EB"/>
+                </a:solidFill>
+                <a:latin typeface="Consolas"/>
+                <a:ea typeface="Consolas"/>
+                <a:cs typeface="Consolas"/>
+              </a:defRPr>
+            </a:pPr>
+            <a:r>
+              <a:rPr sz="1200">
+                <a:solidFill>
+                  <a:srgbClr val="E5E7EB"/>
+                </a:solidFill>
+                <a:latin typeface="Consolas"/>
+                <a:ea typeface="Consolas"/>
+                <a:cs typeface="Consolas"/>
+              </a:rPr>
+              <a:t>  apt-get install -y curl &amp;&amp; \</a:t>
+            </a:r>
+            <a:endParaRPr sz="1100"/>
+          </a:p>
+          <a:p xmlns:a="http://schemas.openxmlformats.org/drawingml/2006/main">
+            <a:pPr marL="0" indent="0">
+              <a:spcAft>
+                <a:spcPts val="300"/>
+              </a:spcAft>
+              <a:buNone/>
+              <a:defRPr sz="1200">
+                <a:solidFill>
+                  <a:srgbClr val="E5E7EB"/>
+                </a:solidFill>
+                <a:latin typeface="Consolas"/>
+                <a:ea typeface="Consolas"/>
+                <a:cs typeface="Consolas"/>
+              </a:defRPr>
+            </a:pPr>
+            <a:r>
+              <a:rPr sz="1200">
+                <a:solidFill>
+                  <a:srgbClr val="E5E7EB"/>
+                </a:solidFill>
+                <a:latin typeface="Consolas"/>
+                <a:ea typeface="Consolas"/>
+                <a:cs typeface="Consolas"/>
+              </a:rPr>
+              <a:t>  rm -rf /var/lib/apt/lists/*</a:t>
             </a:r>
             <a:endParaRPr sz="1100"/>
           </a:p>
@@ -4638,7 +4967,7 @@
                 <a:ea typeface="Calibri"/>
                 <a:cs typeface="Calibri"/>
               </a:rPr>
-              <a:t>Cuma boleh 1 CMD per Dockerfile. Bisa ditimpa argument run.</a:t>
+              <a:t>Hanya CMD terakhir berlaku. Argumen docker run dapat mengganti CMD.</a:t>
             </a:r>
             <a:endParaRPr sz="1050"/>
           </a:p>
@@ -4878,7 +5207,7 @@
                 <a:ea typeface="Calibri"/>
                 <a:cs typeface="Calibri"/>
               </a:rPr>
-              <a:t>RUNTIME wajib</a:t>
+              <a:t>RUNTIME executable</a:t>
             </a:r>
             <a:endParaRPr sz="1000"/>
           </a:p>
@@ -4924,7 +5253,7 @@
                 <a:ea typeface="Calibri"/>
                 <a:cs typeface="Calibri"/>
               </a:rPr>
-              <a:t>Command yang SELALU jalan - argument run jadi parameter ENTRYPOINT.</a:t>
+              <a:t>Exec-form ENTRYPOINT menerima argumen run. Dapat diganti dengan --entrypoint.</a:t>
             </a:r>
             <a:endParaRPr sz="1100"/>
           </a:p>
@@ -5118,51 +5447,7 @@
                 <a:ea typeface="Calibri"/>
                 <a:cs typeface="Calibri"/>
               </a:rPr>
-              <a:t>Pattern umum: </a:t>
-            </a:r>
-            <a:r>
-              <a:rPr sz="1100" b="1" i="1">
-                <a:solidFill>
-                  <a:srgbClr val="059669"/>
-                </a:solidFill>
-                <a:latin typeface="Consolas"/>
-                <a:ea typeface="Consolas"/>
-                <a:cs typeface="Consolas"/>
-              </a:rPr>
-              <a:t>ENTRYPOINT</a:t>
-            </a:r>
-            <a:r>
-              <a:rPr sz="1100" i="1">
-                <a:solidFill>
-                  <a:srgbClr val="1E293B"/>
-                </a:solidFill>
-                <a:latin typeface="Calibri"/>
-                <a:ea typeface="Calibri"/>
-                <a:cs typeface="Calibri"/>
-              </a:rPr>
-              <a:t> untuk binary (e.g. node, python), </a:t>
-            </a:r>
-            <a:r>
-              <a:rPr sz="1100" b="1" i="1">
-                <a:solidFill>
-                  <a:srgbClr val="F37021"/>
-                </a:solidFill>
-                <a:latin typeface="Consolas"/>
-                <a:ea typeface="Consolas"/>
-                <a:cs typeface="Consolas"/>
-              </a:rPr>
-              <a:t>CMD</a:t>
-            </a:r>
-            <a:r>
-              <a:rPr sz="1100" i="1">
-                <a:solidFill>
-                  <a:srgbClr val="1E293B"/>
-                </a:solidFill>
-                <a:latin typeface="Calibri"/>
-                <a:ea typeface="Calibri"/>
-                <a:cs typeface="Calibri"/>
-              </a:rPr>
-              <a:t> untuk default argument (e.g. server.js). Bisa di-override saat run.</a:t>
+              <a:t>ENTRYPOINT menentukan executable default. CMD menyediakan command atau argumen default. Gunakan exec form untuk penerusan sinyal.</a:t>
             </a:r>
             <a:endParaRPr sz="1100"/>
           </a:p>
@@ -5331,7 +5616,7 @@
           <p:nvPr/>
         </p:nvPicPr>
         <p:blipFill>
-          <a:blip xmlns:r="http://schemas.openxmlformats.org/officeDocument/2006/relationships" xmlns:a="http://schemas.openxmlformats.org/drawingml/2006/main" r:embed="R374f81ae5acc4497"/>
+          <a:blip xmlns:r="http://schemas.openxmlformats.org/officeDocument/2006/relationships" xmlns:a="http://schemas.openxmlformats.org/drawingml/2006/main" r:embed="R6c7b51c777ae45d8"/>
           <a:stretch xmlns:a="http://schemas.openxmlformats.org/drawingml/2006/main">
             <a:fillRect l="0" t="0" r="0" b="0"/>
           </a:stretch>
@@ -5355,7 +5640,7 @@
           <p:nvPr/>
         </p:nvPicPr>
         <p:blipFill>
-          <a:blip xmlns:r="http://schemas.openxmlformats.org/officeDocument/2006/relationships" xmlns:a="http://schemas.openxmlformats.org/drawingml/2006/main" r:embed="R3fbb27eddf32441b"/>
+          <a:blip xmlns:r="http://schemas.openxmlformats.org/officeDocument/2006/relationships" xmlns:a="http://schemas.openxmlformats.org/drawingml/2006/main" r:embed="R4398597a1a2c49d3"/>
           <a:stretch xmlns:a="http://schemas.openxmlformats.org/drawingml/2006/main">
             <a:fillRect l="0" t="0" r="0" b="0"/>
           </a:stretch>
@@ -5974,7 +6259,7 @@
                 <a:ea typeface="Calibri"/>
                 <a:cs typeface="Calibri"/>
               </a:rPr>
-              <a:t>COPY + auto-extract tar/gzip + bisa download dari URL. "Magic" yang sering bikin bug.</a:t>
+              <a:t>ADD mendukung tar lokal dan sumber remote. URL arsip tidak otomatis diekstrak.</a:t>
             </a:r>
             <a:endParaRPr sz="1100"/>
           </a:p>
@@ -6148,38 +6433,7 @@
                 <a:ea typeface="Calibri"/>
                 <a:cs typeface="Calibri"/>
               </a:rPr>
-              <a:t>Rule: </a:t>
-            </a:r>
-            <a:r>
-              <a:rPr sz="1100">
-                <a:solidFill>
-                  <a:srgbClr val="1E293B"/>
-                </a:solidFill>
-                <a:latin typeface="Calibri"/>
-                <a:ea typeface="Calibri"/>
-                <a:cs typeface="Calibri"/>
-              </a:rPr>
-              <a:t>PAKAI COPY by default. Pakai ADD hanya kalau butuh auto-extract tar.</a:t>
-            </a:r>
-            <a:endParaRPr sz="1100"/>
-          </a:p>
-          <a:p xmlns:a="http://schemas.openxmlformats.org/drawingml/2006/main">
-            <a:pPr marL="0" indent="0">
-              <a:spcAft>
-                <a:spcPts val="300"/>
-              </a:spcAft>
-              <a:buNone/>
-            </a:pPr>
-            <a:r>
-              <a:rPr sz="1100" i="1">
-                <a:solidFill>
-                  <a:srgbClr val="1E293B"/>
-                </a:solidFill>
-                <a:latin typeface="Calibri"/>
-                <a:ea typeface="Calibri"/>
-                <a:cs typeface="Calibri"/>
-              </a:rPr>
-              <a:t>Untuk download URL: pakai curl/wget di RUN supaya layer-nya audit-able.</a:t>
+              <a:t>COPY untuk file lokal. ADD bila perlu tar/remote. ADD --checksum memverifikasi sumber HTTP.</a:t>
             </a:r>
             <a:endParaRPr sz="1100"/>
           </a:p>
@@ -6546,7 +6800,9 @@
           <a:noFill xmlns:a="http://schemas.openxmlformats.org/drawingml/2006/main"/>
         </p:spPr>
         <p:txBody>
-          <a:bodyPr xmlns:a="http://schemas.openxmlformats.org/drawingml/2006/main" wrap="square" lIns="0" tIns="0" rIns="0" bIns="0" anchor="t"/>
+          <a:bodyPr xmlns:a="http://schemas.openxmlformats.org/drawingml/2006/main" wrap="square" lIns="0" tIns="0" rIns="0" bIns="0" anchor="t">
+            <a:noAutofit/>
+          </a:bodyPr>
           <a:lstStyle xmlns:a="http://schemas.openxmlformats.org/drawingml/2006/main"/>
           <a:p xmlns:a="http://schemas.openxmlformats.org/drawingml/2006/main">
             <a:pPr marL="0" indent="0">
@@ -6554,17 +6810,25 @@
                 <a:spcPts val="200"/>
               </a:spcAft>
               <a:buNone/>
-            </a:pPr>
-            <a:r>
-              <a:rPr sz="1100">
-                <a:solidFill>
-                  <a:srgbClr val="94A3B8"/>
+              <a:defRPr sz="1200">
+                <a:solidFill>
+                  <a:srgbClr val="E5E7EB"/>
                 </a:solidFill>
                 <a:latin typeface="Consolas"/>
                 <a:ea typeface="Consolas"/>
                 <a:cs typeface="Consolas"/>
-              </a:rPr>
-              <a:t># BAD - kontext cd lost di layer baru</a:t>
+              </a:defRPr>
+            </a:pPr>
+            <a:r>
+              <a:rPr sz="1200">
+                <a:solidFill>
+                  <a:srgbClr val="E5E7EB"/>
+                </a:solidFill>
+                <a:latin typeface="Consolas"/>
+                <a:ea typeface="Consolas"/>
+                <a:cs typeface="Consolas"/>
+              </a:rPr>
+              <a:t># CWD tidak bertahan pada RUN baru</a:t>
             </a:r>
             <a:endParaRPr sz="1100"/>
           </a:p>
@@ -6574,11 +6838,19 @@
                 <a:spcPts val="200"/>
               </a:spcAft>
               <a:buNone/>
-            </a:pPr>
-            <a:r>
-              <a:rPr sz="1100">
-                <a:solidFill>
-                  <a:srgbClr val="EF4444"/>
+              <a:defRPr sz="1200">
+                <a:solidFill>
+                  <a:srgbClr val="E5E7EB"/>
+                </a:solidFill>
+                <a:latin typeface="Consolas"/>
+                <a:ea typeface="Consolas"/>
+                <a:cs typeface="Consolas"/>
+              </a:defRPr>
+            </a:pPr>
+            <a:r>
+              <a:rPr sz="1200">
+                <a:solidFill>
+                  <a:srgbClr val="E5E7EB"/>
                 </a:solidFill>
                 <a:latin typeface="Consolas"/>
                 <a:ea typeface="Consolas"/>
@@ -6594,17 +6866,25 @@
                 <a:spcPts val="200"/>
               </a:spcAft>
               <a:buNone/>
-            </a:pPr>
-            <a:r>
-              <a:rPr sz="1100">
-                <a:solidFill>
-                  <a:srgbClr val="EF4444"/>
+              <a:defRPr sz="1200">
+                <a:solidFill>
+                  <a:srgbClr val="E5E7EB"/>
                 </a:solidFill>
                 <a:latin typeface="Consolas"/>
                 <a:ea typeface="Consolas"/>
                 <a:cs typeface="Consolas"/>
-              </a:rPr>
-              <a:t>RUN cd /app &amp;&amp; touch b.txt   # /app?</a:t>
+              </a:defRPr>
+            </a:pPr>
+            <a:r>
+              <a:rPr sz="1200">
+                <a:solidFill>
+                  <a:srgbClr val="E5E7EB"/>
+                </a:solidFill>
+                <a:latin typeface="Consolas"/>
+                <a:ea typeface="Consolas"/>
+                <a:cs typeface="Consolas"/>
+              </a:rPr>
+              <a:t>RUN touch b.txt   # bukan otomatis /app</a:t>
             </a:r>
             <a:endParaRPr sz="1100"/>
           </a:p>
@@ -6615,6 +6895,9 @@
               </a:spcAft>
               <a:buNone/>
             </a:pPr>
+            <a:r>
+              <a:t/>
+            </a:r>
             <a:endParaRPr sz="1100"/>
           </a:p>
           <a:p xmlns:a="http://schemas.openxmlformats.org/drawingml/2006/main">
@@ -6623,17 +6906,25 @@
                 <a:spcPts val="200"/>
               </a:spcAft>
               <a:buNone/>
-            </a:pPr>
-            <a:r>
-              <a:rPr sz="1100">
-                <a:solidFill>
-                  <a:srgbClr val="94A3B8"/>
+              <a:defRPr sz="1200">
+                <a:solidFill>
+                  <a:srgbClr val="E5E7EB"/>
                 </a:solidFill>
                 <a:latin typeface="Consolas"/>
                 <a:ea typeface="Consolas"/>
                 <a:cs typeface="Consolas"/>
-              </a:rPr>
-              <a:t># GOOD - WORKDIR persist antar layer</a:t>
+              </a:defRPr>
+            </a:pPr>
+            <a:r>
+              <a:rPr sz="1200">
+                <a:solidFill>
+                  <a:srgbClr val="E5E7EB"/>
+                </a:solidFill>
+                <a:latin typeface="Consolas"/>
+                <a:ea typeface="Consolas"/>
+                <a:cs typeface="Consolas"/>
+              </a:rPr>
+              <a:t># WORKDIR menetapkan CWD berikutnya</a:t>
             </a:r>
             <a:endParaRPr sz="1100"/>
           </a:p>
@@ -6643,11 +6934,19 @@
                 <a:spcPts val="200"/>
               </a:spcAft>
               <a:buNone/>
-            </a:pPr>
-            <a:r>
-              <a:rPr sz="1100">
-                <a:solidFill>
-                  <a:srgbClr val="10B981"/>
+              <a:defRPr sz="1200">
+                <a:solidFill>
+                  <a:srgbClr val="E5E7EB"/>
+                </a:solidFill>
+                <a:latin typeface="Consolas"/>
+                <a:ea typeface="Consolas"/>
+                <a:cs typeface="Consolas"/>
+              </a:defRPr>
+            </a:pPr>
+            <a:r>
+              <a:rPr sz="1200">
+                <a:solidFill>
+                  <a:srgbClr val="E5E7EB"/>
                 </a:solidFill>
                 <a:latin typeface="Consolas"/>
                 <a:ea typeface="Consolas"/>
@@ -6663,11 +6962,19 @@
                 <a:spcPts val="200"/>
               </a:spcAft>
               <a:buNone/>
-            </a:pPr>
-            <a:r>
-              <a:rPr sz="1100">
-                <a:solidFill>
-                  <a:srgbClr val="E2E8F0"/>
+              <a:defRPr sz="1200">
+                <a:solidFill>
+                  <a:srgbClr val="E5E7EB"/>
+                </a:solidFill>
+                <a:latin typeface="Consolas"/>
+                <a:ea typeface="Consolas"/>
+                <a:cs typeface="Consolas"/>
+              </a:defRPr>
+            </a:pPr>
+            <a:r>
+              <a:rPr sz="1200">
+                <a:solidFill>
+                  <a:srgbClr val="E5E7EB"/>
                 </a:solidFill>
                 <a:latin typeface="Consolas"/>
                 <a:ea typeface="Consolas"/>
@@ -6683,11 +6990,19 @@
                 <a:spcPts val="200"/>
               </a:spcAft>
               <a:buNone/>
-            </a:pPr>
-            <a:r>
-              <a:rPr sz="1100">
-                <a:solidFill>
-                  <a:srgbClr val="E2E8F0"/>
+              <a:defRPr sz="1200">
+                <a:solidFill>
+                  <a:srgbClr val="E5E7EB"/>
+                </a:solidFill>
+                <a:latin typeface="Consolas"/>
+                <a:ea typeface="Consolas"/>
+                <a:cs typeface="Consolas"/>
+              </a:defRPr>
+            </a:pPr>
+            <a:r>
+              <a:rPr sz="1200">
+                <a:solidFill>
+                  <a:srgbClr val="E5E7EB"/>
                 </a:solidFill>
                 <a:latin typeface="Consolas"/>
                 <a:ea typeface="Consolas"/>
@@ -6703,17 +7018,25 @@
                 <a:spcPts val="200"/>
               </a:spcAft>
               <a:buNone/>
-            </a:pPr>
-            <a:r>
-              <a:rPr sz="1100">
-                <a:solidFill>
-                  <a:srgbClr val="E2E8F0"/>
+              <a:defRPr sz="1200">
+                <a:solidFill>
+                  <a:srgbClr val="E5E7EB"/>
                 </a:solidFill>
                 <a:latin typeface="Consolas"/>
                 <a:ea typeface="Consolas"/>
                 <a:cs typeface="Consolas"/>
-              </a:rPr>
-              <a:t>COPY package.json .   # ke /app/</a:t>
+              </a:defRPr>
+            </a:pPr>
+            <a:r>
+              <a:rPr sz="1200">
+                <a:solidFill>
+                  <a:srgbClr val="E5E7EB"/>
+                </a:solidFill>
+                <a:latin typeface="Consolas"/>
+                <a:ea typeface="Consolas"/>
+                <a:cs typeface="Consolas"/>
+              </a:rPr>
+              <a:t>COPY package.json .</a:t>
             </a:r>
             <a:endParaRPr sz="1100"/>
           </a:p>
@@ -6724,6 +7047,9 @@
               </a:spcAft>
               <a:buNone/>
             </a:pPr>
+            <a:r>
+              <a:t/>
+            </a:r>
             <a:endParaRPr sz="1100"/>
           </a:p>
           <a:p xmlns:a="http://schemas.openxmlformats.org/drawingml/2006/main">
@@ -6732,17 +7058,25 @@
                 <a:spcPts val="200"/>
               </a:spcAft>
               <a:buNone/>
-            </a:pPr>
-            <a:r>
-              <a:rPr sz="1100">
-                <a:solidFill>
-                  <a:srgbClr val="94A3B8"/>
+              <a:defRPr sz="1200">
+                <a:solidFill>
+                  <a:srgbClr val="E5E7EB"/>
                 </a:solidFill>
                 <a:latin typeface="Consolas"/>
                 <a:ea typeface="Consolas"/>
                 <a:cs typeface="Consolas"/>
-              </a:rPr>
-              <a:t># Bisa relative path - cumulative</a:t>
+              </a:defRPr>
+            </a:pPr>
+            <a:r>
+              <a:rPr sz="1200">
+                <a:solidFill>
+                  <a:srgbClr val="E5E7EB"/>
+                </a:solidFill>
+                <a:latin typeface="Consolas"/>
+                <a:ea typeface="Consolas"/>
+                <a:cs typeface="Consolas"/>
+              </a:rPr>
+              <a:t>WORKDIR /a</a:t>
             </a:r>
             <a:endParaRPr sz="1100"/>
           </a:p>
@@ -6752,37 +7086,25 @@
                 <a:spcPts val="200"/>
               </a:spcAft>
               <a:buNone/>
-            </a:pPr>
-            <a:r>
-              <a:rPr sz="1100">
-                <a:solidFill>
-                  <a:srgbClr val="10B981"/>
+              <a:defRPr sz="1200">
+                <a:solidFill>
+                  <a:srgbClr val="E5E7EB"/>
                 </a:solidFill>
                 <a:latin typeface="Consolas"/>
                 <a:ea typeface="Consolas"/>
                 <a:cs typeface="Consolas"/>
-              </a:rPr>
-              <a:t>WORKDIR /a</a:t>
-            </a:r>
-            <a:endParaRPr sz="1100"/>
-          </a:p>
-          <a:p xmlns:a="http://schemas.openxmlformats.org/drawingml/2006/main">
-            <a:pPr marL="0" indent="0">
-              <a:spcAft>
-                <a:spcPts val="200"/>
-              </a:spcAft>
-              <a:buNone/>
-            </a:pPr>
-            <a:r>
-              <a:rPr sz="1100">
-                <a:solidFill>
-                  <a:srgbClr val="10B981"/>
+              </a:defRPr>
+            </a:pPr>
+            <a:r>
+              <a:rPr sz="1200">
+                <a:solidFill>
+                  <a:srgbClr val="E5E7EB"/>
                 </a:solidFill>
                 <a:latin typeface="Consolas"/>
                 <a:ea typeface="Consolas"/>
                 <a:cs typeface="Consolas"/>
               </a:rPr>
-              <a:t>WORKDIR b   # sekarang /a/b</a:t>
+              <a:t>WORKDIR b        # /a/b</a:t>
             </a:r>
             <a:endParaRPr sz="1100"/>
           </a:p>
@@ -6951,7 +7273,7 @@
           <p:nvPr/>
         </p:nvPicPr>
         <p:blipFill>
-          <a:blip xmlns:r="http://schemas.openxmlformats.org/officeDocument/2006/relationships" xmlns:a="http://schemas.openxmlformats.org/drawingml/2006/main" r:embed="R2cf2cc4570a8469b"/>
+          <a:blip xmlns:r="http://schemas.openxmlformats.org/officeDocument/2006/relationships" xmlns:a="http://schemas.openxmlformats.org/drawingml/2006/main" r:embed="R0e6d0e1304504460"/>
           <a:stretch xmlns:a="http://schemas.openxmlformats.org/drawingml/2006/main">
             <a:fillRect l="0" t="0" r="0" b="0"/>
           </a:stretch>
@@ -6975,7 +7297,7 @@
           <p:nvPr/>
         </p:nvPicPr>
         <p:blipFill>
-          <a:blip xmlns:r="http://schemas.openxmlformats.org/officeDocument/2006/relationships" xmlns:a="http://schemas.openxmlformats.org/drawingml/2006/main" r:embed="Rd44b4ddb36264811"/>
+          <a:blip xmlns:r="http://schemas.openxmlformats.org/officeDocument/2006/relationships" xmlns:a="http://schemas.openxmlformats.org/drawingml/2006/main" r:embed="Rc5827c682eb74399"/>
           <a:stretch xmlns:a="http://schemas.openxmlformats.org/drawingml/2006/main">
             <a:fillRect l="0" t="0" r="0" b="0"/>
           </a:stretch>
@@ -7265,7 +7587,7 @@
                 <a:ea typeface="Calibri"/>
                 <a:cs typeface="Calibri"/>
               </a:rPr>
-              <a:t>Tetap ada saat container running. Persist di environment proses.</a:t>
+              <a:t>ENV dipakai saat build dan menjadi default environment container.</a:t>
             </a:r>
             <a:endParaRPr sz="1100"/>
           </a:p>
@@ -7890,7 +8212,7 @@
                 <a:ea typeface="Calibri"/>
                 <a:cs typeface="Calibri"/>
               </a:rPr>
-              <a:t>Hanya tersedia saat build. Hilang di image final &amp; runtime.</a:t>
+              <a:t>ARG tidak otomatis menjadi env runtime. Nilai bisa tertinggal pada metadata/artefak.</a:t>
             </a:r>
             <a:endParaRPr sz="1100"/>
           </a:p>
@@ -8170,7 +8492,7 @@
                 <a:ea typeface="Consolas"/>
                 <a:cs typeface="Consolas"/>
               </a:rPr>
-              <a:t>ARG NODE_VERSION=20</a:t>
+              <a:t>ARG NODE_VERSION=24</a:t>
             </a:r>
             <a:endParaRPr sz="1100"/>
           </a:p>
@@ -8219,7 +8541,7 @@
                 <a:ea typeface="Consolas"/>
                 <a:cs typeface="Consolas"/>
               </a:rPr>
-              <a:t># Tanpa default - wajib pass saat build</a:t>
+              <a:t># Tanpa default: kosong bila tak dipasok</a:t>
             </a:r>
             <a:endParaRPr sz="1100"/>
           </a:p>
@@ -8328,7 +8650,29 @@
                 <a:ea typeface="Consolas"/>
                 <a:cs typeface="Consolas"/>
               </a:rPr>
-              <a:t>  --build-arg NODE_VERSION=22 \</a:t>
+              <a:t>  </a:t>
+            </a:r>
+            <a:r>
+              <a:rPr sz="1100">
+                <a:solidFill>
+                  <a:srgbClr val="10B981"/>
+                </a:solidFill>
+                <a:latin typeface="Consolas"/>
+                <a:ea typeface="Consolas"/>
+                <a:cs typeface="Consolas"/>
+              </a:rPr>
+              <a:t>--build-arg NODE_VERSION=24</a:t>
+            </a:r>
+            <a:r>
+              <a:rPr sz="1100">
+                <a:solidFill>
+                  <a:srgbClr val="10B981"/>
+                </a:solidFill>
+                <a:latin typeface="Consolas"/>
+                <a:ea typeface="Consolas"/>
+                <a:cs typeface="Consolas"/>
+              </a:rPr>
+              <a:t> \</a:t>
             </a:r>
             <a:endParaRPr sz="1100"/>
           </a:p>
@@ -8377,7 +8721,7 @@
                 <a:ea typeface="Consolas"/>
                 <a:cs typeface="Consolas"/>
               </a:rPr>
-              <a:t>Use case: build target, version pinning</a:t>
+              <a:t>Untuk konfigurasi build, bukan secret</a:t>
             </a:r>
             <a:endParaRPr sz="1100"/>
           </a:p>
@@ -8546,7 +8890,7 @@
           <p:nvPr/>
         </p:nvPicPr>
         <p:blipFill>
-          <a:blip xmlns:r="http://schemas.openxmlformats.org/officeDocument/2006/relationships" xmlns:a="http://schemas.openxmlformats.org/drawingml/2006/main" r:embed="Rc38f875cc31e42aa"/>
+          <a:blip xmlns:r="http://schemas.openxmlformats.org/officeDocument/2006/relationships" xmlns:a="http://schemas.openxmlformats.org/drawingml/2006/main" r:embed="Rf2e47e4f91e04244"/>
           <a:stretch xmlns:a="http://schemas.openxmlformats.org/drawingml/2006/main">
             <a:fillRect l="0" t="0" r="0" b="0"/>
           </a:stretch>
@@ -8570,7 +8914,7 @@
           <p:nvPr/>
         </p:nvPicPr>
         <p:blipFill>
-          <a:blip xmlns:r="http://schemas.openxmlformats.org/officeDocument/2006/relationships" xmlns:a="http://schemas.openxmlformats.org/drawingml/2006/main" r:embed="R84e0156445cc4449"/>
+          <a:blip xmlns:r="http://schemas.openxmlformats.org/officeDocument/2006/relationships" xmlns:a="http://schemas.openxmlformats.org/drawingml/2006/main" r:embed="Re58942472f7f4551"/>
           <a:stretch xmlns:a="http://schemas.openxmlformats.org/drawingml/2006/main">
             <a:fillRect l="0" t="0" r="0" b="0"/>
           </a:stretch>
@@ -9120,7 +9464,7 @@
                 <a:ea typeface="Calibri"/>
                 <a:cs typeface="Calibri"/>
               </a:rPr>
-              <a:t>Jalankan container sebagai non-root user. Best practice keamanan utama.</a:t>
+              <a:t>USER memilih UID/GID. Gunakan user non-root yang sudah tersedia/dibuat.</a:t>
             </a:r>
             <a:endParaRPr sz="1100"/>
           </a:p>
@@ -9380,7 +9724,7 @@
                 <a:ea typeface="Calibri"/>
                 <a:cs typeface="Calibri"/>
               </a:rPr>
-              <a:t>Command yang dijalankan periodically untuk cek container sehat / tidak.</a:t>
+              <a:t>Probe aplikasi berkala. Tool probe harus tersedia di image.</a:t>
             </a:r>
             <a:endParaRPr sz="1100"/>
           </a:p>
@@ -9444,7 +9788,9 @@
           <a:noFill xmlns:a="http://schemas.openxmlformats.org/drawingml/2006/main"/>
         </p:spPr>
         <p:txBody>
-          <a:bodyPr xmlns:a="http://schemas.openxmlformats.org/drawingml/2006/main" wrap="square" anchor="t"/>
+          <a:bodyPr xmlns:a="http://schemas.openxmlformats.org/drawingml/2006/main" wrap="square" lIns="0" tIns="0" rIns="0" bIns="0" anchor="t">
+            <a:noAutofit/>
+          </a:bodyPr>
           <a:lstStyle xmlns:a="http://schemas.openxmlformats.org/drawingml/2006/main"/>
           <a:p xmlns:a="http://schemas.openxmlformats.org/drawingml/2006/main">
             <a:pPr marL="0" indent="0">
@@ -9452,11 +9798,19 @@
                 <a:spcPts val="200"/>
               </a:spcAft>
               <a:buNone/>
-            </a:pPr>
-            <a:r>
-              <a:rPr sz="1000">
-                <a:solidFill>
-                  <a:srgbClr val="10B981"/>
+              <a:defRPr sz="863">
+                <a:solidFill>
+                  <a:srgbClr val="00C896"/>
+                </a:solidFill>
+                <a:latin typeface="Consolas"/>
+                <a:ea typeface="Consolas"/>
+                <a:cs typeface="Consolas"/>
+              </a:defRPr>
+            </a:pPr>
+            <a:r>
+              <a:rPr sz="863">
+                <a:solidFill>
+                  <a:srgbClr val="00C896"/>
                 </a:solidFill>
                 <a:latin typeface="Consolas"/>
                 <a:ea typeface="Consolas"/>
@@ -9472,17 +9826,81 @@
                 <a:spcPts val="200"/>
               </a:spcAft>
               <a:buNone/>
-            </a:pPr>
-            <a:r>
-              <a:rPr sz="1000">
-                <a:solidFill>
-                  <a:srgbClr val="10B981"/>
+              <a:defRPr sz="863">
+                <a:solidFill>
+                  <a:srgbClr val="00C896"/>
                 </a:solidFill>
                 <a:latin typeface="Consolas"/>
                 <a:ea typeface="Consolas"/>
                 <a:cs typeface="Consolas"/>
-              </a:rPr>
-              <a:t>  CMD curl -f http://localhost/</a:t>
+              </a:defRPr>
+            </a:pPr>
+            <a:r>
+              <a:rPr sz="863">
+                <a:solidFill>
+                  <a:srgbClr val="00C896"/>
+                </a:solidFill>
+                <a:latin typeface="Consolas"/>
+                <a:ea typeface="Consolas"/>
+                <a:cs typeface="Consolas"/>
+              </a:rPr>
+              <a:t> CMD curl -f \</a:t>
+            </a:r>
+            <a:endParaRPr sz="1000"/>
+          </a:p>
+          <a:p xmlns:a="http://schemas.openxmlformats.org/drawingml/2006/main">
+            <a:pPr marL="0" indent="0">
+              <a:spcAft>
+                <a:spcPts val="200"/>
+              </a:spcAft>
+              <a:buNone/>
+              <a:defRPr sz="863">
+                <a:solidFill>
+                  <a:srgbClr val="00C896"/>
+                </a:solidFill>
+                <a:latin typeface="Consolas"/>
+                <a:ea typeface="Consolas"/>
+                <a:cs typeface="Consolas"/>
+              </a:defRPr>
+            </a:pPr>
+            <a:r>
+              <a:rPr sz="863">
+                <a:solidFill>
+                  <a:srgbClr val="00C896"/>
+                </a:solidFill>
+                <a:latin typeface="Consolas"/>
+                <a:ea typeface="Consolas"/>
+                <a:cs typeface="Consolas"/>
+              </a:rPr>
+              <a:t> http://localhost:3000/health \</a:t>
+            </a:r>
+            <a:endParaRPr sz="1000"/>
+          </a:p>
+          <a:p xmlns:a="http://schemas.openxmlformats.org/drawingml/2006/main">
+            <a:pPr marL="0" indent="0">
+              <a:spcAft>
+                <a:spcPts val="200"/>
+              </a:spcAft>
+              <a:buNone/>
+              <a:defRPr sz="863">
+                <a:solidFill>
+                  <a:srgbClr val="00C896"/>
+                </a:solidFill>
+                <a:latin typeface="Consolas"/>
+                <a:ea typeface="Consolas"/>
+                <a:cs typeface="Consolas"/>
+              </a:defRPr>
+            </a:pPr>
+            <a:r>
+              <a:rPr sz="863">
+                <a:solidFill>
+                  <a:srgbClr val="00C896"/>
+                </a:solidFill>
+                <a:latin typeface="Consolas"/>
+                <a:ea typeface="Consolas"/>
+                <a:cs typeface="Consolas"/>
+              </a:rPr>
+              <a:t> || exit 1</a:t>
             </a:r>
             <a:endParaRPr sz="1000"/>
           </a:p>
@@ -10104,7 +10522,7 @@
           <p:nvPr/>
         </p:nvPicPr>
         <p:blipFill>
-          <a:blip xmlns:r="http://schemas.openxmlformats.org/officeDocument/2006/relationships" xmlns:a="http://schemas.openxmlformats.org/drawingml/2006/main" r:embed="Re30d357aaf874ff8"/>
+          <a:blip xmlns:r="http://schemas.openxmlformats.org/officeDocument/2006/relationships" xmlns:a="http://schemas.openxmlformats.org/drawingml/2006/main" r:embed="Re2faa57f6d54493a"/>
           <a:stretch xmlns:a="http://schemas.openxmlformats.org/drawingml/2006/main">
             <a:fillRect l="0" t="0" r="0" b="0"/>
           </a:stretch>
@@ -10128,7 +10546,7 @@
           <p:nvPr/>
         </p:nvPicPr>
         <p:blipFill>
-          <a:blip xmlns:r="http://schemas.openxmlformats.org/officeDocument/2006/relationships" xmlns:a="http://schemas.openxmlformats.org/drawingml/2006/main" r:embed="Rc5b8894689da43b8"/>
+          <a:blip xmlns:r="http://schemas.openxmlformats.org/officeDocument/2006/relationships" xmlns:a="http://schemas.openxmlformats.org/drawingml/2006/main" r:embed="R9be39797f3b44ee8"/>
           <a:stretch xmlns:a="http://schemas.openxmlformats.org/drawingml/2006/main">
             <a:fillRect l="0" t="0" r="0" b="0"/>
           </a:stretch>
@@ -10494,7 +10912,7 @@
           <p:nvPr/>
         </p:nvPicPr>
         <p:blipFill>
-          <a:blip xmlns:r="http://schemas.openxmlformats.org/officeDocument/2006/relationships" xmlns:a="http://schemas.openxmlformats.org/drawingml/2006/main" r:embed="Rb83dd16796624820"/>
+          <a:blip xmlns:r="http://schemas.openxmlformats.org/officeDocument/2006/relationships" xmlns:a="http://schemas.openxmlformats.org/drawingml/2006/main" r:embed="R5920c42bdd454697"/>
           <a:stretch xmlns:a="http://schemas.openxmlformats.org/drawingml/2006/main">
             <a:fillRect l="0" t="0" r="0" b="0"/>
           </a:stretch>
@@ -10518,7 +10936,7 @@
           <p:nvPr/>
         </p:nvPicPr>
         <p:blipFill>
-          <a:blip xmlns:r="http://schemas.openxmlformats.org/officeDocument/2006/relationships" xmlns:a="http://schemas.openxmlformats.org/drawingml/2006/main" r:embed="R080bebfbf47d4f73"/>
+          <a:blip xmlns:r="http://schemas.openxmlformats.org/officeDocument/2006/relationships" xmlns:a="http://schemas.openxmlformats.org/drawingml/2006/main" r:embed="R224e75a7e32b467f"/>
           <a:stretch xmlns:a="http://schemas.openxmlformats.org/drawingml/2006/main">
             <a:fillRect l="0" t="0" r="0" b="0"/>
           </a:stretch>
@@ -10808,7 +11226,7 @@
                 <a:ea typeface="Calibri"/>
                 <a:cs typeface="Calibri"/>
               </a:rPr>
-              <a:t>Send Build Context</a:t>
+              <a:t>Siapkan Build Context</a:t>
             </a:r>
             <a:endParaRPr sz="1400"/>
           </a:p>
@@ -10854,7 +11272,7 @@
                 <a:ea typeface="Calibri"/>
                 <a:cs typeface="Calibri"/>
               </a:rPr>
-              <a:t>Folder current di-kirim ke Docker daemon (semua file di working dir!).</a:t>
+              <a:t>Context memberi input build. .dockerignore membatasi file yang tersedia.</a:t>
             </a:r>
             <a:endParaRPr sz="1100"/>
           </a:p>
@@ -11058,7 +11476,7 @@
                 <a:ea typeface="Calibri"/>
                 <a:cs typeface="Calibri"/>
               </a:rPr>
-              <a:t>Daemon baca Dockerfile, validasi instruksi, plan layer-layer yang akan dibuat.</a:t>
+              <a:t>Builder membaca Dockerfile dan menyusun dependensi tiap stage.</a:t>
             </a:r>
             <a:endParaRPr sz="1100"/>
           </a:p>
@@ -11262,7 +11680,7 @@
                 <a:ea typeface="Calibri"/>
                 <a:cs typeface="Calibri"/>
               </a:rPr>
-              <a:t>Tiap baris jadi 1 layer baru. Cache di-cek dulu sebelum eksekusi.</a:t>
+              <a:t>Builder memeriksa cache instruksi beserta input sebelum menjalankannya.</a:t>
             </a:r>
             <a:endParaRPr sz="1100"/>
           </a:p>
@@ -11466,7 +11884,7 @@
                 <a:ea typeface="Calibri"/>
                 <a:cs typeface="Calibri"/>
               </a:rPr>
-              <a:t>Setelah eksekusi, snapshot filesystem disimpan sebagai read-only layer.</a:t>
+              <a:t>RUN/COPY/ADD dapat menghasilkan layer. Instruksi lain menyimpan konfigurasi.</a:t>
             </a:r>
             <a:endParaRPr sz="1100"/>
           </a:p>
@@ -11716,18 +12134,7 @@
                 <a:ea typeface="Calibri"/>
                 <a:cs typeface="Calibri"/>
               </a:rPr>
-              <a:t>Optimasi penting: </a:t>
-            </a:r>
-            <a:r>
-              <a:rPr sz="1100" i="1">
-                <a:solidFill>
-                  <a:srgbClr val="1E293B"/>
-                </a:solidFill>
-                <a:latin typeface="Calibri"/>
-                <a:ea typeface="Calibri"/>
-                <a:cs typeface="Calibri"/>
-              </a:rPr>
-              <a:t>build context (folder current) di-send ke daemon SEMUANYA. Pakai .dockerignore!</a:t>
+              <a:t>BuildKit mentransfer input secara efisien dan dapat melewati file yang tak digunakan. .dockerignore tetap penting.</a:t>
             </a:r>
             <a:endParaRPr sz="1100"/>
           </a:p>
@@ -11896,7 +12303,7 @@
           <p:nvPr/>
         </p:nvPicPr>
         <p:blipFill>
-          <a:blip xmlns:r="http://schemas.openxmlformats.org/officeDocument/2006/relationships" xmlns:a="http://schemas.openxmlformats.org/drawingml/2006/main" r:embed="R1747113022514925"/>
+          <a:blip xmlns:r="http://schemas.openxmlformats.org/officeDocument/2006/relationships" xmlns:a="http://schemas.openxmlformats.org/drawingml/2006/main" r:embed="Re38798a4f7104a87"/>
           <a:stretch xmlns:a="http://schemas.openxmlformats.org/drawingml/2006/main">
             <a:fillRect l="0" t="0" r="0" b="0"/>
           </a:stretch>
@@ -11920,7 +12327,7 @@
           <p:nvPr/>
         </p:nvPicPr>
         <p:blipFill>
-          <a:blip xmlns:r="http://schemas.openxmlformats.org/officeDocument/2006/relationships" xmlns:a="http://schemas.openxmlformats.org/drawingml/2006/main" r:embed="Rb0469721f0094a78"/>
+          <a:blip xmlns:r="http://schemas.openxmlformats.org/officeDocument/2006/relationships" xmlns:a="http://schemas.openxmlformats.org/drawingml/2006/main" r:embed="Rb858e728fe1b4202"/>
           <a:stretch xmlns:a="http://schemas.openxmlformats.org/drawingml/2006/main">
             <a:fillRect l="0" t="0" r="0" b="0"/>
           </a:stretch>
@@ -12131,57 +12538,7 @@
                 <a:ea typeface="Calibri"/>
                 <a:cs typeface="Calibri"/>
               </a:rPr>
-              <a:t>Cache rule: </a:t>
-            </a:r>
-            <a:r>
-              <a:rPr sz="1300">
-                <a:solidFill>
-                  <a:srgbClr val="FFFFFF"/>
-                </a:solidFill>
-                <a:latin typeface="Calibri"/>
-                <a:ea typeface="Calibri"/>
-                <a:cs typeface="Calibri"/>
-              </a:rPr>
-              <a:t>Docker cek hash tiap instruksi. Kalau sama -&gt; pakai cache. Kalau beda -&gt; rebuild + </a:t>
-            </a:r>
-            <a:r>
-              <a:rPr sz="1300" b="1">
-                <a:solidFill>
-                  <a:srgbClr val="F37021"/>
-                </a:solidFill>
-                <a:latin typeface="Calibri"/>
-                <a:ea typeface="Calibri"/>
-                <a:cs typeface="Calibri"/>
-              </a:rPr>
-              <a:t>semua layer di bawahnya juga rebuild</a:t>
-            </a:r>
-            <a:r>
-              <a:rPr sz="1300">
-                <a:solidFill>
-                  <a:srgbClr val="FFFFFF"/>
-                </a:solidFill>
-                <a:latin typeface="Calibri"/>
-                <a:ea typeface="Calibri"/>
-                <a:cs typeface="Calibri"/>
-              </a:rPr>
-              <a:t>.</a:t>
-            </a:r>
-            <a:endParaRPr sz="1300"/>
-          </a:p>
-          <a:p xmlns:a="http://schemas.openxmlformats.org/drawingml/2006/main">
-            <a:pPr marL="0" indent="0">
-              <a:buNone/>
-            </a:pPr>
-            <a:r>
-              <a:rPr sz="1100" i="1">
-                <a:solidFill>
-                  <a:srgbClr val="FFE0B2"/>
-                </a:solidFill>
-                <a:latin typeface="Calibri"/>
-                <a:ea typeface="Calibri"/>
-                <a:cs typeface="Calibri"/>
-              </a:rPr>
-              <a:t>Strategi: taruh instruksi yang JARANG BERUBAH di atas, yang SERING BERUBAH di bawah.</a:t>
+              <a:t>Cache mengikuti instruksi dan inputnya. Perubahan membatalkan langkah yang bergantung padanya dalam stage terkait.</a:t>
             </a:r>
             <a:endParaRPr sz="1300"/>
           </a:p>
@@ -12441,7 +12798,18 @@
                 <a:ea typeface="Consolas"/>
                 <a:cs typeface="Consolas"/>
               </a:rPr>
-              <a:t>FROM node:20-alpine</a:t>
+              <a:t>FROM </a:t>
+            </a:r>
+            <a:r>
+              <a:rPr sz="1100" b="1">
+                <a:solidFill>
+                  <a:srgbClr val="F37021"/>
+                </a:solidFill>
+                <a:latin typeface="Consolas"/>
+                <a:ea typeface="Consolas"/>
+                <a:cs typeface="Consolas"/>
+              </a:rPr>
+              <a:t>node:24-alpine</a:t>
             </a:r>
             <a:endParaRPr sz="1100"/>
           </a:p>
@@ -12628,7 +12996,7 @@
                 <a:ea typeface="Consolas"/>
                 <a:cs typeface="Consolas"/>
               </a:rPr>
-              <a:t># -&gt; wait 2 menit lagi</a:t>
+              <a:t># -&gt; dependency dipasang ulang</a:t>
             </a:r>
             <a:endParaRPr sz="1100"/>
           </a:p>
@@ -12888,7 +13256,18 @@
                 <a:ea typeface="Consolas"/>
                 <a:cs typeface="Consolas"/>
               </a:rPr>
-              <a:t>FROM node:20-alpine</a:t>
+              <a:t>FROM </a:t>
+            </a:r>
+            <a:r>
+              <a:rPr sz="1100" b="1">
+                <a:solidFill>
+                  <a:srgbClr val="F37021"/>
+                </a:solidFill>
+                <a:latin typeface="Consolas"/>
+                <a:ea typeface="Consolas"/>
+                <a:cs typeface="Consolas"/>
+              </a:rPr>
+              <a:t>node:24-alpine</a:t>
             </a:r>
             <a:endParaRPr sz="1100"/>
           </a:p>
@@ -12937,7 +13316,7 @@
                 <a:ea typeface="Consolas"/>
                 <a:cs typeface="Consolas"/>
               </a:rPr>
-              <a:t>COPY package*.json ./</a:t>
+              <a:t>COPY package.json package-lock.json ./</a:t>
             </a:r>
             <a:endParaRPr sz="1100"/>
           </a:p>
@@ -12957,7 +13336,18 @@
                 <a:ea typeface="Consolas"/>
                 <a:cs typeface="Consolas"/>
               </a:rPr>
-              <a:t>RUN npm ci --only=production</a:t>
+              <a:t>RUN </a:t>
+            </a:r>
+            <a:r>
+              <a:rPr sz="1100" b="1">
+                <a:solidFill>
+                  <a:srgbClr val="10B981"/>
+                </a:solidFill>
+                <a:latin typeface="Consolas"/>
+                <a:ea typeface="Consolas"/>
+                <a:cs typeface="Consolas"/>
+              </a:rPr>
+              <a:t>npm ci --omit=dev</a:t>
             </a:r>
             <a:endParaRPr sz="1100"/>
           </a:p>
@@ -13084,7 +13474,7 @@
                 <a:ea typeface="Consolas"/>
                 <a:cs typeface="Consolas"/>
               </a:rPr>
-              <a:t># -&gt; rebuild 5 detik :)</a:t>
+              <a:t># -&gt; ukur waktu pada mesin sendiri</a:t>
             </a:r>
             <a:endParaRPr sz="1100"/>
           </a:p>
@@ -13253,7 +13643,7 @@
           <p:nvPr/>
         </p:nvPicPr>
         <p:blipFill>
-          <a:blip xmlns:r="http://schemas.openxmlformats.org/officeDocument/2006/relationships" xmlns:a="http://schemas.openxmlformats.org/drawingml/2006/main" r:embed="R13169c4f75c8496e"/>
+          <a:blip xmlns:r="http://schemas.openxmlformats.org/officeDocument/2006/relationships" xmlns:a="http://schemas.openxmlformats.org/drawingml/2006/main" r:embed="Rc1756fa7b73a4a34"/>
           <a:stretch xmlns:a="http://schemas.openxmlformats.org/drawingml/2006/main">
             <a:fillRect l="0" t="0" r="0" b="0"/>
           </a:stretch>
@@ -13277,7 +13667,7 @@
           <p:nvPr/>
         </p:nvPicPr>
         <p:blipFill>
-          <a:blip xmlns:r="http://schemas.openxmlformats.org/officeDocument/2006/relationships" xmlns:a="http://schemas.openxmlformats.org/drawingml/2006/main" r:embed="R1b9f23a3cde94458"/>
+          <a:blip xmlns:r="http://schemas.openxmlformats.org/officeDocument/2006/relationships" xmlns:a="http://schemas.openxmlformats.org/drawingml/2006/main" r:embed="R12d321883c8f4b8d"/>
           <a:stretch xmlns:a="http://schemas.openxmlformats.org/drawingml/2006/main">
             <a:fillRect l="0" t="0" r="0" b="0"/>
           </a:stretch>
@@ -13538,7 +13928,7 @@
                 <a:ea typeface="Calibri"/>
                 <a:cs typeface="Calibri"/>
               </a:rPr>
-              <a:t>Build context di-send full ke daemon (semua file)</a:t>
+              <a:t>Context besar menambah input dan potensi transfer</a:t>
             </a:r>
             <a:endParaRPr sz="1150"/>
           </a:p>
@@ -13580,7 +13970,7 @@
                 <a:ea typeface="Calibri"/>
                 <a:cs typeface="Calibri"/>
               </a:rPr>
-              <a:t>Mencegah secret (.env) accidentally masuk image</a:t>
+              <a:t>Mencegah COPY .env dari context ke image</a:t>
             </a:r>
             <a:endParaRPr sz="1150"/>
           </a:p>
@@ -13701,40 +14091,7 @@
                 <a:ea typeface="Calibri"/>
                 <a:cs typeface="Calibri"/>
               </a:rPr>
-              <a:t>Rule of thumb: </a:t>
-            </a:r>
-            <a:r>
-              <a:rPr sz="1100">
-                <a:solidFill>
-                  <a:srgbClr val="1E293B"/>
-                </a:solidFill>
-                <a:latin typeface="Calibri"/>
-                <a:ea typeface="Calibri"/>
-                <a:cs typeface="Calibri"/>
-              </a:rPr>
-              <a:t>kalau ada di .gitignore, biasanya ada di .dockerignore juga. Plus: tambah </a:t>
-            </a:r>
-            <a:r>
-              <a:rPr sz="1100" b="1">
-                <a:solidFill>
-                  <a:srgbClr val="002677"/>
-                </a:solidFill>
-                <a:latin typeface="Consolas"/>
-                <a:ea typeface="Consolas"/>
-                <a:cs typeface="Consolas"/>
-              </a:rPr>
-              <a:t>Dockerfile, .git, .env</a:t>
-            </a:r>
-            <a:r>
-              <a:rPr sz="1100">
-                <a:solidFill>
-                  <a:srgbClr val="1E293B"/>
-                </a:solidFill>
-                <a:latin typeface="Calibri"/>
-                <a:ea typeface="Calibri"/>
-                <a:cs typeface="Calibri"/>
-              </a:rPr>
-              <a:t> yang tidak perlu masuk image.</a:t>
+              <a:t>Tinjau kebutuhan runtime sebelum mengabaikan file. .dockerignore tidak melindungi secret yang diberikan melalui ARG/ENV.</a:t>
             </a:r>
             <a:endParaRPr sz="1100"/>
           </a:p>
@@ -13976,7 +14333,9 @@
           <a:noFill xmlns:a="http://schemas.openxmlformats.org/drawingml/2006/main"/>
         </p:spPr>
         <p:txBody>
-          <a:bodyPr xmlns:a="http://schemas.openxmlformats.org/drawingml/2006/main" wrap="square" lIns="0" tIns="0" rIns="0" bIns="0" anchor="t"/>
+          <a:bodyPr xmlns:a="http://schemas.openxmlformats.org/drawingml/2006/main" wrap="square" lIns="0" tIns="0" rIns="0" bIns="0" anchor="t">
+            <a:noAutofit/>
+          </a:bodyPr>
           <a:lstStyle xmlns:a="http://schemas.openxmlformats.org/drawingml/2006/main"/>
           <a:p xmlns:a="http://schemas.openxmlformats.org/drawingml/2006/main">
             <a:pPr marL="0" indent="0">
@@ -13984,17 +14343,25 @@
                 <a:spcPts val="200"/>
               </a:spcAft>
               <a:buNone/>
-            </a:pPr>
-            <a:r>
-              <a:rPr sz="1100">
-                <a:solidFill>
-                  <a:srgbClr val="94A3B8"/>
+              <a:defRPr sz="1200">
+                <a:solidFill>
+                  <a:srgbClr val="E5E7EB"/>
                 </a:solidFill>
                 <a:latin typeface="Consolas"/>
                 <a:ea typeface="Consolas"/>
                 <a:cs typeface="Consolas"/>
-              </a:rPr>
-              <a:t># Dependencies</a:t>
+              </a:defRPr>
+            </a:pPr>
+            <a:r>
+              <a:rPr sz="1200">
+                <a:solidFill>
+                  <a:srgbClr val="E5E7EB"/>
+                </a:solidFill>
+                <a:latin typeface="Consolas"/>
+                <a:ea typeface="Consolas"/>
+                <a:cs typeface="Consolas"/>
+              </a:rPr>
+              <a:t># Dependency &amp; build</a:t>
             </a:r>
             <a:endParaRPr sz="1100"/>
           </a:p>
@@ -14004,11 +14371,19 @@
                 <a:spcPts val="200"/>
               </a:spcAft>
               <a:buNone/>
-            </a:pPr>
-            <a:r>
-              <a:rPr sz="1100">
-                <a:solidFill>
-                  <a:srgbClr val="E2E8F0"/>
+              <a:defRPr sz="1200">
+                <a:solidFill>
+                  <a:srgbClr val="E5E7EB"/>
+                </a:solidFill>
+                <a:latin typeface="Consolas"/>
+                <a:ea typeface="Consolas"/>
+                <a:cs typeface="Consolas"/>
+              </a:defRPr>
+            </a:pPr>
+            <a:r>
+              <a:rPr sz="1200">
+                <a:solidFill>
+                  <a:srgbClr val="E5E7EB"/>
                 </a:solidFill>
                 <a:latin typeface="Consolas"/>
                 <a:ea typeface="Consolas"/>
@@ -14024,11 +14399,19 @@
                 <a:spcPts val="200"/>
               </a:spcAft>
               <a:buNone/>
-            </a:pPr>
-            <a:r>
-              <a:rPr sz="1100">
-                <a:solidFill>
-                  <a:srgbClr val="E2E8F0"/>
+              <a:defRPr sz="1200">
+                <a:solidFill>
+                  <a:srgbClr val="E5E7EB"/>
+                </a:solidFill>
+                <a:latin typeface="Consolas"/>
+                <a:ea typeface="Consolas"/>
+                <a:cs typeface="Consolas"/>
+              </a:defRPr>
+            </a:pPr>
+            <a:r>
+              <a:rPr sz="1200">
+                <a:solidFill>
+                  <a:srgbClr val="E5E7EB"/>
                 </a:solidFill>
                 <a:latin typeface="Consolas"/>
                 <a:ea typeface="Consolas"/>
@@ -14044,7 +14427,26 @@
                 <a:spcPts val="200"/>
               </a:spcAft>
               <a:buNone/>
-            </a:pPr>
+              <a:defRPr sz="1200">
+                <a:solidFill>
+                  <a:srgbClr val="E5E7EB"/>
+                </a:solidFill>
+                <a:latin typeface="Consolas"/>
+                <a:ea typeface="Consolas"/>
+                <a:cs typeface="Consolas"/>
+              </a:defRPr>
+            </a:pPr>
+            <a:r>
+              <a:rPr sz="1200">
+                <a:solidFill>
+                  <a:srgbClr val="E5E7EB"/>
+                </a:solidFill>
+                <a:latin typeface="Consolas"/>
+                <a:ea typeface="Consolas"/>
+                <a:cs typeface="Consolas"/>
+              </a:rPr>
+              <a:t>dist/</a:t>
+            </a:r>
             <a:endParaRPr sz="1100"/>
           </a:p>
           <a:p xmlns:a="http://schemas.openxmlformats.org/drawingml/2006/main">
@@ -14053,17 +14455,25 @@
                 <a:spcPts val="200"/>
               </a:spcAft>
               <a:buNone/>
-            </a:pPr>
-            <a:r>
-              <a:rPr sz="1100">
-                <a:solidFill>
-                  <a:srgbClr val="94A3B8"/>
+              <a:defRPr sz="1200">
+                <a:solidFill>
+                  <a:srgbClr val="E5E7EB"/>
                 </a:solidFill>
                 <a:latin typeface="Consolas"/>
                 <a:ea typeface="Consolas"/>
                 <a:cs typeface="Consolas"/>
-              </a:rPr>
-              <a:t># Build artifacts</a:t>
+              </a:defRPr>
+            </a:pPr>
+            <a:r>
+              <a:rPr sz="1200">
+                <a:solidFill>
+                  <a:srgbClr val="E5E7EB"/>
+                </a:solidFill>
+                <a:latin typeface="Consolas"/>
+                <a:ea typeface="Consolas"/>
+                <a:cs typeface="Consolas"/>
+              </a:rPr>
+              <a:t>build/</a:t>
             </a:r>
             <a:endParaRPr sz="1100"/>
           </a:p>
@@ -14073,17 +14483,25 @@
                 <a:spcPts val="200"/>
               </a:spcAft>
               <a:buNone/>
-            </a:pPr>
-            <a:r>
-              <a:rPr sz="1100">
-                <a:solidFill>
-                  <a:srgbClr val="E2E8F0"/>
+              <a:defRPr sz="1200">
+                <a:solidFill>
+                  <a:srgbClr val="E5E7EB"/>
                 </a:solidFill>
                 <a:latin typeface="Consolas"/>
                 <a:ea typeface="Consolas"/>
                 <a:cs typeface="Consolas"/>
-              </a:rPr>
-              <a:t>dist/</a:t>
+              </a:defRPr>
+            </a:pPr>
+            <a:r>
+              <a:rPr sz="1200">
+                <a:solidFill>
+                  <a:srgbClr val="E5E7EB"/>
+                </a:solidFill>
+                <a:latin typeface="Consolas"/>
+                <a:ea typeface="Consolas"/>
+                <a:cs typeface="Consolas"/>
+              </a:rPr>
+              <a:t>.next/</a:t>
             </a:r>
             <a:endParaRPr sz="1100"/>
           </a:p>
@@ -14103,7 +14521,7 @@
                 <a:ea typeface="Consolas"/>
                 <a:cs typeface="Consolas"/>
               </a:rPr>
-              <a:t>build/</a:t>
+              <a:t/>
             </a:r>
             <a:endParaRPr sz="1100"/>
           </a:p>
@@ -14113,17 +14531,25 @@
                 <a:spcPts val="200"/>
               </a:spcAft>
               <a:buNone/>
-            </a:pPr>
-            <a:r>
-              <a:rPr sz="1100">
-                <a:solidFill>
-                  <a:srgbClr val="E2E8F0"/>
+              <a:defRPr sz="1200">
+                <a:solidFill>
+                  <a:srgbClr val="E5E7EB"/>
                 </a:solidFill>
                 <a:latin typeface="Consolas"/>
                 <a:ea typeface="Consolas"/>
                 <a:cs typeface="Consolas"/>
-              </a:rPr>
-              <a:t>.next/</a:t>
+              </a:defRPr>
+            </a:pPr>
+            <a:r>
+              <a:rPr sz="1200">
+                <a:solidFill>
+                  <a:srgbClr val="E5E7EB"/>
+                </a:solidFill>
+                <a:latin typeface="Consolas"/>
+                <a:ea typeface="Consolas"/>
+                <a:cs typeface="Consolas"/>
+              </a:rPr>
+              <a:t># Git &amp; IDE</a:t>
             </a:r>
             <a:endParaRPr sz="1100"/>
           </a:p>
@@ -14133,7 +14559,26 @@
                 <a:spcPts val="200"/>
               </a:spcAft>
               <a:buNone/>
-            </a:pPr>
+              <a:defRPr sz="1200">
+                <a:solidFill>
+                  <a:srgbClr val="E5E7EB"/>
+                </a:solidFill>
+                <a:latin typeface="Consolas"/>
+                <a:ea typeface="Consolas"/>
+                <a:cs typeface="Consolas"/>
+              </a:defRPr>
+            </a:pPr>
+            <a:r>
+              <a:rPr sz="1200">
+                <a:solidFill>
+                  <a:srgbClr val="E5E7EB"/>
+                </a:solidFill>
+                <a:latin typeface="Consolas"/>
+                <a:ea typeface="Consolas"/>
+                <a:cs typeface="Consolas"/>
+              </a:rPr>
+              <a:t>.git/</a:t>
+            </a:r>
             <a:endParaRPr sz="1100"/>
           </a:p>
           <a:p xmlns:a="http://schemas.openxmlformats.org/drawingml/2006/main">
@@ -14142,17 +14587,25 @@
                 <a:spcPts val="200"/>
               </a:spcAft>
               <a:buNone/>
-            </a:pPr>
-            <a:r>
-              <a:rPr sz="1100">
-                <a:solidFill>
-                  <a:srgbClr val="94A3B8"/>
+              <a:defRPr sz="1200">
+                <a:solidFill>
+                  <a:srgbClr val="E5E7EB"/>
                 </a:solidFill>
                 <a:latin typeface="Consolas"/>
                 <a:ea typeface="Consolas"/>
                 <a:cs typeface="Consolas"/>
-              </a:rPr>
-              <a:t># Git + IDE</a:t>
+              </a:defRPr>
+            </a:pPr>
+            <a:r>
+              <a:rPr sz="1200">
+                <a:solidFill>
+                  <a:srgbClr val="E5E7EB"/>
+                </a:solidFill>
+                <a:latin typeface="Consolas"/>
+                <a:ea typeface="Consolas"/>
+                <a:cs typeface="Consolas"/>
+              </a:rPr>
+              <a:t>.vscode/</a:t>
             </a:r>
             <a:endParaRPr sz="1100"/>
           </a:p>
@@ -14162,17 +14615,25 @@
                 <a:spcPts val="200"/>
               </a:spcAft>
               <a:buNone/>
-            </a:pPr>
-            <a:r>
-              <a:rPr sz="1100">
-                <a:solidFill>
-                  <a:srgbClr val="E2E8F0"/>
+              <a:defRPr sz="1200">
+                <a:solidFill>
+                  <a:srgbClr val="E5E7EB"/>
                 </a:solidFill>
                 <a:latin typeface="Consolas"/>
                 <a:ea typeface="Consolas"/>
                 <a:cs typeface="Consolas"/>
-              </a:rPr>
-              <a:t>.git/</a:t>
+              </a:defRPr>
+            </a:pPr>
+            <a:r>
+              <a:rPr sz="1200">
+                <a:solidFill>
+                  <a:srgbClr val="E5E7EB"/>
+                </a:solidFill>
+                <a:latin typeface="Consolas"/>
+                <a:ea typeface="Consolas"/>
+                <a:cs typeface="Consolas"/>
+              </a:rPr>
+              <a:t>.idea/</a:t>
             </a:r>
             <a:endParaRPr sz="1100"/>
           </a:p>
@@ -14192,7 +14653,7 @@
                 <a:ea typeface="Consolas"/>
                 <a:cs typeface="Consolas"/>
               </a:rPr>
-              <a:t>.vscode/</a:t>
+              <a:t/>
             </a:r>
             <a:endParaRPr sz="1100"/>
           </a:p>
@@ -14202,17 +14663,25 @@
                 <a:spcPts val="200"/>
               </a:spcAft>
               <a:buNone/>
-            </a:pPr>
-            <a:r>
-              <a:rPr sz="1100">
-                <a:solidFill>
-                  <a:srgbClr val="E2E8F0"/>
+              <a:defRPr sz="1200">
+                <a:solidFill>
+                  <a:srgbClr val="E5E7EB"/>
                 </a:solidFill>
                 <a:latin typeface="Consolas"/>
                 <a:ea typeface="Consolas"/>
                 <a:cs typeface="Consolas"/>
-              </a:rPr>
-              <a:t>.idea/</a:t>
+              </a:defRPr>
+            </a:pPr>
+            <a:r>
+              <a:rPr sz="1200">
+                <a:solidFill>
+                  <a:srgbClr val="E5E7EB"/>
+                </a:solidFill>
+                <a:latin typeface="Consolas"/>
+                <a:ea typeface="Consolas"/>
+                <a:cs typeface="Consolas"/>
+              </a:rPr>
+              <a:t># Secret &amp; konfigurasi lokal</a:t>
             </a:r>
             <a:endParaRPr sz="1100"/>
           </a:p>
@@ -14222,7 +14691,26 @@
                 <a:spcPts val="200"/>
               </a:spcAft>
               <a:buNone/>
-            </a:pPr>
+              <a:defRPr sz="1200">
+                <a:solidFill>
+                  <a:srgbClr val="E5E7EB"/>
+                </a:solidFill>
+                <a:latin typeface="Consolas"/>
+                <a:ea typeface="Consolas"/>
+                <a:cs typeface="Consolas"/>
+              </a:defRPr>
+            </a:pPr>
+            <a:r>
+              <a:rPr sz="1200">
+                <a:solidFill>
+                  <a:srgbClr val="E5E7EB"/>
+                </a:solidFill>
+                <a:latin typeface="Consolas"/>
+                <a:ea typeface="Consolas"/>
+                <a:cs typeface="Consolas"/>
+              </a:rPr>
+              <a:t>.env*</a:t>
+            </a:r>
             <a:endParaRPr sz="1100"/>
           </a:p>
           <a:p xmlns:a="http://schemas.openxmlformats.org/drawingml/2006/main">
@@ -14231,17 +14719,25 @@
                 <a:spcPts val="200"/>
               </a:spcAft>
               <a:buNone/>
-            </a:pPr>
-            <a:r>
-              <a:rPr sz="1100">
-                <a:solidFill>
-                  <a:srgbClr val="94A3B8"/>
+              <a:defRPr sz="1200">
+                <a:solidFill>
+                  <a:srgbClr val="E5E7EB"/>
                 </a:solidFill>
                 <a:latin typeface="Consolas"/>
                 <a:ea typeface="Consolas"/>
                 <a:cs typeface="Consolas"/>
-              </a:rPr>
-              <a:t># Secrets &amp; env (CRITICAL!)</a:t>
+              </a:defRPr>
+            </a:pPr>
+            <a:r>
+              <a:rPr sz="1200">
+                <a:solidFill>
+                  <a:srgbClr val="E5E7EB"/>
+                </a:solidFill>
+                <a:latin typeface="Consolas"/>
+                <a:ea typeface="Consolas"/>
+                <a:cs typeface="Consolas"/>
+              </a:rPr>
+              <a:t>*.pem</a:t>
             </a:r>
             <a:endParaRPr sz="1100"/>
           </a:p>
@@ -14251,17 +14747,25 @@
                 <a:spcPts val="200"/>
               </a:spcAft>
               <a:buNone/>
-            </a:pPr>
-            <a:r>
-              <a:rPr sz="1100" b="1">
-                <a:solidFill>
-                  <a:srgbClr val="EF4444"/>
+              <a:defRPr sz="1200">
+                <a:solidFill>
+                  <a:srgbClr val="E5E7EB"/>
                 </a:solidFill>
                 <a:latin typeface="Consolas"/>
                 <a:ea typeface="Consolas"/>
                 <a:cs typeface="Consolas"/>
-              </a:rPr>
-              <a:t>.env*</a:t>
+              </a:defRPr>
+            </a:pPr>
+            <a:r>
+              <a:rPr sz="1200" b="1">
+                <a:solidFill>
+                  <a:srgbClr val="E5E7EB"/>
+                </a:solidFill>
+                <a:latin typeface="Consolas"/>
+                <a:ea typeface="Consolas"/>
+                <a:cs typeface="Consolas"/>
+              </a:rPr>
+              <a:t>secrets/</a:t>
             </a:r>
             <a:endParaRPr sz="1100"/>
           </a:p>
@@ -14281,7 +14785,7 @@
                 <a:ea typeface="Consolas"/>
                 <a:cs typeface="Consolas"/>
               </a:rPr>
-              <a:t>*.pem</a:t>
+              <a:t/>
             </a:r>
             <a:endParaRPr sz="1100"/>
           </a:p>
@@ -14291,17 +14795,25 @@
                 <a:spcPts val="200"/>
               </a:spcAft>
               <a:buNone/>
-            </a:pPr>
-            <a:r>
-              <a:rPr sz="1100" b="1">
-                <a:solidFill>
-                  <a:srgbClr val="EF4444"/>
+              <a:defRPr sz="1200">
+                <a:solidFill>
+                  <a:srgbClr val="E5E7EB"/>
                 </a:solidFill>
                 <a:latin typeface="Consolas"/>
                 <a:ea typeface="Consolas"/>
                 <a:cs typeface="Consolas"/>
-              </a:rPr>
-              <a:t>secrets/</a:t>
+              </a:defRPr>
+            </a:pPr>
+            <a:r>
+              <a:rPr sz="1200" b="1">
+                <a:solidFill>
+                  <a:srgbClr val="E5E7EB"/>
+                </a:solidFill>
+                <a:latin typeface="Consolas"/>
+                <a:ea typeface="Consolas"/>
+                <a:cs typeface="Consolas"/>
+              </a:rPr>
+              <a:t># Sesuaikan kebutuhan aplikasi</a:t>
             </a:r>
             <a:endParaRPr sz="1100"/>
           </a:p>
@@ -14311,7 +14823,26 @@
                 <a:spcPts val="200"/>
               </a:spcAft>
               <a:buNone/>
-            </a:pPr>
+              <a:defRPr sz="1200">
+                <a:solidFill>
+                  <a:srgbClr val="E5E7EB"/>
+                </a:solidFill>
+                <a:latin typeface="Consolas"/>
+                <a:ea typeface="Consolas"/>
+                <a:cs typeface="Consolas"/>
+              </a:defRPr>
+            </a:pPr>
+            <a:r>
+              <a:rPr sz="1200">
+                <a:solidFill>
+                  <a:srgbClr val="E5E7EB"/>
+                </a:solidFill>
+                <a:latin typeface="Consolas"/>
+                <a:ea typeface="Consolas"/>
+                <a:cs typeface="Consolas"/>
+              </a:rPr>
+              <a:t>tests/</a:t>
+            </a:r>
             <a:endParaRPr sz="1100"/>
           </a:p>
           <a:p xmlns:a="http://schemas.openxmlformats.org/drawingml/2006/main">
@@ -14320,17 +14851,25 @@
                 <a:spcPts val="200"/>
               </a:spcAft>
               <a:buNone/>
-            </a:pPr>
-            <a:r>
-              <a:rPr sz="1100">
-                <a:solidFill>
-                  <a:srgbClr val="94A3B8"/>
+              <a:defRPr sz="1200">
+                <a:solidFill>
+                  <a:srgbClr val="E5E7EB"/>
                 </a:solidFill>
                 <a:latin typeface="Consolas"/>
                 <a:ea typeface="Consolas"/>
                 <a:cs typeface="Consolas"/>
-              </a:rPr>
-              <a:t># Test + docs</a:t>
+              </a:defRPr>
+            </a:pPr>
+            <a:r>
+              <a:rPr sz="1200">
+                <a:solidFill>
+                  <a:srgbClr val="E5E7EB"/>
+                </a:solidFill>
+                <a:latin typeface="Consolas"/>
+                <a:ea typeface="Consolas"/>
+                <a:cs typeface="Consolas"/>
+              </a:rPr>
+              <a:t>*.md</a:t>
             </a:r>
             <a:endParaRPr sz="1100"/>
           </a:p>
@@ -14340,51 +14879,19 @@
                 <a:spcPts val="200"/>
               </a:spcAft>
               <a:buNone/>
-            </a:pPr>
-            <a:r>
-              <a:rPr sz="1100">
-                <a:solidFill>
-                  <a:srgbClr val="E2E8F0"/>
+              <a:defRPr sz="1200">
+                <a:solidFill>
+                  <a:srgbClr val="E5E7EB"/>
                 </a:solidFill>
                 <a:latin typeface="Consolas"/>
                 <a:ea typeface="Consolas"/>
                 <a:cs typeface="Consolas"/>
-              </a:rPr>
-              <a:t>tests/</a:t>
-            </a:r>
-            <a:endParaRPr sz="1100"/>
-          </a:p>
-          <a:p xmlns:a="http://schemas.openxmlformats.org/drawingml/2006/main">
-            <a:pPr marL="0" indent="0">
-              <a:spcAft>
-                <a:spcPts val="200"/>
-              </a:spcAft>
-              <a:buNone/>
-            </a:pPr>
-            <a:r>
-              <a:rPr sz="1100">
-                <a:solidFill>
-                  <a:srgbClr val="E2E8F0"/>
-                </a:solidFill>
-                <a:latin typeface="Consolas"/>
-                <a:ea typeface="Consolas"/>
-                <a:cs typeface="Consolas"/>
-              </a:rPr>
-              <a:t>*.md</a:t>
-            </a:r>
-            <a:endParaRPr sz="1100"/>
-          </a:p>
-          <a:p xmlns:a="http://schemas.openxmlformats.org/drawingml/2006/main">
-            <a:pPr marL="0" indent="0">
-              <a:spcAft>
-                <a:spcPts val="200"/>
-              </a:spcAft>
-              <a:buNone/>
-            </a:pPr>
-            <a:r>
-              <a:rPr sz="1100">
-                <a:solidFill>
-                  <a:srgbClr val="E2E8F0"/>
+              </a:defRPr>
+            </a:pPr>
+            <a:r>
+              <a:rPr sz="1200">
+                <a:solidFill>
+                  <a:srgbClr val="E5E7EB"/>
                 </a:solidFill>
                 <a:latin typeface="Consolas"/>
                 <a:ea typeface="Consolas"/>
@@ -14673,7 +15180,7 @@
           <p:nvPr/>
         </p:nvPicPr>
         <p:blipFill>
-          <a:blip xmlns:r="http://schemas.openxmlformats.org/officeDocument/2006/relationships" xmlns:a="http://schemas.openxmlformats.org/drawingml/2006/main" r:embed="R1480e8b25a5c4776"/>
+          <a:blip xmlns:r="http://schemas.openxmlformats.org/officeDocument/2006/relationships" xmlns:a="http://schemas.openxmlformats.org/drawingml/2006/main" r:embed="R9c450f55d05342ca"/>
           <a:stretch xmlns:a="http://schemas.openxmlformats.org/drawingml/2006/main">
             <a:fillRect l="0" t="0" r="0" b="0"/>
           </a:stretch>
@@ -14697,7 +15204,7 @@
           <p:nvPr/>
         </p:nvPicPr>
         <p:blipFill>
-          <a:blip xmlns:r="http://schemas.openxmlformats.org/officeDocument/2006/relationships" xmlns:a="http://schemas.openxmlformats.org/drawingml/2006/main" r:embed="R0181fb76992f4986"/>
+          <a:blip xmlns:r="http://schemas.openxmlformats.org/officeDocument/2006/relationships" xmlns:a="http://schemas.openxmlformats.org/drawingml/2006/main" r:embed="R4a6746278d314ed9"/>
           <a:stretch xmlns:a="http://schemas.openxmlformats.org/drawingml/2006/main">
             <a:fillRect l="0" t="0" r="0" b="0"/>
           </a:stretch>
@@ -14894,7 +15401,7 @@
                 <a:ea typeface="Calibri"/>
                 <a:cs typeface="Calibri"/>
               </a:rPr>
-              <a:t>Dari 1.2 GB ke 150 MB - tanpa kehilangan functionality.</a:t>
+              <a:t>Pilih base yang sesuai dan ukur image hasil build.</a:t>
             </a:r>
             <a:endParaRPr sz="1400"/>
           </a:p>
@@ -15063,7 +15570,7 @@
           <p:nvPr/>
         </p:nvPicPr>
         <p:blipFill>
-          <a:blip xmlns:r="http://schemas.openxmlformats.org/officeDocument/2006/relationships" xmlns:a="http://schemas.openxmlformats.org/drawingml/2006/main" r:embed="Raecd9577c1374693"/>
+          <a:blip xmlns:r="http://schemas.openxmlformats.org/officeDocument/2006/relationships" xmlns:a="http://schemas.openxmlformats.org/drawingml/2006/main" r:embed="Rab3858c24cab40af"/>
           <a:stretch xmlns:a="http://schemas.openxmlformats.org/drawingml/2006/main">
             <a:fillRect l="0" t="0" r="0" b="0"/>
           </a:stretch>
@@ -15087,7 +15594,7 @@
           <p:nvPr/>
         </p:nvPicPr>
         <p:blipFill>
-          <a:blip xmlns:r="http://schemas.openxmlformats.org/officeDocument/2006/relationships" xmlns:a="http://schemas.openxmlformats.org/drawingml/2006/main" r:embed="Rce92dd68a18d4fdd"/>
+          <a:blip xmlns:r="http://schemas.openxmlformats.org/officeDocument/2006/relationships" xmlns:a="http://schemas.openxmlformats.org/drawingml/2006/main" r:embed="R71236a56f8b34cb1"/>
           <a:stretch xmlns:a="http://schemas.openxmlformats.org/drawingml/2006/main">
             <a:fillRect l="0" t="0" r="0" b="0"/>
           </a:stretch>
@@ -15219,7 +15726,7 @@
                 <a:ea typeface="Calibri"/>
                 <a:cs typeface="Calibri"/>
               </a:rPr>
-              <a:t>Pilihan base dengan size yang sangat berbeda</a:t>
+              <a:t>Ukuran bergantung tag, arsitektur, dan dependency aplikasi</a:t>
             </a:r>
             <a:endParaRPr sz="1200"/>
           </a:p>
@@ -15421,7 +15928,7 @@
                 <a:ea typeface="Consolas"/>
                 <a:cs typeface="Consolas"/>
               </a:rPr>
-              <a:t>node:20</a:t>
+              <a:t>node:24</a:t>
             </a:r>
             <a:endParaRPr sz="1300"/>
           </a:p>
@@ -15467,7 +15974,7 @@
                 <a:ea typeface="Calibri"/>
                 <a:cs typeface="Calibri"/>
               </a:rPr>
-              <a:t>1.1 GB</a:t>
+              <a:t>Full</a:t>
             </a:r>
             <a:endParaRPr sz="3000"/>
           </a:p>
@@ -15559,7 +16066,7 @@
                 <a:ea typeface="Calibri"/>
                 <a:cs typeface="Calibri"/>
               </a:rPr>
-              <a:t>Full Debian + dev tools. Compatible semua native module.</a:t>
+              <a:t>Debian dengan tool tambahan. Tetap uji kompatibilitas dependency.</a:t>
             </a:r>
             <a:endParaRPr sz="1050"/>
           </a:p>
@@ -15794,7 +16301,7 @@
                 <a:ea typeface="Consolas"/>
                 <a:cs typeface="Consolas"/>
               </a:rPr>
-              <a:t>node:20-slim</a:t>
+              <a:t>node:24-slim</a:t>
             </a:r>
             <a:endParaRPr sz="1300"/>
           </a:p>
@@ -15840,7 +16347,7 @@
                 <a:ea typeface="Calibri"/>
                 <a:cs typeface="Calibri"/>
               </a:rPr>
-              <a:t>240 MB</a:t>
+              <a:t>Slim</a:t>
             </a:r>
             <a:endParaRPr sz="3000"/>
           </a:p>
@@ -16055,7 +16562,7 @@
                 <a:ea typeface="Calibri"/>
                 <a:cs typeface="Calibri"/>
               </a:rPr>
-              <a:t>Production default</a:t>
+              <a:t>Runtime Debian</a:t>
             </a:r>
             <a:endParaRPr sz="1100"/>
           </a:p>
@@ -16167,7 +16674,7 @@
                 <a:ea typeface="Consolas"/>
                 <a:cs typeface="Consolas"/>
               </a:rPr>
-              <a:t>node:20-alpine</a:t>
+              <a:t>node:24-alpine</a:t>
             </a:r>
             <a:endParaRPr sz="1300"/>
           </a:p>
@@ -16213,7 +16720,7 @@
                 <a:ea typeface="Calibri"/>
                 <a:cs typeface="Calibri"/>
               </a:rPr>
-              <a:t>150 MB</a:t>
+              <a:t>Alpine</a:t>
             </a:r>
             <a:endParaRPr sz="3000"/>
           </a:p>
@@ -16540,7 +17047,7 @@
                 <a:ea typeface="Consolas"/>
                 <a:cs typeface="Consolas"/>
               </a:rPr>
-              <a:t>distroless/node</a:t>
+              <a:t>Distroless Node.js</a:t>
             </a:r>
             <a:endParaRPr sz="1300"/>
           </a:p>
@@ -16586,7 +17093,7 @@
                 <a:ea typeface="Calibri"/>
                 <a:cs typeface="Calibri"/>
               </a:rPr>
-              <a:t>180 MB</a:t>
+              <a:t>Minimal</a:t>
             </a:r>
             <a:endParaRPr sz="3000"/>
           </a:p>
@@ -16632,7 +17139,7 @@
                 <a:ea typeface="Calibri"/>
                 <a:cs typeface="Calibri"/>
               </a:rPr>
-              <a:t>No OS layer</a:t>
+              <a:t>Runtime + pustaka OS</a:t>
             </a:r>
             <a:endParaRPr sz="1000"/>
           </a:p>
@@ -16801,7 +17308,7 @@
                 <a:ea typeface="Calibri"/>
                 <a:cs typeface="Calibri"/>
               </a:rPr>
-              <a:t>Max security</a:t>
+              <a:t>Runtime tanpa shell</a:t>
             </a:r>
             <a:endParaRPr sz="1100"/>
           </a:p>
@@ -16847,73 +17354,7 @@
                 <a:ea typeface="Calibri"/>
                 <a:cs typeface="Calibri"/>
               </a:rPr>
-              <a:t>Rekomendasi: </a:t>
-            </a:r>
-            <a:r>
-              <a:rPr sz="1100" b="1" i="1">
-                <a:solidFill>
-                  <a:srgbClr val="059669"/>
-                </a:solidFill>
-                <a:latin typeface="Consolas"/>
-                <a:ea typeface="Consolas"/>
-                <a:cs typeface="Consolas"/>
-              </a:rPr>
-              <a:t>alpine </a:t>
-            </a:r>
-            <a:r>
-              <a:rPr sz="1100" i="1">
-                <a:solidFill>
-                  <a:srgbClr val="1E293B"/>
-                </a:solidFill>
-                <a:latin typeface="Calibri"/>
-                <a:ea typeface="Calibri"/>
-                <a:cs typeface="Calibri"/>
-              </a:rPr>
-              <a:t>untuk production. </a:t>
-            </a:r>
-            <a:r>
-              <a:rPr sz="1100" b="1" i="1">
-                <a:solidFill>
-                  <a:srgbClr val="F37021"/>
-                </a:solidFill>
-                <a:latin typeface="Consolas"/>
-                <a:ea typeface="Consolas"/>
-                <a:cs typeface="Consolas"/>
-              </a:rPr>
-              <a:t>slim </a:t>
-            </a:r>
-            <a:r>
-              <a:rPr sz="1100" i="1">
-                <a:solidFill>
-                  <a:srgbClr val="1E293B"/>
-                </a:solidFill>
-                <a:latin typeface="Calibri"/>
-                <a:ea typeface="Calibri"/>
-                <a:cs typeface="Calibri"/>
-              </a:rPr>
-              <a:t>kalau punya native module yg break di alpine. </a:t>
-            </a:r>
-            <a:r>
-              <a:rPr sz="1100" b="1" i="1">
-                <a:solidFill>
-                  <a:srgbClr val="1976D2"/>
-                </a:solidFill>
-                <a:latin typeface="Consolas"/>
-                <a:ea typeface="Consolas"/>
-                <a:cs typeface="Consolas"/>
-              </a:rPr>
-              <a:t>distroless </a:t>
-            </a:r>
-            <a:r>
-              <a:rPr sz="1100" i="1">
-                <a:solidFill>
-                  <a:srgbClr val="1E293B"/>
-                </a:solidFill>
-                <a:latin typeface="Calibri"/>
-                <a:ea typeface="Calibri"/>
-                <a:cs typeface="Calibri"/>
-              </a:rPr>
-              <a:t>kalau security paranoid.</a:t>
+              <a:t>Pilih berdasarkan kebutuhan dependency dan operasi. Image kecil tetap perlu dipelihara, diuji, dan dipindai.</a:t>
             </a:r>
             <a:endParaRPr sz="1100"/>
           </a:p>
@@ -17082,7 +17523,7 @@
           <p:nvPr/>
         </p:nvPicPr>
         <p:blipFill>
-          <a:blip xmlns:r="http://schemas.openxmlformats.org/officeDocument/2006/relationships" xmlns:a="http://schemas.openxmlformats.org/drawingml/2006/main" r:embed="Ra8d054a1136e449b"/>
+          <a:blip xmlns:r="http://schemas.openxmlformats.org/officeDocument/2006/relationships" xmlns:a="http://schemas.openxmlformats.org/drawingml/2006/main" r:embed="R5e480a286f7c4fd0"/>
           <a:stretch xmlns:a="http://schemas.openxmlformats.org/drawingml/2006/main">
             <a:fillRect l="0" t="0" r="0" b="0"/>
           </a:stretch>
@@ -17106,7 +17547,7 @@
           <p:nvPr/>
         </p:nvPicPr>
         <p:blipFill>
-          <a:blip xmlns:r="http://schemas.openxmlformats.org/officeDocument/2006/relationships" xmlns:a="http://schemas.openxmlformats.org/drawingml/2006/main" r:embed="R6b5bed4e09e345a5"/>
+          <a:blip xmlns:r="http://schemas.openxmlformats.org/officeDocument/2006/relationships" xmlns:a="http://schemas.openxmlformats.org/drawingml/2006/main" r:embed="Rc8cd251c86a74e7b"/>
           <a:stretch xmlns:a="http://schemas.openxmlformats.org/drawingml/2006/main">
             <a:fillRect l="0" t="0" r="0" b="0"/>
           </a:stretch>
@@ -17366,7 +17807,7 @@
           <p:nvPr/>
         </p:nvPicPr>
         <p:blipFill>
-          <a:blip xmlns:r="http://schemas.openxmlformats.org/officeDocument/2006/relationships" xmlns:a="http://schemas.openxmlformats.org/drawingml/2006/main" r:embed="R89f5064c3f45490f"/>
+          <a:blip xmlns:r="http://schemas.openxmlformats.org/officeDocument/2006/relationships" xmlns:a="http://schemas.openxmlformats.org/drawingml/2006/main" r:embed="R2036864c9fa641c9"/>
           <a:stretch xmlns:a="http://schemas.openxmlformats.org/drawingml/2006/main">
             <a:fillRect l="0" t="0" r="0" b="0"/>
           </a:stretch>
@@ -17436,7 +17877,7 @@
           <p:nvPr/>
         </p:nvPicPr>
         <p:blipFill>
-          <a:blip xmlns:r="http://schemas.openxmlformats.org/officeDocument/2006/relationships" xmlns:a="http://schemas.openxmlformats.org/drawingml/2006/main" r:embed="R394d1f1bd06a4b17"/>
+          <a:blip xmlns:r="http://schemas.openxmlformats.org/officeDocument/2006/relationships" xmlns:a="http://schemas.openxmlformats.org/drawingml/2006/main" r:embed="R96d76fe15d534e6c"/>
           <a:stretch xmlns:a="http://schemas.openxmlformats.org/drawingml/2006/main">
             <a:fillRect l="0" t="0" r="0" b="0"/>
           </a:stretch>
@@ -17506,7 +17947,7 @@
           <p:nvPr/>
         </p:nvPicPr>
         <p:blipFill>
-          <a:blip xmlns:r="http://schemas.openxmlformats.org/officeDocument/2006/relationships" xmlns:a="http://schemas.openxmlformats.org/drawingml/2006/main" r:embed="R1b0d6b3975c24b56"/>
+          <a:blip xmlns:r="http://schemas.openxmlformats.org/officeDocument/2006/relationships" xmlns:a="http://schemas.openxmlformats.org/drawingml/2006/main" r:embed="R403ff92e1a8d49f1"/>
           <a:stretch xmlns:a="http://schemas.openxmlformats.org/drawingml/2006/main">
             <a:fillRect l="0" t="0" r="0" b="0"/>
           </a:stretch>
@@ -17576,7 +18017,7 @@
           <p:nvPr/>
         </p:nvPicPr>
         <p:blipFill>
-          <a:blip xmlns:r="http://schemas.openxmlformats.org/officeDocument/2006/relationships" xmlns:a="http://schemas.openxmlformats.org/drawingml/2006/main" r:embed="Rac185abf574e4742"/>
+          <a:blip xmlns:r="http://schemas.openxmlformats.org/officeDocument/2006/relationships" xmlns:a="http://schemas.openxmlformats.org/drawingml/2006/main" r:embed="Raeab533e27214981"/>
           <a:stretch xmlns:a="http://schemas.openxmlformats.org/drawingml/2006/main">
             <a:fillRect l="0" t="0" r="0" b="0"/>
           </a:stretch>
@@ -17646,7 +18087,7 @@
           <p:nvPr/>
         </p:nvPicPr>
         <p:blipFill>
-          <a:blip xmlns:r="http://schemas.openxmlformats.org/officeDocument/2006/relationships" xmlns:a="http://schemas.openxmlformats.org/drawingml/2006/main" r:embed="R7059717993494a15"/>
+          <a:blip xmlns:r="http://schemas.openxmlformats.org/officeDocument/2006/relationships" xmlns:a="http://schemas.openxmlformats.org/drawingml/2006/main" r:embed="Re63b472da96e42ba"/>
           <a:stretch xmlns:a="http://schemas.openxmlformats.org/drawingml/2006/main">
             <a:fillRect l="0" t="0" r="0" b="0"/>
           </a:stretch>
@@ -17863,7 +18304,18 @@
                 <a:ea typeface="Calibri"/>
                 <a:cs typeface="Calibri"/>
               </a:rPr>
-              <a:t>1. Dockerfile fundamentals + 14 instruksi</a:t>
+              <a:t>1. </a:t>
+            </a:r>
+            <a:r>
+              <a:rPr sz="1200">
+                <a:solidFill>
+                  <a:srgbClr val="FFFFFF"/>
+                </a:solidFill>
+                <a:latin typeface="Calibri"/>
+                <a:ea typeface="Calibri"/>
+                <a:cs typeface="Calibri"/>
+              </a:rPr>
+              <a:t>Dockerfile + 14 instruksi inti</a:t>
             </a:r>
             <a:endParaRPr sz="1200"/>
           </a:p>
@@ -18178,7 +18630,7 @@
           <p:nvPr/>
         </p:nvPicPr>
         <p:blipFill>
-          <a:blip xmlns:r="http://schemas.openxmlformats.org/officeDocument/2006/relationships" xmlns:a="http://schemas.openxmlformats.org/drawingml/2006/main" r:embed="R4a11ccb50b6d4eb3"/>
+          <a:blip xmlns:r="http://schemas.openxmlformats.org/officeDocument/2006/relationships" xmlns:a="http://schemas.openxmlformats.org/drawingml/2006/main" r:embed="Rb7287c44d39e4d9d"/>
           <a:stretch xmlns:a="http://schemas.openxmlformats.org/drawingml/2006/main">
             <a:fillRect l="0" t="0" r="0" b="0"/>
           </a:stretch>
@@ -18202,7 +18654,7 @@
           <p:nvPr/>
         </p:nvPicPr>
         <p:blipFill>
-          <a:blip xmlns:r="http://schemas.openxmlformats.org/officeDocument/2006/relationships" xmlns:a="http://schemas.openxmlformats.org/drawingml/2006/main" r:embed="Re7071c7f2b104de0"/>
+          <a:blip xmlns:r="http://schemas.openxmlformats.org/officeDocument/2006/relationships" xmlns:a="http://schemas.openxmlformats.org/drawingml/2006/main" r:embed="Rdb3554c889f74e6a"/>
           <a:stretch xmlns:a="http://schemas.openxmlformats.org/drawingml/2006/main">
             <a:fillRect l="0" t="0" r="0" b="0"/>
           </a:stretch>
@@ -18288,7 +18740,7 @@
                 <a:ea typeface="Calibri"/>
                 <a:cs typeface="Calibri"/>
               </a:rPr>
-              <a:t>Multi-Stage Build - The Killer Feature</a:t>
+              <a:t>Multi-Stage Build</a:t>
             </a:r>
             <a:endParaRPr sz="2200"/>
           </a:p>
@@ -18334,7 +18786,7 @@
                 <a:ea typeface="Calibri"/>
                 <a:cs typeface="Calibri"/>
               </a:rPr>
-              <a:t>Pisahkan build environment dari runtime - image final super kecil</a:t>
+              <a:t>Pisahkan kebutuhan build dari runtime; ukur ukuran hasilnya</a:t>
             </a:r>
             <a:endParaRPr sz="1200"/>
           </a:p>
@@ -18553,7 +19005,7 @@
                 <a:ea typeface="Calibri"/>
                 <a:cs typeface="Calibri"/>
               </a:rPr>
-              <a:t>Stage 1: BUILDER  (1.2 GB)</a:t>
+              <a:t>Stage 1: BUILDER</a:t>
             </a:r>
             <a:endParaRPr sz="1300"/>
           </a:p>
@@ -18878,7 +19330,7 @@
                 <a:ea typeface="Calibri"/>
                 <a:cs typeface="Calibri"/>
               </a:rPr>
-              <a:t>Stage 2: RUNNER  (150 MB)</a:t>
+              <a:t>Stage 2: RUNNER</a:t>
             </a:r>
             <a:endParaRPr sz="1300"/>
           </a:p>
@@ -18928,7 +19380,7 @@
                 <a:ea typeface="Calibri"/>
                 <a:cs typeface="Calibri"/>
               </a:rPr>
-              <a:t>node:20-alpine (minimal)</a:t>
+              <a:t>node:24-bookworm-slim</a:t>
             </a:r>
             <a:endParaRPr sz="1100"/>
           </a:p>
@@ -19238,7 +19690,7 @@
           <p:nvPr/>
         </p:nvPicPr>
         <p:blipFill>
-          <a:blip xmlns:r="http://schemas.openxmlformats.org/officeDocument/2006/relationships" xmlns:a="http://schemas.openxmlformats.org/drawingml/2006/main" r:embed="Rdcdf214e425143d6"/>
+          <a:blip xmlns:r="http://schemas.openxmlformats.org/officeDocument/2006/relationships" xmlns:a="http://schemas.openxmlformats.org/drawingml/2006/main" r:embed="R103294279e474b20"/>
           <a:stretch xmlns:a="http://schemas.openxmlformats.org/drawingml/2006/main">
             <a:fillRect l="0" t="0" r="0" b="0"/>
           </a:stretch>
@@ -19262,7 +19714,7 @@
           <p:nvPr/>
         </p:nvPicPr>
         <p:blipFill>
-          <a:blip xmlns:r="http://schemas.openxmlformats.org/officeDocument/2006/relationships" xmlns:a="http://schemas.openxmlformats.org/drawingml/2006/main" r:embed="Rc9a04925e3fa4196"/>
+          <a:blip xmlns:r="http://schemas.openxmlformats.org/officeDocument/2006/relationships" xmlns:a="http://schemas.openxmlformats.org/drawingml/2006/main" r:embed="R4ecc4e246e1f4ad1"/>
           <a:stretch xmlns:a="http://schemas.openxmlformats.org/drawingml/2006/main">
             <a:fillRect l="0" t="0" r="0" b="0"/>
           </a:stretch>
@@ -19394,7 +19846,7 @@
                 <a:ea typeface="Calibri"/>
                 <a:cs typeface="Calibri"/>
               </a:rPr>
-              <a:t>Dockerfile lengkap dengan builder + runner stages</a:t>
+              <a:t>Kode: examples/theory-node/Dockerfile.multistage</a:t>
             </a:r>
             <a:endParaRPr sz="1200"/>
           </a:p>
@@ -19636,7 +20088,9 @@
           <a:noFill xmlns:a="http://schemas.openxmlformats.org/drawingml/2006/main"/>
         </p:spPr>
         <p:txBody>
-          <a:bodyPr xmlns:a="http://schemas.openxmlformats.org/drawingml/2006/main" wrap="square" lIns="0" tIns="0" rIns="0" bIns="0" anchor="t"/>
+          <a:bodyPr xmlns:a="http://schemas.openxmlformats.org/drawingml/2006/main" wrap="square" lIns="0" tIns="0" rIns="0" bIns="0" anchor="t">
+            <a:noAutofit/>
+          </a:bodyPr>
           <a:lstStyle xmlns:a="http://schemas.openxmlformats.org/drawingml/2006/main"/>
           <a:p xmlns:a="http://schemas.openxmlformats.org/drawingml/2006/main">
             <a:pPr marL="0" indent="0">
@@ -19644,17 +20098,25 @@
                 <a:spcPts val="200"/>
               </a:spcAft>
               <a:buNone/>
-            </a:pPr>
-            <a:r>
-              <a:rPr sz="1100" b="1">
-                <a:solidFill>
-                  <a:srgbClr val="94A3B8"/>
+              <a:defRPr sz="1200">
+                <a:solidFill>
+                  <a:srgbClr val="E5E7EB"/>
                 </a:solidFill>
                 <a:latin typeface="Consolas"/>
                 <a:ea typeface="Consolas"/>
                 <a:cs typeface="Consolas"/>
-              </a:rPr>
-              <a:t># ============ Stage 1: BUILDER ============</a:t>
+              </a:defRPr>
+            </a:pPr>
+            <a:r>
+              <a:rPr sz="1200" b="1">
+                <a:solidFill>
+                  <a:srgbClr val="E5E7EB"/>
+                </a:solidFill>
+                <a:latin typeface="Consolas"/>
+                <a:ea typeface="Consolas"/>
+                <a:cs typeface="Consolas"/>
+              </a:rPr>
+              <a:t># Stage builder: contoh aplikasi Node</a:t>
             </a:r>
             <a:endParaRPr sz="1100"/>
           </a:p>
@@ -19664,50 +20126,25 @@
                 <a:spcPts val="200"/>
               </a:spcAft>
               <a:buNone/>
-            </a:pPr>
-            <a:r>
-              <a:rPr sz="1100" b="1">
-                <a:solidFill>
-                  <a:srgbClr val="F37021"/>
+              <a:defRPr sz="1200">
+                <a:solidFill>
+                  <a:srgbClr val="E5E7EB"/>
                 </a:solidFill>
                 <a:latin typeface="Consolas"/>
                 <a:ea typeface="Consolas"/>
                 <a:cs typeface="Consolas"/>
-              </a:rPr>
-              <a:t>FROM </a:t>
-            </a:r>
-            <a:r>
-              <a:rPr sz="1100">
-                <a:solidFill>
-                  <a:srgbClr val="60A5FA"/>
+              </a:defRPr>
+            </a:pPr>
+            <a:r>
+              <a:rPr sz="1200" b="1">
+                <a:solidFill>
+                  <a:srgbClr val="E5E7EB"/>
                 </a:solidFill>
                 <a:latin typeface="Consolas"/>
                 <a:ea typeface="Consolas"/>
                 <a:cs typeface="Consolas"/>
               </a:rPr>
-              <a:t>node:20</a:t>
-            </a:r>
-            <a:r>
-              <a:rPr sz="1100" b="1">
-                <a:solidFill>
-                  <a:srgbClr val="F37021"/>
-                </a:solidFill>
-                <a:latin typeface="Consolas"/>
-                <a:ea typeface="Consolas"/>
-                <a:cs typeface="Consolas"/>
-              </a:rPr>
-              <a:t> AS </a:t>
-            </a:r>
-            <a:r>
-              <a:rPr sz="1100" b="1">
-                <a:solidFill>
-                  <a:srgbClr val="10B981"/>
-                </a:solidFill>
-                <a:latin typeface="Consolas"/>
-                <a:ea typeface="Consolas"/>
-                <a:cs typeface="Consolas"/>
-              </a:rPr>
-              <a:t>builder</a:t>
+              <a:t>FROM node:24-bookworm-slim AS builder</a:t>
             </a:r>
             <a:endParaRPr sz="1100"/>
           </a:p>
@@ -19717,11 +20154,19 @@
                 <a:spcPts val="200"/>
               </a:spcAft>
               <a:buNone/>
-            </a:pPr>
-            <a:r>
-              <a:rPr sz="1100">
-                <a:solidFill>
-                  <a:srgbClr val="E2E8F0"/>
+              <a:defRPr sz="1200">
+                <a:solidFill>
+                  <a:srgbClr val="E5E7EB"/>
+                </a:solidFill>
+                <a:latin typeface="Consolas"/>
+                <a:ea typeface="Consolas"/>
+                <a:cs typeface="Consolas"/>
+              </a:defRPr>
+            </a:pPr>
+            <a:r>
+              <a:rPr sz="1200">
+                <a:solidFill>
+                  <a:srgbClr val="E5E7EB"/>
                 </a:solidFill>
                 <a:latin typeface="Consolas"/>
                 <a:ea typeface="Consolas"/>
@@ -19737,17 +20182,25 @@
                 <a:spcPts val="200"/>
               </a:spcAft>
               <a:buNone/>
-            </a:pPr>
-            <a:r>
-              <a:rPr sz="1100">
-                <a:solidFill>
-                  <a:srgbClr val="E2E8F0"/>
+              <a:defRPr sz="1200">
+                <a:solidFill>
+                  <a:srgbClr val="E5E7EB"/>
                 </a:solidFill>
                 <a:latin typeface="Consolas"/>
                 <a:ea typeface="Consolas"/>
                 <a:cs typeface="Consolas"/>
-              </a:rPr>
-              <a:t>COPY package*.json ./</a:t>
+              </a:defRPr>
+            </a:pPr>
+            <a:r>
+              <a:rPr sz="1200">
+                <a:solidFill>
+                  <a:srgbClr val="E5E7EB"/>
+                </a:solidFill>
+                <a:latin typeface="Consolas"/>
+                <a:ea typeface="Consolas"/>
+                <a:cs typeface="Consolas"/>
+              </a:rPr>
+              <a:t>COPY package.json package-lock.json ./</a:t>
             </a:r>
             <a:endParaRPr sz="1100"/>
           </a:p>
@@ -19757,17 +20210,25 @@
                 <a:spcPts val="200"/>
               </a:spcAft>
               <a:buNone/>
-            </a:pPr>
-            <a:r>
-              <a:rPr sz="1100">
-                <a:solidFill>
-                  <a:srgbClr val="E2E8F0"/>
+              <a:defRPr sz="1200">
+                <a:solidFill>
+                  <a:srgbClr val="E5E7EB"/>
                 </a:solidFill>
                 <a:latin typeface="Consolas"/>
                 <a:ea typeface="Consolas"/>
                 <a:cs typeface="Consolas"/>
-              </a:rPr>
-              <a:t>RUN npm ci                       # install ALL deps termasuk dev</a:t>
+              </a:defRPr>
+            </a:pPr>
+            <a:r>
+              <a:rPr sz="1200">
+                <a:solidFill>
+                  <a:srgbClr val="E5E7EB"/>
+                </a:solidFill>
+                <a:latin typeface="Consolas"/>
+                <a:ea typeface="Consolas"/>
+                <a:cs typeface="Consolas"/>
+              </a:rPr>
+              <a:t>RUN npm ci</a:t>
             </a:r>
             <a:endParaRPr sz="1100"/>
           </a:p>
@@ -19777,11 +20238,19 @@
                 <a:spcPts val="200"/>
               </a:spcAft>
               <a:buNone/>
-            </a:pPr>
-            <a:r>
-              <a:rPr sz="1100">
-                <a:solidFill>
-                  <a:srgbClr val="E2E8F0"/>
+              <a:defRPr sz="1200">
+                <a:solidFill>
+                  <a:srgbClr val="E5E7EB"/>
+                </a:solidFill>
+                <a:latin typeface="Consolas"/>
+                <a:ea typeface="Consolas"/>
+                <a:cs typeface="Consolas"/>
+              </a:defRPr>
+            </a:pPr>
+            <a:r>
+              <a:rPr sz="1200">
+                <a:solidFill>
+                  <a:srgbClr val="E5E7EB"/>
                 </a:solidFill>
                 <a:latin typeface="Consolas"/>
                 <a:ea typeface="Consolas"/>
@@ -19797,17 +20266,25 @@
                 <a:spcPts val="200"/>
               </a:spcAft>
               <a:buNone/>
-            </a:pPr>
-            <a:r>
-              <a:rPr sz="1100">
-                <a:solidFill>
-                  <a:srgbClr val="E2E8F0"/>
+              <a:defRPr sz="1200">
+                <a:solidFill>
+                  <a:srgbClr val="E5E7EB"/>
                 </a:solidFill>
                 <a:latin typeface="Consolas"/>
                 <a:ea typeface="Consolas"/>
                 <a:cs typeface="Consolas"/>
-              </a:rPr>
-              <a:t>RUN npm run build                # compile TS -&gt; JS di dist/</a:t>
+              </a:defRPr>
+            </a:pPr>
+            <a:r>
+              <a:rPr sz="1200">
+                <a:solidFill>
+                  <a:srgbClr val="E5E7EB"/>
+                </a:solidFill>
+                <a:latin typeface="Consolas"/>
+                <a:ea typeface="Consolas"/>
+                <a:cs typeface="Consolas"/>
+              </a:rPr>
+              <a:t>RUN npm run build</a:t>
             </a:r>
             <a:endParaRPr sz="1100"/>
           </a:p>
@@ -19818,6 +20295,9 @@
               </a:spcAft>
               <a:buNone/>
             </a:pPr>
+            <a:r>
+              <a:t/>
+            </a:r>
             <a:endParaRPr sz="1100"/>
           </a:p>
           <a:p xmlns:a="http://schemas.openxmlformats.org/drawingml/2006/main">
@@ -19826,17 +20306,25 @@
                 <a:spcPts val="200"/>
               </a:spcAft>
               <a:buNone/>
-            </a:pPr>
-            <a:r>
-              <a:rPr sz="1100" b="1">
-                <a:solidFill>
-                  <a:srgbClr val="94A3B8"/>
+              <a:defRPr sz="1200">
+                <a:solidFill>
+                  <a:srgbClr val="E5E7EB"/>
                 </a:solidFill>
                 <a:latin typeface="Consolas"/>
                 <a:ea typeface="Consolas"/>
                 <a:cs typeface="Consolas"/>
-              </a:rPr>
-              <a:t># ============ Stage 2: RUNNER =============</a:t>
+              </a:defRPr>
+            </a:pPr>
+            <a:r>
+              <a:rPr sz="1200" b="1">
+                <a:solidFill>
+                  <a:srgbClr val="E5E7EB"/>
+                </a:solidFill>
+                <a:latin typeface="Consolas"/>
+                <a:ea typeface="Consolas"/>
+                <a:cs typeface="Consolas"/>
+              </a:rPr>
+              <a:t># Stage runtime memakai keluarga OS yang sama</a:t>
             </a:r>
             <a:endParaRPr sz="1100"/>
           </a:p>
@@ -19846,50 +20334,25 @@
                 <a:spcPts val="200"/>
               </a:spcAft>
               <a:buNone/>
-            </a:pPr>
-            <a:r>
-              <a:rPr sz="1100" b="1">
-                <a:solidFill>
-                  <a:srgbClr val="F37021"/>
+              <a:defRPr sz="1200">
+                <a:solidFill>
+                  <a:srgbClr val="E5E7EB"/>
                 </a:solidFill>
                 <a:latin typeface="Consolas"/>
                 <a:ea typeface="Consolas"/>
                 <a:cs typeface="Consolas"/>
-              </a:rPr>
-              <a:t>FROM </a:t>
-            </a:r>
-            <a:r>
-              <a:rPr sz="1100">
-                <a:solidFill>
-                  <a:srgbClr val="60A5FA"/>
+              </a:defRPr>
+            </a:pPr>
+            <a:r>
+              <a:rPr sz="1200" b="1">
+                <a:solidFill>
+                  <a:srgbClr val="E5E7EB"/>
                 </a:solidFill>
                 <a:latin typeface="Consolas"/>
                 <a:ea typeface="Consolas"/>
                 <a:cs typeface="Consolas"/>
               </a:rPr>
-              <a:t>node:20-alpine</a:t>
-            </a:r>
-            <a:r>
-              <a:rPr sz="1100" b="1">
-                <a:solidFill>
-                  <a:srgbClr val="F37021"/>
-                </a:solidFill>
-                <a:latin typeface="Consolas"/>
-                <a:ea typeface="Consolas"/>
-                <a:cs typeface="Consolas"/>
-              </a:rPr>
-              <a:t> AS </a:t>
-            </a:r>
-            <a:r>
-              <a:rPr sz="1100" b="1">
-                <a:solidFill>
-                  <a:srgbClr val="10B981"/>
-                </a:solidFill>
-                <a:latin typeface="Consolas"/>
-                <a:ea typeface="Consolas"/>
-                <a:cs typeface="Consolas"/>
-              </a:rPr>
-              <a:t>runner</a:t>
+              <a:t>FROM node:24-bookworm-slim AS runner</a:t>
             </a:r>
             <a:endParaRPr sz="1100"/>
           </a:p>
@@ -19899,11 +20362,19 @@
                 <a:spcPts val="200"/>
               </a:spcAft>
               <a:buNone/>
-            </a:pPr>
-            <a:r>
-              <a:rPr sz="1100">
-                <a:solidFill>
-                  <a:srgbClr val="E2E8F0"/>
+              <a:defRPr sz="1200">
+                <a:solidFill>
+                  <a:srgbClr val="E5E7EB"/>
+                </a:solidFill>
+                <a:latin typeface="Consolas"/>
+                <a:ea typeface="Consolas"/>
+                <a:cs typeface="Consolas"/>
+              </a:defRPr>
+            </a:pPr>
+            <a:r>
+              <a:rPr sz="1200">
+                <a:solidFill>
+                  <a:srgbClr val="E5E7EB"/>
                 </a:solidFill>
                 <a:latin typeface="Consolas"/>
                 <a:ea typeface="Consolas"/>
@@ -19919,11 +20390,19 @@
                 <a:spcPts val="200"/>
               </a:spcAft>
               <a:buNone/>
-            </a:pPr>
-            <a:r>
-              <a:rPr sz="1100">
-                <a:solidFill>
-                  <a:srgbClr val="E2E8F0"/>
+              <a:defRPr sz="1200">
+                <a:solidFill>
+                  <a:srgbClr val="E5E7EB"/>
+                </a:solidFill>
+                <a:latin typeface="Consolas"/>
+                <a:ea typeface="Consolas"/>
+                <a:cs typeface="Consolas"/>
+              </a:defRPr>
+            </a:pPr>
+            <a:r>
+              <a:rPr sz="1200">
+                <a:solidFill>
+                  <a:srgbClr val="E5E7EB"/>
                 </a:solidFill>
                 <a:latin typeface="Consolas"/>
                 <a:ea typeface="Consolas"/>
@@ -19939,7 +20418,26 @@
                 <a:spcPts val="200"/>
               </a:spcAft>
               <a:buNone/>
-            </a:pPr>
+              <a:defRPr sz="1200">
+                <a:solidFill>
+                  <a:srgbClr val="E5E7EB"/>
+                </a:solidFill>
+                <a:latin typeface="Consolas"/>
+                <a:ea typeface="Consolas"/>
+                <a:cs typeface="Consolas"/>
+              </a:defRPr>
+            </a:pPr>
+            <a:r>
+              <a:rPr sz="1200">
+                <a:solidFill>
+                  <a:srgbClr val="E5E7EB"/>
+                </a:solidFill>
+                <a:latin typeface="Consolas"/>
+                <a:ea typeface="Consolas"/>
+                <a:cs typeface="Consolas"/>
+              </a:rPr>
+              <a:t>COPY --from=builder /app/package*.json ./</a:t>
+            </a:r>
             <a:endParaRPr sz="1100"/>
           </a:p>
           <a:p xmlns:a="http://schemas.openxmlformats.org/drawingml/2006/main">
@@ -19948,17 +20446,25 @@
                 <a:spcPts val="200"/>
               </a:spcAft>
               <a:buNone/>
-            </a:pPr>
-            <a:r>
-              <a:rPr sz="1100">
-                <a:solidFill>
-                  <a:srgbClr val="94A3B8"/>
+              <a:defRPr sz="1200">
+                <a:solidFill>
+                  <a:srgbClr val="E5E7EB"/>
                 </a:solidFill>
                 <a:latin typeface="Consolas"/>
                 <a:ea typeface="Consolas"/>
                 <a:cs typeface="Consolas"/>
-              </a:rPr>
-              <a:t># Copy SELECTIVELY dari stage builder</a:t>
+              </a:defRPr>
+            </a:pPr>
+            <a:r>
+              <a:rPr sz="1200">
+                <a:solidFill>
+                  <a:srgbClr val="E5E7EB"/>
+                </a:solidFill>
+                <a:latin typeface="Consolas"/>
+                <a:ea typeface="Consolas"/>
+                <a:cs typeface="Consolas"/>
+              </a:rPr>
+              <a:t>RUN npm ci --omit=dev &amp;&amp; npm cache clean --force</a:t>
             </a:r>
             <a:endParaRPr sz="1100"/>
           </a:p>
@@ -19968,28 +20474,25 @@
                 <a:spcPts val="200"/>
               </a:spcAft>
               <a:buNone/>
-            </a:pPr>
-            <a:r>
-              <a:rPr sz="1100" b="1">
-                <a:solidFill>
-                  <a:srgbClr val="F37021"/>
+              <a:defRPr sz="1200">
+                <a:solidFill>
+                  <a:srgbClr val="E5E7EB"/>
                 </a:solidFill>
                 <a:latin typeface="Consolas"/>
                 <a:ea typeface="Consolas"/>
                 <a:cs typeface="Consolas"/>
-              </a:rPr>
-              <a:t>COPY --from=builder </a:t>
-            </a:r>
-            <a:r>
-              <a:rPr sz="1100">
-                <a:solidFill>
-                  <a:srgbClr val="E2E8F0"/>
+              </a:defRPr>
+            </a:pPr>
+            <a:r>
+              <a:rPr sz="1200" b="1">
+                <a:solidFill>
+                  <a:srgbClr val="E5E7EB"/>
                 </a:solidFill>
                 <a:latin typeface="Consolas"/>
                 <a:ea typeface="Consolas"/>
                 <a:cs typeface="Consolas"/>
               </a:rPr>
-              <a:t>/app/package*.json ./</a:t>
+              <a:t>COPY --from=builder /app/dist ./dist</a:t>
             </a:r>
             <a:endParaRPr sz="1100"/>
           </a:p>
@@ -19999,17 +20502,25 @@
                 <a:spcPts val="200"/>
               </a:spcAft>
               <a:buNone/>
-            </a:pPr>
-            <a:r>
-              <a:rPr sz="1100">
-                <a:solidFill>
-                  <a:srgbClr val="E2E8F0"/>
+              <a:defRPr sz="1200">
+                <a:solidFill>
+                  <a:srgbClr val="E5E7EB"/>
                 </a:solidFill>
                 <a:latin typeface="Consolas"/>
                 <a:ea typeface="Consolas"/>
                 <a:cs typeface="Consolas"/>
-              </a:rPr>
-              <a:t>RUN npm ci --only=production    # cuma prod deps</a:t>
+              </a:defRPr>
+            </a:pPr>
+            <a:r>
+              <a:rPr sz="1200">
+                <a:solidFill>
+                  <a:srgbClr val="E5E7EB"/>
+                </a:solidFill>
+                <a:latin typeface="Consolas"/>
+                <a:ea typeface="Consolas"/>
+                <a:cs typeface="Consolas"/>
+              </a:rPr>
+              <a:t>USER node</a:t>
             </a:r>
             <a:endParaRPr sz="1100"/>
           </a:p>
@@ -20019,28 +20530,25 @@
                 <a:spcPts val="200"/>
               </a:spcAft>
               <a:buNone/>
-            </a:pPr>
-            <a:r>
-              <a:rPr sz="1100" b="1">
-                <a:solidFill>
-                  <a:srgbClr val="F37021"/>
+              <a:defRPr sz="1200">
+                <a:solidFill>
+                  <a:srgbClr val="E5E7EB"/>
                 </a:solidFill>
                 <a:latin typeface="Consolas"/>
                 <a:ea typeface="Consolas"/>
                 <a:cs typeface="Consolas"/>
-              </a:rPr>
-              <a:t>COPY --from=builder </a:t>
-            </a:r>
-            <a:r>
-              <a:rPr sz="1100">
-                <a:solidFill>
-                  <a:srgbClr val="E2E8F0"/>
+              </a:defRPr>
+            </a:pPr>
+            <a:r>
+              <a:rPr sz="1200" b="1">
+                <a:solidFill>
+                  <a:srgbClr val="E5E7EB"/>
                 </a:solidFill>
                 <a:latin typeface="Consolas"/>
                 <a:ea typeface="Consolas"/>
                 <a:cs typeface="Consolas"/>
               </a:rPr>
-              <a:t>/app/dist ./dist</a:t>
+              <a:t>EXPOSE 3000</a:t>
             </a:r>
             <a:endParaRPr sz="1100"/>
           </a:p>
@@ -20050,80 +20558,19 @@
                 <a:spcPts val="200"/>
               </a:spcAft>
               <a:buNone/>
-            </a:pPr>
-            <a:endParaRPr sz="1100"/>
-          </a:p>
-          <a:p xmlns:a="http://schemas.openxmlformats.org/drawingml/2006/main">
-            <a:pPr marL="0" indent="0">
-              <a:spcAft>
-                <a:spcPts val="200"/>
-              </a:spcAft>
-              <a:buNone/>
-            </a:pPr>
-            <a:r>
-              <a:rPr sz="1100">
-                <a:solidFill>
-                  <a:srgbClr val="94A3B8"/>
+              <a:defRPr sz="1200">
+                <a:solidFill>
+                  <a:srgbClr val="E5E7EB"/>
                 </a:solidFill>
                 <a:latin typeface="Consolas"/>
                 <a:ea typeface="Consolas"/>
                 <a:cs typeface="Consolas"/>
-              </a:rPr>
-              <a:t># Non-root user</a:t>
-            </a:r>
-            <a:endParaRPr sz="1100"/>
-          </a:p>
-          <a:p xmlns:a="http://schemas.openxmlformats.org/drawingml/2006/main">
-            <a:pPr marL="0" indent="0">
-              <a:spcAft>
-                <a:spcPts val="200"/>
-              </a:spcAft>
-              <a:buNone/>
-            </a:pPr>
-            <a:r>
-              <a:rPr sz="1100" b="1">
-                <a:solidFill>
-                  <a:srgbClr val="10B981"/>
-                </a:solidFill>
-                <a:latin typeface="Consolas"/>
-                <a:ea typeface="Consolas"/>
-                <a:cs typeface="Consolas"/>
-              </a:rPr>
-              <a:t>USER node</a:t>
-            </a:r>
-            <a:endParaRPr sz="1100"/>
-          </a:p>
-          <a:p xmlns:a="http://schemas.openxmlformats.org/drawingml/2006/main">
-            <a:pPr marL="0" indent="0">
-              <a:spcAft>
-                <a:spcPts val="200"/>
-              </a:spcAft>
-              <a:buNone/>
-            </a:pPr>
-            <a:r>
-              <a:rPr sz="1100">
-                <a:solidFill>
-                  <a:srgbClr val="E2E8F0"/>
-                </a:solidFill>
-                <a:latin typeface="Consolas"/>
-                <a:ea typeface="Consolas"/>
-                <a:cs typeface="Consolas"/>
-              </a:rPr>
-              <a:t>EXPOSE 3000</a:t>
-            </a:r>
-            <a:endParaRPr sz="1100"/>
-          </a:p>
-          <a:p xmlns:a="http://schemas.openxmlformats.org/drawingml/2006/main">
-            <a:pPr marL="0" indent="0">
-              <a:spcAft>
-                <a:spcPts val="200"/>
-              </a:spcAft>
-              <a:buNone/>
-            </a:pPr>
-            <a:r>
-              <a:rPr sz="1100">
-                <a:solidFill>
-                  <a:srgbClr val="E2E8F0"/>
+              </a:defRPr>
+            </a:pPr>
+            <a:r>
+              <a:rPr sz="1200">
+                <a:solidFill>
+                  <a:srgbClr val="E5E7EB"/>
                 </a:solidFill>
                 <a:latin typeface="Consolas"/>
                 <a:ea typeface="Consolas"/>
@@ -20298,7 +20745,7 @@
           <p:nvPr/>
         </p:nvPicPr>
         <p:blipFill>
-          <a:blip xmlns:r="http://schemas.openxmlformats.org/officeDocument/2006/relationships" xmlns:a="http://schemas.openxmlformats.org/drawingml/2006/main" r:embed="R799f764a866149e8"/>
+          <a:blip xmlns:r="http://schemas.openxmlformats.org/officeDocument/2006/relationships" xmlns:a="http://schemas.openxmlformats.org/drawingml/2006/main" r:embed="Ra41522df282142ad"/>
           <a:stretch xmlns:a="http://schemas.openxmlformats.org/drawingml/2006/main">
             <a:fillRect l="0" t="0" r="0" b="0"/>
           </a:stretch>
@@ -20322,7 +20769,7 @@
           <p:nvPr/>
         </p:nvPicPr>
         <p:blipFill>
-          <a:blip xmlns:r="http://schemas.openxmlformats.org/officeDocument/2006/relationships" xmlns:a="http://schemas.openxmlformats.org/drawingml/2006/main" r:embed="R17eedc36aada43a3"/>
+          <a:blip xmlns:r="http://schemas.openxmlformats.org/officeDocument/2006/relationships" xmlns:a="http://schemas.openxmlformats.org/drawingml/2006/main" r:embed="Rf9f0e00c81724ee5"/>
           <a:stretch xmlns:a="http://schemas.openxmlformats.org/drawingml/2006/main">
             <a:fillRect l="0" t="0" r="0" b="0"/>
           </a:stretch>
@@ -20502,7 +20949,7 @@
           <p:nvPr/>
         </p:nvPicPr>
         <p:blipFill>
-          <a:blip xmlns:r="http://schemas.openxmlformats.org/officeDocument/2006/relationships" xmlns:a="http://schemas.openxmlformats.org/drawingml/2006/main" r:embed="R40184847fd354027"/>
+          <a:blip xmlns:r="http://schemas.openxmlformats.org/officeDocument/2006/relationships" xmlns:a="http://schemas.openxmlformats.org/drawingml/2006/main" r:embed="R262160d5e5704a6e"/>
           <a:stretch xmlns:a="http://schemas.openxmlformats.org/drawingml/2006/main">
             <a:fillRect l="0" t="0" r="0" b="0"/>
           </a:stretch>
@@ -20603,7 +21050,7 @@
                 <a:ea typeface="Calibri"/>
                 <a:cs typeface="Calibri"/>
               </a:rPr>
-              <a:t>node:20-alpine, bukan node:latest. Reproducible builds.</a:t>
+              <a:t>Pilih versi yang didukung. Digest mengunci konten base image.</a:t>
             </a:r>
             <a:endParaRPr sz="1000"/>
           </a:p>
@@ -20651,7 +21098,7 @@
           <p:nvPr/>
         </p:nvPicPr>
         <p:blipFill>
-          <a:blip xmlns:r="http://schemas.openxmlformats.org/officeDocument/2006/relationships" xmlns:a="http://schemas.openxmlformats.org/drawingml/2006/main" r:embed="R40184847fd354027"/>
+          <a:blip xmlns:r="http://schemas.openxmlformats.org/officeDocument/2006/relationships" xmlns:a="http://schemas.openxmlformats.org/drawingml/2006/main" r:embed="R262160d5e5704a6e"/>
           <a:stretch xmlns:a="http://schemas.openxmlformats.org/drawingml/2006/main">
             <a:fillRect l="0" t="0" r="0" b="0"/>
           </a:stretch>
@@ -20800,7 +21247,7 @@
           <p:nvPr/>
         </p:nvPicPr>
         <p:blipFill>
-          <a:blip xmlns:r="http://schemas.openxmlformats.org/officeDocument/2006/relationships" xmlns:a="http://schemas.openxmlformats.org/drawingml/2006/main" r:embed="R40184847fd354027"/>
+          <a:blip xmlns:r="http://schemas.openxmlformats.org/officeDocument/2006/relationships" xmlns:a="http://schemas.openxmlformats.org/drawingml/2006/main" r:embed="R262160d5e5704a6e"/>
           <a:stretch xmlns:a="http://schemas.openxmlformats.org/drawingml/2006/main">
             <a:fillRect l="0" t="0" r="0" b="0"/>
           </a:stretch>
@@ -20901,7 +21348,7 @@
                 <a:ea typeface="Calibri"/>
                 <a:cs typeface="Calibri"/>
               </a:rPr>
-              <a:t>Separate build dari runtime. Final image kecil.</a:t>
+              <a:t>Pisahkan kebutuhan build dan runtime. Ukur hasilnya.</a:t>
             </a:r>
             <a:endParaRPr sz="1000"/>
           </a:p>
@@ -20949,7 +21396,7 @@
           <p:nvPr/>
         </p:nvPicPr>
         <p:blipFill>
-          <a:blip xmlns:r="http://schemas.openxmlformats.org/officeDocument/2006/relationships" xmlns:a="http://schemas.openxmlformats.org/drawingml/2006/main" r:embed="R40184847fd354027"/>
+          <a:blip xmlns:r="http://schemas.openxmlformats.org/officeDocument/2006/relationships" xmlns:a="http://schemas.openxmlformats.org/drawingml/2006/main" r:embed="R262160d5e5704a6e"/>
           <a:stretch xmlns:a="http://schemas.openxmlformats.org/drawingml/2006/main">
             <a:fillRect l="0" t="0" r="0" b="0"/>
           </a:stretch>
@@ -21098,7 +21545,7 @@
           <p:nvPr/>
         </p:nvPicPr>
         <p:blipFill>
-          <a:blip xmlns:r="http://schemas.openxmlformats.org/officeDocument/2006/relationships" xmlns:a="http://schemas.openxmlformats.org/drawingml/2006/main" r:embed="R40184847fd354027"/>
+          <a:blip xmlns:r="http://schemas.openxmlformats.org/officeDocument/2006/relationships" xmlns:a="http://schemas.openxmlformats.org/drawingml/2006/main" r:embed="R262160d5e5704a6e"/>
           <a:stretch xmlns:a="http://schemas.openxmlformats.org/drawingml/2006/main">
             <a:fillRect l="0" t="0" r="0" b="0"/>
           </a:stretch>
@@ -21199,7 +21646,7 @@
                 <a:ea typeface="Calibri"/>
                 <a:cs typeface="Calibri"/>
               </a:rPr>
-              <a:t>RUN apt update &amp;&amp; apt install ... &amp;&amp; rm -rf /var/lib/apt/lists/*</a:t>
+              <a:t>Gabungkan apt-get update, install, dan cleanup dalam satu RUN.</a:t>
             </a:r>
             <a:endParaRPr sz="1000"/>
           </a:p>
@@ -21247,7 +21694,7 @@
           <p:nvPr/>
         </p:nvPicPr>
         <p:blipFill>
-          <a:blip xmlns:r="http://schemas.openxmlformats.org/officeDocument/2006/relationships" xmlns:a="http://schemas.openxmlformats.org/drawingml/2006/main" r:embed="R40184847fd354027"/>
+          <a:blip xmlns:r="http://schemas.openxmlformats.org/officeDocument/2006/relationships" xmlns:a="http://schemas.openxmlformats.org/drawingml/2006/main" r:embed="R262160d5e5704a6e"/>
           <a:stretch xmlns:a="http://schemas.openxmlformats.org/drawingml/2006/main">
             <a:fillRect l="0" t="0" r="0" b="0"/>
           </a:stretch>
@@ -21396,7 +21843,7 @@
           <p:nvPr/>
         </p:nvPicPr>
         <p:blipFill>
-          <a:blip xmlns:r="http://schemas.openxmlformats.org/officeDocument/2006/relationships" xmlns:a="http://schemas.openxmlformats.org/drawingml/2006/main" r:embed="R40184847fd354027"/>
+          <a:blip xmlns:r="http://schemas.openxmlformats.org/officeDocument/2006/relationships" xmlns:a="http://schemas.openxmlformats.org/drawingml/2006/main" r:embed="R262160d5e5704a6e"/>
           <a:stretch xmlns:a="http://schemas.openxmlformats.org/drawingml/2006/main">
             <a:fillRect l="0" t="0" r="0" b="0"/>
           </a:stretch>
@@ -21545,7 +21992,7 @@
           <p:nvPr/>
         </p:nvPicPr>
         <p:blipFill>
-          <a:blip xmlns:r="http://schemas.openxmlformats.org/officeDocument/2006/relationships" xmlns:a="http://schemas.openxmlformats.org/drawingml/2006/main" r:embed="R40184847fd354027"/>
+          <a:blip xmlns:r="http://schemas.openxmlformats.org/officeDocument/2006/relationships" xmlns:a="http://schemas.openxmlformats.org/drawingml/2006/main" r:embed="R262160d5e5704a6e"/>
           <a:stretch xmlns:a="http://schemas.openxmlformats.org/drawingml/2006/main">
             <a:fillRect l="0" t="0" r="0" b="0"/>
           </a:stretch>
@@ -21646,7 +22093,7 @@
                 <a:ea typeface="Calibri"/>
                 <a:cs typeface="Calibri"/>
               </a:rPr>
-              <a:t>Pakai --build-arg / runtime env / secrets management.</a:t>
+              <a:t>Build: BuildKit secret mount. Runtime: secret file/manager sesuai kebutuhan.</a:t>
             </a:r>
             <a:endParaRPr sz="1000"/>
           </a:p>
@@ -21694,7 +22141,7 @@
           <p:nvPr/>
         </p:nvPicPr>
         <p:blipFill>
-          <a:blip xmlns:r="http://schemas.openxmlformats.org/officeDocument/2006/relationships" xmlns:a="http://schemas.openxmlformats.org/drawingml/2006/main" r:embed="R40184847fd354027"/>
+          <a:blip xmlns:r="http://schemas.openxmlformats.org/officeDocument/2006/relationships" xmlns:a="http://schemas.openxmlformats.org/drawingml/2006/main" r:embed="R262160d5e5704a6e"/>
           <a:stretch xmlns:a="http://schemas.openxmlformats.org/drawingml/2006/main">
             <a:fillRect l="0" t="0" r="0" b="0"/>
           </a:stretch>
@@ -21795,7 +22242,7 @@
                 <a:ea typeface="Calibri"/>
                 <a:cs typeface="Calibri"/>
               </a:rPr>
-              <a:t>Tambah HEALTHCHECK supaya orchestrator tahu container hidup.</a:t>
+              <a:t>Probe status aplikasi. Unhealthy tidak otomatis memicu restart Docker standalone.</a:t>
             </a:r>
             <a:endParaRPr sz="1000"/>
           </a:p>
@@ -21843,7 +22290,7 @@
           <p:nvPr/>
         </p:nvPicPr>
         <p:blipFill>
-          <a:blip xmlns:r="http://schemas.openxmlformats.org/officeDocument/2006/relationships" xmlns:a="http://schemas.openxmlformats.org/drawingml/2006/main" r:embed="R40184847fd354027"/>
+          <a:blip xmlns:r="http://schemas.openxmlformats.org/officeDocument/2006/relationships" xmlns:a="http://schemas.openxmlformats.org/drawingml/2006/main" r:embed="R262160d5e5704a6e"/>
           <a:stretch xmlns:a="http://schemas.openxmlformats.org/drawingml/2006/main">
             <a:fillRect l="0" t="0" r="0" b="0"/>
           </a:stretch>
@@ -22227,7 +22674,7 @@
           <p:nvPr/>
         </p:nvPicPr>
         <p:blipFill>
-          <a:blip xmlns:r="http://schemas.openxmlformats.org/officeDocument/2006/relationships" xmlns:a="http://schemas.openxmlformats.org/drawingml/2006/main" r:embed="Re469d03bbff842bf"/>
+          <a:blip xmlns:r="http://schemas.openxmlformats.org/officeDocument/2006/relationships" xmlns:a="http://schemas.openxmlformats.org/drawingml/2006/main" r:embed="R19ded4c9c9e540ab"/>
           <a:stretch xmlns:a="http://schemas.openxmlformats.org/drawingml/2006/main">
             <a:fillRect l="0" t="0" r="0" b="0"/>
           </a:stretch>
@@ -22251,7 +22698,7 @@
           <p:nvPr/>
         </p:nvPicPr>
         <p:blipFill>
-          <a:blip xmlns:r="http://schemas.openxmlformats.org/officeDocument/2006/relationships" xmlns:a="http://schemas.openxmlformats.org/drawingml/2006/main" r:embed="Ra1e54b1a2da248d7"/>
+          <a:blip xmlns:r="http://schemas.openxmlformats.org/officeDocument/2006/relationships" xmlns:a="http://schemas.openxmlformats.org/drawingml/2006/main" r:embed="Re8d5bdfe541345fb"/>
           <a:stretch xmlns:a="http://schemas.openxmlformats.org/drawingml/2006/main">
             <a:fillRect l="0" t="0" r="0" b="0"/>
           </a:stretch>
@@ -22617,7 +23064,7 @@
           <p:nvPr/>
         </p:nvPicPr>
         <p:blipFill>
-          <a:blip xmlns:r="http://schemas.openxmlformats.org/officeDocument/2006/relationships" xmlns:a="http://schemas.openxmlformats.org/drawingml/2006/main" r:embed="R0968587ff8b94223"/>
+          <a:blip xmlns:r="http://schemas.openxmlformats.org/officeDocument/2006/relationships" xmlns:a="http://schemas.openxmlformats.org/drawingml/2006/main" r:embed="Rfafb348415b94cef"/>
           <a:stretch xmlns:a="http://schemas.openxmlformats.org/drawingml/2006/main">
             <a:fillRect l="0" t="0" r="0" b="0"/>
           </a:stretch>
@@ -22641,7 +23088,7 @@
           <p:nvPr/>
         </p:nvPicPr>
         <p:blipFill>
-          <a:blip xmlns:r="http://schemas.openxmlformats.org/officeDocument/2006/relationships" xmlns:a="http://schemas.openxmlformats.org/drawingml/2006/main" r:embed="Rb32e3d241fea4d39"/>
+          <a:blip xmlns:r="http://schemas.openxmlformats.org/officeDocument/2006/relationships" xmlns:a="http://schemas.openxmlformats.org/drawingml/2006/main" r:embed="Rd3890a4db74f4a25"/>
           <a:stretch xmlns:a="http://schemas.openxmlformats.org/drawingml/2006/main">
             <a:fillRect l="0" t="0" r="0" b="0"/>
           </a:stretch>
@@ -23457,7 +23904,7 @@
                 <a:ea typeface="Calibri"/>
                 <a:cs typeface="Calibri"/>
               </a:rPr>
-              <a:t>Immutable &amp; unique - 1 commit = 1 image. CI/CD-friendly.</a:t>
+              <a:t>Tag commit memudahkan penelusuran, tetapi tetap dapat ditimpa.</a:t>
             </a:r>
             <a:endParaRPr sz="1100"/>
           </a:p>
@@ -24069,84 +24516,7 @@
                 <a:ea typeface="Calibri"/>
                 <a:cs typeface="Calibri"/>
               </a:rPr>
-              <a:t>Pro tip: </a:t>
-            </a:r>
-            <a:r>
-              <a:rPr sz="1100" i="1">
-                <a:solidFill>
-                  <a:srgbClr val="1E293B"/>
-                </a:solidFill>
-                <a:latin typeface="Calibri"/>
-                <a:ea typeface="Calibri"/>
-                <a:cs typeface="Calibri"/>
-              </a:rPr>
-              <a:t>kombinasi: </a:t>
-            </a:r>
-            <a:r>
-              <a:rPr sz="1100" b="1" i="1">
-                <a:solidFill>
-                  <a:srgbClr val="002677"/>
-                </a:solidFill>
-                <a:latin typeface="Consolas"/>
-                <a:ea typeface="Consolas"/>
-                <a:cs typeface="Consolas"/>
-              </a:rPr>
-              <a:t>myapp:1.2.3</a:t>
-            </a:r>
-            <a:r>
-              <a:rPr sz="1100" i="1">
-                <a:solidFill>
-                  <a:srgbClr val="1E293B"/>
-                </a:solidFill>
-                <a:latin typeface="Calibri"/>
-                <a:ea typeface="Calibri"/>
-                <a:cs typeface="Calibri"/>
-              </a:rPr>
-              <a:t> + </a:t>
-            </a:r>
-            <a:r>
-              <a:rPr sz="1100" b="1" i="1">
-                <a:solidFill>
-                  <a:srgbClr val="002677"/>
-                </a:solidFill>
-                <a:latin typeface="Consolas"/>
-                <a:ea typeface="Consolas"/>
-                <a:cs typeface="Consolas"/>
-              </a:rPr>
-              <a:t>myapp:1.2</a:t>
-            </a:r>
-            <a:r>
-              <a:rPr sz="1100" i="1">
-                <a:solidFill>
-                  <a:srgbClr val="1E293B"/>
-                </a:solidFill>
-                <a:latin typeface="Calibri"/>
-                <a:ea typeface="Calibri"/>
-                <a:cs typeface="Calibri"/>
-              </a:rPr>
-              <a:t> + </a:t>
-            </a:r>
-            <a:r>
-              <a:rPr sz="1100" b="1" i="1">
-                <a:solidFill>
-                  <a:srgbClr val="002677"/>
-                </a:solidFill>
-                <a:latin typeface="Consolas"/>
-                <a:ea typeface="Consolas"/>
-                <a:cs typeface="Consolas"/>
-              </a:rPr>
-              <a:t>myapp:1</a:t>
-            </a:r>
-            <a:r>
-              <a:rPr sz="1100" i="1">
-                <a:solidFill>
-                  <a:srgbClr val="1E293B"/>
-                </a:solidFill>
-                <a:latin typeface="Calibri"/>
-                <a:ea typeface="Calibri"/>
-                <a:cs typeface="Calibri"/>
-              </a:rPr>
-              <a:t> - 1 image, 3 tag. Customer bisa pilih granularity.</a:t>
+              <a:t>Semua tag dapat berpindah. Gunakan image@sha256:&lt;digest&gt; untuk identitas konten saat deploy/rollback.</a:t>
             </a:r>
             <a:endParaRPr sz="1100"/>
           </a:p>
@@ -24315,7 +24685,7 @@
           <p:nvPr/>
         </p:nvPicPr>
         <p:blipFill>
-          <a:blip xmlns:r="http://schemas.openxmlformats.org/officeDocument/2006/relationships" xmlns:a="http://schemas.openxmlformats.org/drawingml/2006/main" r:embed="R04522fd9c96c469a"/>
+          <a:blip xmlns:r="http://schemas.openxmlformats.org/officeDocument/2006/relationships" xmlns:a="http://schemas.openxmlformats.org/drawingml/2006/main" r:embed="Re98ea67284d24591"/>
           <a:stretch xmlns:a="http://schemas.openxmlformats.org/drawingml/2006/main">
             <a:fillRect l="0" t="0" r="0" b="0"/>
           </a:stretch>
@@ -24339,7 +24709,7 @@
           <p:nvPr/>
         </p:nvPicPr>
         <p:blipFill>
-          <a:blip xmlns:r="http://schemas.openxmlformats.org/officeDocument/2006/relationships" xmlns:a="http://schemas.openxmlformats.org/drawingml/2006/main" r:embed="R35fbe92b3d044cf3"/>
+          <a:blip xmlns:r="http://schemas.openxmlformats.org/officeDocument/2006/relationships" xmlns:a="http://schemas.openxmlformats.org/drawingml/2006/main" r:embed="Ra49f27a959674eb2"/>
           <a:stretch xmlns:a="http://schemas.openxmlformats.org/drawingml/2006/main">
             <a:fillRect l="0" t="0" r="0" b="0"/>
           </a:stretch>
@@ -24471,7 +24841,7 @@
                 <a:ea typeface="Calibri"/>
                 <a:cs typeface="Calibri"/>
               </a:rPr>
-              <a:t>Publish image supaya bisa di-pull dari mana saja</a:t>
+              <a:t>Registry practice opsional untuk berbagi image proyek</a:t>
             </a:r>
             <a:endParaRPr sz="1200"/>
           </a:p>
@@ -24552,7 +24922,7 @@
           <p:nvPr/>
         </p:nvPicPr>
         <p:blipFill>
-          <a:blip xmlns:r="http://schemas.openxmlformats.org/officeDocument/2006/relationships" xmlns:a="http://schemas.openxmlformats.org/drawingml/2006/main" r:embed="R6f5077e8170c4165"/>
+          <a:blip xmlns:r="http://schemas.openxmlformats.org/officeDocument/2006/relationships" xmlns:a="http://schemas.openxmlformats.org/drawingml/2006/main" r:embed="R1e7b402b7f2143bf"/>
           <a:stretch xmlns:a="http://schemas.openxmlformats.org/drawingml/2006/main">
             <a:fillRect l="0" t="0" r="0" b="0"/>
           </a:stretch>
@@ -24801,7 +25171,7 @@
           <p:nvPr/>
         </p:nvPicPr>
         <p:blipFill>
-          <a:blip xmlns:r="http://schemas.openxmlformats.org/officeDocument/2006/relationships" xmlns:a="http://schemas.openxmlformats.org/drawingml/2006/main" r:embed="Rc6132a0d43594754"/>
+          <a:blip xmlns:r="http://schemas.openxmlformats.org/officeDocument/2006/relationships" xmlns:a="http://schemas.openxmlformats.org/drawingml/2006/main" r:embed="Rfcdafa37101349e4"/>
           <a:stretch xmlns:a="http://schemas.openxmlformats.org/drawingml/2006/main">
             <a:fillRect l="0" t="0" r="0" b="0"/>
           </a:stretch>
@@ -24906,7 +25276,7 @@
                 <a:ea typeface="Calibri"/>
                 <a:cs typeface="Calibri"/>
               </a:rPr>
-              <a:t>Terintegrasi GitHub - auto-build dari Actions</a:t>
+              <a:t>GitHub Actions dapat membangun/push jika workflow disiapkan</a:t>
             </a:r>
             <a:endParaRPr sz="1100"/>
           </a:p>
@@ -24948,7 +25318,7 @@
                 <a:ea typeface="Calibri"/>
                 <a:cs typeface="Calibri"/>
               </a:rPr>
-              <a:t>Periksa kebijakan penggunaan GitHub Packages</a:t>
+              <a:t>Package awal private. Atur visibilitas dan akses sesuai kebutuhan</a:t>
             </a:r>
             <a:endParaRPr sz="1100"/>
           </a:p>
@@ -24969,7 +25339,7 @@
                 <a:ea typeface="Calibri"/>
                 <a:cs typeface="Calibri"/>
               </a:rPr>
-              <a:t>Image path = repo path: ghcr.io/seedflora/myapp</a:t>
+              <a:t>Namespace/name image dapat berbeda dari nama repo Git</a:t>
             </a:r>
             <a:endParaRPr sz="1100"/>
           </a:p>
@@ -25180,7 +25550,7 @@
                 <a:ea typeface="Consolas"/>
                 <a:cs typeface="Consolas"/>
               </a:rPr>
-              <a:t>build + tag + push ke ghcr.io</a:t>
+              <a:t>Docker Hub: tag + login + push + pull</a:t>
             </a:r>
             <a:endParaRPr sz="900"/>
           </a:p>
@@ -25211,7 +25581,9 @@
           <a:noFill xmlns:a="http://schemas.openxmlformats.org/drawingml/2006/main"/>
         </p:spPr>
         <p:txBody>
-          <a:bodyPr xmlns:a="http://schemas.openxmlformats.org/drawingml/2006/main" wrap="square" lIns="0" tIns="0" rIns="0" bIns="0" anchor="t"/>
+          <a:bodyPr xmlns:a="http://schemas.openxmlformats.org/drawingml/2006/main" wrap="square" lIns="0" tIns="0" rIns="0" bIns="0" anchor="t">
+            <a:noAutofit/>
+          </a:bodyPr>
           <a:lstStyle xmlns:a="http://schemas.openxmlformats.org/drawingml/2006/main"/>
           <a:p xmlns:a="http://schemas.openxmlformats.org/drawingml/2006/main">
             <a:pPr marL="0" indent="0">
@@ -25219,17 +25591,25 @@
                 <a:spcPts val="200"/>
               </a:spcAft>
               <a:buNone/>
-            </a:pPr>
-            <a:r>
-              <a:rPr sz="1100">
-                <a:solidFill>
-                  <a:srgbClr val="94A3B8"/>
+              <a:defRPr sz="1200">
+                <a:solidFill>
+                  <a:srgbClr val="E5E7EB"/>
                 </a:solidFill>
                 <a:latin typeface="Consolas"/>
                 <a:ea typeface="Consolas"/>
                 <a:cs typeface="Consolas"/>
-              </a:rPr>
-              <a:t># 1. Login ke registry (perlu GitHub personal access token)</a:t>
+              </a:defRPr>
+            </a:pPr>
+            <a:r>
+              <a:rPr sz="1200">
+                <a:solidFill>
+                  <a:srgbClr val="E5E7EB"/>
+                </a:solidFill>
+                <a:latin typeface="Consolas"/>
+                <a:ea typeface="Consolas"/>
+                <a:cs typeface="Consolas"/>
+              </a:rPr>
+              <a:t># Ganti NAMA_AKUN dengan akun Docker Hub sendiri</a:t>
             </a:r>
             <a:endParaRPr sz="1100"/>
           </a:p>
@@ -25239,28 +25619,25 @@
                 <a:spcPts val="200"/>
               </a:spcAft>
               <a:buNone/>
-            </a:pPr>
-            <a:r>
-              <a:rPr sz="1100">
-                <a:solidFill>
-                  <a:srgbClr val="10B981"/>
+              <a:defRPr sz="1200">
+                <a:solidFill>
+                  <a:srgbClr val="E5E7EB"/>
                 </a:solidFill>
                 <a:latin typeface="Consolas"/>
                 <a:ea typeface="Consolas"/>
                 <a:cs typeface="Consolas"/>
-              </a:rPr>
-              <a:t>$ </a:t>
-            </a:r>
-            <a:r>
-              <a:rPr sz="1100">
-                <a:solidFill>
-                  <a:srgbClr val="E2E8F0"/>
+              </a:defRPr>
+            </a:pPr>
+            <a:r>
+              <a:rPr sz="1200">
+                <a:solidFill>
+                  <a:srgbClr val="E5E7EB"/>
                 </a:solidFill>
                 <a:latin typeface="Consolas"/>
                 <a:ea typeface="Consolas"/>
                 <a:cs typeface="Consolas"/>
               </a:rPr>
-              <a:t>echo $GH_TOKEN | docker login ghcr.io -u seedflora --password-stdin</a:t>
+              <a:t>docker tag cloud-notes-api:lab05 NAMA_AKUN/cloud-notes-api:lab05</a:t>
             </a:r>
             <a:endParaRPr sz="1100"/>
           </a:p>
@@ -25270,17 +25647,25 @@
                 <a:spcPts val="200"/>
               </a:spcAft>
               <a:buNone/>
-            </a:pPr>
-            <a:r>
-              <a:rPr sz="1100">
-                <a:solidFill>
-                  <a:srgbClr val="10B981"/>
+              <a:defRPr sz="1200">
+                <a:solidFill>
+                  <a:srgbClr val="E5E7EB"/>
                 </a:solidFill>
                 <a:latin typeface="Consolas"/>
                 <a:ea typeface="Consolas"/>
                 <a:cs typeface="Consolas"/>
-              </a:rPr>
-              <a:t>Login Succeeded</a:t>
+              </a:defRPr>
+            </a:pPr>
+            <a:r>
+              <a:rPr sz="1200">
+                <a:solidFill>
+                  <a:srgbClr val="E5E7EB"/>
+                </a:solidFill>
+                <a:latin typeface="Consolas"/>
+                <a:ea typeface="Consolas"/>
+                <a:cs typeface="Consolas"/>
+              </a:rPr>
+              <a:t>docker login</a:t>
             </a:r>
             <a:endParaRPr sz="1100"/>
           </a:p>
@@ -25290,7 +25675,26 @@
                 <a:spcPts val="200"/>
               </a:spcAft>
               <a:buNone/>
-            </a:pPr>
+              <a:defRPr sz="1200">
+                <a:solidFill>
+                  <a:srgbClr val="E5E7EB"/>
+                </a:solidFill>
+                <a:latin typeface="Consolas"/>
+                <a:ea typeface="Consolas"/>
+                <a:cs typeface="Consolas"/>
+              </a:defRPr>
+            </a:pPr>
+            <a:r>
+              <a:rPr sz="1200">
+                <a:solidFill>
+                  <a:srgbClr val="E5E7EB"/>
+                </a:solidFill>
+                <a:latin typeface="Consolas"/>
+                <a:ea typeface="Consolas"/>
+                <a:cs typeface="Consolas"/>
+              </a:rPr>
+              <a:t>docker push NAMA_AKUN/cloud-notes-api:lab05</a:t>
+            </a:r>
             <a:endParaRPr sz="1100"/>
           </a:p>
           <a:p xmlns:a="http://schemas.openxmlformats.org/drawingml/2006/main">
@@ -25299,17 +25703,25 @@
                 <a:spcPts val="200"/>
               </a:spcAft>
               <a:buNone/>
-            </a:pPr>
-            <a:r>
-              <a:rPr sz="1100">
-                <a:solidFill>
-                  <a:srgbClr val="94A3B8"/>
+              <a:defRPr sz="1200">
+                <a:solidFill>
+                  <a:srgbClr val="E5E7EB"/>
                 </a:solidFill>
                 <a:latin typeface="Consolas"/>
                 <a:ea typeface="Consolas"/>
                 <a:cs typeface="Consolas"/>
-              </a:rPr>
-              <a:t># 2. Build dengan tag yang sesuai format registry</a:t>
+              </a:defRPr>
+            </a:pPr>
+            <a:r>
+              <a:rPr sz="1200">
+                <a:solidFill>
+                  <a:srgbClr val="E5E7EB"/>
+                </a:solidFill>
+                <a:latin typeface="Consolas"/>
+                <a:ea typeface="Consolas"/>
+                <a:cs typeface="Consolas"/>
+              </a:rPr>
+              <a:t>docker pull NAMA_AKUN/cloud-notes-api:lab05</a:t>
             </a:r>
             <a:endParaRPr sz="1100"/>
           </a:p>
@@ -25319,28 +25731,25 @@
                 <a:spcPts val="200"/>
               </a:spcAft>
               <a:buNone/>
-            </a:pPr>
-            <a:r>
-              <a:rPr sz="1100">
-                <a:solidFill>
-                  <a:srgbClr val="10B981"/>
+              <a:defRPr sz="1200">
+                <a:solidFill>
+                  <a:srgbClr val="E5E7EB"/>
                 </a:solidFill>
                 <a:latin typeface="Consolas"/>
                 <a:ea typeface="Consolas"/>
                 <a:cs typeface="Consolas"/>
-              </a:rPr>
-              <a:t>$ </a:t>
-            </a:r>
-            <a:r>
-              <a:rPr sz="1100">
-                <a:solidFill>
-                  <a:srgbClr val="E2E8F0"/>
+              </a:defRPr>
+            </a:pPr>
+            <a:r>
+              <a:rPr sz="1200">
+                <a:solidFill>
+                  <a:srgbClr val="E5E7EB"/>
                 </a:solidFill>
                 <a:latin typeface="Consolas"/>
                 <a:ea typeface="Consolas"/>
                 <a:cs typeface="Consolas"/>
               </a:rPr>
-              <a:t>docker build -t ghcr.io/seedflora/myapp:1.2.0 .</a:t>
+              <a:t># Registry menyimpan image. GitHub repository menyimpan kode.</a:t>
             </a:r>
             <a:endParaRPr sz="1100"/>
           </a:p>
@@ -25350,77 +25759,25 @@
                 <a:spcPts val="200"/>
               </a:spcAft>
               <a:buNone/>
-            </a:pPr>
-            <a:endParaRPr sz="1100"/>
-          </a:p>
-          <a:p xmlns:a="http://schemas.openxmlformats.org/drawingml/2006/main">
-            <a:pPr marL="0" indent="0">
-              <a:spcAft>
-                <a:spcPts val="200"/>
-              </a:spcAft>
-              <a:buNone/>
-            </a:pPr>
-            <a:r>
-              <a:rPr sz="1100">
-                <a:solidFill>
-                  <a:srgbClr val="94A3B8"/>
+              <a:defRPr sz="1200">
+                <a:solidFill>
+                  <a:srgbClr val="E5E7EB"/>
                 </a:solidFill>
                 <a:latin typeface="Consolas"/>
                 <a:ea typeface="Consolas"/>
                 <a:cs typeface="Consolas"/>
-              </a:rPr>
-              <a:t># 3. Push ke registry</a:t>
-            </a:r>
-            <a:endParaRPr sz="1100"/>
-          </a:p>
-          <a:p xmlns:a="http://schemas.openxmlformats.org/drawingml/2006/main">
-            <a:pPr marL="0" indent="0">
-              <a:spcAft>
-                <a:spcPts val="200"/>
-              </a:spcAft>
-              <a:buNone/>
-            </a:pPr>
-            <a:r>
-              <a:rPr sz="1100">
-                <a:solidFill>
-                  <a:srgbClr val="10B981"/>
+              </a:defRPr>
+            </a:pPr>
+            <a:r>
+              <a:rPr sz="1200">
+                <a:solidFill>
+                  <a:srgbClr val="E5E7EB"/>
                 </a:solidFill>
                 <a:latin typeface="Consolas"/>
                 <a:ea typeface="Consolas"/>
                 <a:cs typeface="Consolas"/>
               </a:rPr>
-              <a:t>$ </a:t>
-            </a:r>
-            <a:r>
-              <a:rPr sz="1100">
-                <a:solidFill>
-                  <a:srgbClr val="E2E8F0"/>
-                </a:solidFill>
-                <a:latin typeface="Consolas"/>
-                <a:ea typeface="Consolas"/>
-                <a:cs typeface="Consolas"/>
-              </a:rPr>
-              <a:t>docker push ghcr.io/seedflora/myapp:1.2.0</a:t>
-            </a:r>
-            <a:endParaRPr sz="1100"/>
-          </a:p>
-          <a:p xmlns:a="http://schemas.openxmlformats.org/drawingml/2006/main">
-            <a:pPr marL="0" indent="0">
-              <a:spcAft>
-                <a:spcPts val="200"/>
-              </a:spcAft>
-              <a:buNone/>
-            </a:pPr>
-            <a:r>
-              <a:rPr sz="1100">
-                <a:solidFill>
-                  <a:srgbClr val="10B981"/>
-                </a:solidFill>
-                <a:latin typeface="Consolas"/>
-                <a:ea typeface="Consolas"/>
-                <a:cs typeface="Consolas"/>
-              </a:rPr>
-              <a:t>1.2.0: digest: sha256:a3f8... size: 4.2MB</a:t>
+              <a:t># Jangan memasukkan password/token ke slide atau commit.</a:t>
             </a:r>
             <a:endParaRPr sz="1100"/>
           </a:p>
@@ -25703,7 +26060,7 @@
           <p:nvPr/>
         </p:nvPicPr>
         <p:blipFill>
-          <a:blip xmlns:r="http://schemas.openxmlformats.org/officeDocument/2006/relationships" xmlns:a="http://schemas.openxmlformats.org/drawingml/2006/main" r:embed="Rc5bc5cf32a374f87"/>
+          <a:blip xmlns:r="http://schemas.openxmlformats.org/officeDocument/2006/relationships" xmlns:a="http://schemas.openxmlformats.org/drawingml/2006/main" r:embed="Reae34af9321e41d4"/>
           <a:stretch xmlns:a="http://schemas.openxmlformats.org/drawingml/2006/main">
             <a:fillRect l="0" t="0" r="0" b="0"/>
           </a:stretch>
@@ -25727,7 +26084,7 @@
           <p:nvPr/>
         </p:nvPicPr>
         <p:blipFill>
-          <a:blip xmlns:r="http://schemas.openxmlformats.org/officeDocument/2006/relationships" xmlns:a="http://schemas.openxmlformats.org/drawingml/2006/main" r:embed="R4e714dcb2f6746cf"/>
+          <a:blip xmlns:r="http://schemas.openxmlformats.org/officeDocument/2006/relationships" xmlns:a="http://schemas.openxmlformats.org/drawingml/2006/main" r:embed="R7d1c96f7002c476f"/>
           <a:stretch xmlns:a="http://schemas.openxmlformats.org/drawingml/2006/main">
             <a:fillRect l="0" t="0" r="0" b="0"/>
           </a:stretch>
@@ -26093,7 +26450,7 @@
           <p:nvPr/>
         </p:nvPicPr>
         <p:blipFill>
-          <a:blip xmlns:r="http://schemas.openxmlformats.org/officeDocument/2006/relationships" xmlns:a="http://schemas.openxmlformats.org/drawingml/2006/main" r:embed="R5b09c0067a374044"/>
+          <a:blip xmlns:r="http://schemas.openxmlformats.org/officeDocument/2006/relationships" xmlns:a="http://schemas.openxmlformats.org/drawingml/2006/main" r:embed="Rd0c379276b7c46e0"/>
           <a:stretch xmlns:a="http://schemas.openxmlformats.org/drawingml/2006/main">
             <a:fillRect l="0" t="0" r="0" b="0"/>
           </a:stretch>
@@ -26117,7 +26474,7 @@
           <p:nvPr/>
         </p:nvPicPr>
         <p:blipFill>
-          <a:blip xmlns:r="http://schemas.openxmlformats.org/officeDocument/2006/relationships" xmlns:a="http://schemas.openxmlformats.org/drawingml/2006/main" r:embed="R81b5ce56f48746d0"/>
+          <a:blip xmlns:r="http://schemas.openxmlformats.org/officeDocument/2006/relationships" xmlns:a="http://schemas.openxmlformats.org/drawingml/2006/main" r:embed="Rab8ae26dc26a4cb4"/>
           <a:stretch xmlns:a="http://schemas.openxmlformats.org/drawingml/2006/main">
             <a:fillRect l="0" t="0" r="0" b="0"/>
           </a:stretch>
@@ -26407,7 +26764,7 @@
                 <a:ea typeface="Calibri"/>
                 <a:cs typeface="Calibri"/>
               </a:rPr>
-              <a:t>Container run sebagai UID 0. Kalau breakout, attacker dapat root di host.</a:t>
+              <a:t>UID 0 dapat memperbesar dampak celah kernel/konfigurasi. Root host tidak otomatis diperoleh.</a:t>
             </a:r>
             <a:endParaRPr sz="1050"/>
           </a:p>
@@ -26578,7 +26935,7 @@
           <p:nvPr/>
         </p:nvPicPr>
         <p:blipFill>
-          <a:blip xmlns:r="http://schemas.openxmlformats.org/officeDocument/2006/relationships" xmlns:a="http://schemas.openxmlformats.org/drawingml/2006/main" r:embed="Rab0b203b81704667"/>
+          <a:blip xmlns:r="http://schemas.openxmlformats.org/officeDocument/2006/relationships" xmlns:a="http://schemas.openxmlformats.org/drawingml/2006/main" r:embed="Re410bf7328a24f09"/>
           <a:stretch xmlns:a="http://schemas.openxmlformats.org/drawingml/2006/main">
             <a:fillRect l="0" t="0" r="0" b="0"/>
           </a:stretch>
@@ -26758,18 +27115,7 @@
                 <a:ea typeface="Calibri"/>
                 <a:cs typeface="Calibri"/>
               </a:rPr>
-              <a:t>FIX: </a:t>
-            </a:r>
-            <a:r>
-              <a:rPr sz="1000">
-                <a:solidFill>
-                  <a:srgbClr val="1E293B"/>
-                </a:solidFill>
-                <a:latin typeface="Calibri"/>
-                <a:ea typeface="Calibri"/>
-                <a:cs typeface="Calibri"/>
-              </a:rPr>
-              <a:t>Pakai runtime env atau secrets manager</a:t>
+              <a:t>FIX: BuildKit secret mount / runtime secret manager</a:t>
             </a:r>
             <a:endParaRPr sz="1000"/>
           </a:p>
@@ -26850,7 +27196,7 @@
           <p:nvPr/>
         </p:nvPicPr>
         <p:blipFill>
-          <a:blip xmlns:r="http://schemas.openxmlformats.org/officeDocument/2006/relationships" xmlns:a="http://schemas.openxmlformats.org/drawingml/2006/main" r:embed="R3e39b6e038f64717"/>
+          <a:blip xmlns:r="http://schemas.openxmlformats.org/officeDocument/2006/relationships" xmlns:a="http://schemas.openxmlformats.org/drawingml/2006/main" r:embed="R2b617292101240d7"/>
           <a:stretch xmlns:a="http://schemas.openxmlformats.org/drawingml/2006/main">
             <a:fillRect l="0" t="0" r="0" b="0"/>
           </a:stretch>
@@ -26951,7 +27297,7 @@
                 <a:ea typeface="Calibri"/>
                 <a:cs typeface="Calibri"/>
               </a:rPr>
-              <a:t>FROM ubuntu:18.04 yang sudah EOL - banyak CVE belum di-patch.</a:t>
+              <a:t>Base lama tanpa pembaruan keamanan meningkatkan risiko CVE.</a:t>
             </a:r>
             <a:endParaRPr sz="1050"/>
           </a:p>
@@ -27030,18 +27376,7 @@
                 <a:ea typeface="Calibri"/>
                 <a:cs typeface="Calibri"/>
               </a:rPr>
-              <a:t>FIX: </a:t>
-            </a:r>
-            <a:r>
-              <a:rPr sz="1000">
-                <a:solidFill>
-                  <a:srgbClr val="1E293B"/>
-                </a:solidFill>
-                <a:latin typeface="Calibri"/>
-                <a:ea typeface="Calibri"/>
-                <a:cs typeface="Calibri"/>
-              </a:rPr>
-              <a:t>Pin major LTS, scan rutin dengan Trivy</a:t>
+              <a:t>FIX: Base yang didukung, pembaruan rutin, dan scan</a:t>
             </a:r>
             <a:endParaRPr sz="1000"/>
           </a:p>
@@ -27122,7 +27457,7 @@
           <p:nvPr/>
         </p:nvPicPr>
         <p:blipFill>
-          <a:blip xmlns:r="http://schemas.openxmlformats.org/officeDocument/2006/relationships" xmlns:a="http://schemas.openxmlformats.org/drawingml/2006/main" r:embed="R5a504728c58a434e"/>
+          <a:blip xmlns:r="http://schemas.openxmlformats.org/officeDocument/2006/relationships" xmlns:a="http://schemas.openxmlformats.org/drawingml/2006/main" r:embed="R8a4d2f592a5040d2"/>
           <a:stretch xmlns:a="http://schemas.openxmlformats.org/drawingml/2006/main">
             <a:fillRect l="0" t="0" r="0" b="0"/>
           </a:stretch>
@@ -27223,7 +27558,7 @@
                 <a:ea typeface="Calibri"/>
                 <a:cs typeface="Calibri"/>
               </a:rPr>
-              <a:t>Image GB+ dengan banyak tool. Attack surface besar, exploit gampang.</a:t>
+              <a:t>Tool yang tidak diperlukan menambah komponen yang perlu dipelihara.</a:t>
             </a:r>
             <a:endParaRPr sz="1050"/>
           </a:p>
@@ -27394,7 +27729,7 @@
           <p:nvPr/>
         </p:nvPicPr>
         <p:blipFill>
-          <a:blip xmlns:r="http://schemas.openxmlformats.org/officeDocument/2006/relationships" xmlns:a="http://schemas.openxmlformats.org/drawingml/2006/main" r:embed="Rd90639493ae44e5c"/>
+          <a:blip xmlns:r="http://schemas.openxmlformats.org/officeDocument/2006/relationships" xmlns:a="http://schemas.openxmlformats.org/drawingml/2006/main" r:embed="R3730ab39e4674521"/>
           <a:stretch xmlns:a="http://schemas.openxmlformats.org/drawingml/2006/main">
             <a:fillRect l="0" t="0" r="0" b="0"/>
           </a:stretch>
@@ -27666,7 +28001,7 @@
           <p:nvPr/>
         </p:nvPicPr>
         <p:blipFill>
-          <a:blip xmlns:r="http://schemas.openxmlformats.org/officeDocument/2006/relationships" xmlns:a="http://schemas.openxmlformats.org/drawingml/2006/main" r:embed="R7bd49a77183548fe"/>
+          <a:blip xmlns:r="http://schemas.openxmlformats.org/officeDocument/2006/relationships" xmlns:a="http://schemas.openxmlformats.org/drawingml/2006/main" r:embed="R07f7553f79fd48f4"/>
           <a:stretch xmlns:a="http://schemas.openxmlformats.org/drawingml/2006/main">
             <a:fillRect l="0" t="0" r="0" b="0"/>
           </a:stretch>
@@ -27721,7 +28056,7 @@
                 <a:ea typeface="Calibri"/>
                 <a:cs typeface="Calibri"/>
               </a:rPr>
-              <a:t>No HEALTHCHECK</a:t>
+              <a:t>Layanan tidak sehat</a:t>
             </a:r>
             <a:endParaRPr sz="1300"/>
           </a:p>
@@ -27767,7 +28102,7 @@
                 <a:ea typeface="Calibri"/>
                 <a:cs typeface="Calibri"/>
               </a:rPr>
-              <a:t>Container crash silently tidak ke-detect. Orchestrator pikir masih hidup.</a:t>
+              <a:t>Proses dapat tetap jalan saat HTTP gagal. Docker tetap mendeteksi proses yang exit.</a:t>
             </a:r>
             <a:endParaRPr sz="1050"/>
           </a:p>
@@ -27846,18 +28181,7 @@
                 <a:ea typeface="Calibri"/>
                 <a:cs typeface="Calibri"/>
               </a:rPr>
-              <a:t>FIX: </a:t>
-            </a:r>
-            <a:r>
-              <a:rPr sz="1000">
-                <a:solidFill>
-                  <a:srgbClr val="1E293B"/>
-                </a:solidFill>
-                <a:latin typeface="Calibri"/>
-                <a:ea typeface="Calibri"/>
-                <a:cs typeface="Calibri"/>
-              </a:rPr>
-              <a:t>Selalu tambah HEALTHCHECK di Dockerfile</a:t>
+              <a:t>FIX: Probe yang sesuai dan kebijakan pemulihan eksplisit</a:t>
             </a:r>
             <a:endParaRPr sz="1000"/>
           </a:p>
@@ -28026,7 +28350,7 @@
           <p:nvPr/>
         </p:nvPicPr>
         <p:blipFill>
-          <a:blip xmlns:r="http://schemas.openxmlformats.org/officeDocument/2006/relationships" xmlns:a="http://schemas.openxmlformats.org/drawingml/2006/main" r:embed="R6357d5c182164496"/>
+          <a:blip xmlns:r="http://schemas.openxmlformats.org/officeDocument/2006/relationships" xmlns:a="http://schemas.openxmlformats.org/drawingml/2006/main" r:embed="R13b05c24cb264776"/>
           <a:stretch xmlns:a="http://schemas.openxmlformats.org/drawingml/2006/main">
             <a:fillRect l="0" t="0" r="0" b="0"/>
           </a:stretch>
@@ -28050,7 +28374,7 @@
           <p:nvPr/>
         </p:nvPicPr>
         <p:blipFill>
-          <a:blip xmlns:r="http://schemas.openxmlformats.org/officeDocument/2006/relationships" xmlns:a="http://schemas.openxmlformats.org/drawingml/2006/main" r:embed="Ra56760567957495d"/>
+          <a:blip xmlns:r="http://schemas.openxmlformats.org/officeDocument/2006/relationships" xmlns:a="http://schemas.openxmlformats.org/drawingml/2006/main" r:embed="R2a63d8ea82e846aa"/>
           <a:stretch xmlns:a="http://schemas.openxmlformats.org/drawingml/2006/main">
             <a:fillRect l="0" t="0" r="0" b="0"/>
           </a:stretch>
@@ -28442,7 +28766,7 @@
                 <a:ea typeface="Consolas"/>
                 <a:cs typeface="Consolas"/>
               </a:rPr>
-              <a:t># 1. Pin version + alpine base</a:t>
+              <a:t># 1. Pilih base yang masih didukung</a:t>
             </a:r>
             <a:endParaRPr sz="1100"/>
           </a:p>
@@ -28462,7 +28786,18 @@
                 <a:ea typeface="Consolas"/>
                 <a:cs typeface="Consolas"/>
               </a:rPr>
-              <a:t>FROM node:20.11-alpine3.19</a:t>
+              <a:t>FROM </a:t>
+            </a:r>
+            <a:r>
+              <a:rPr sz="1100" b="1">
+                <a:solidFill>
+                  <a:srgbClr val="10B981"/>
+                </a:solidFill>
+                <a:latin typeface="Consolas"/>
+                <a:ea typeface="Consolas"/>
+                <a:cs typeface="Consolas"/>
+              </a:rPr>
+              <a:t>node:24-alpine</a:t>
             </a:r>
             <a:endParaRPr sz="1100"/>
           </a:p>
@@ -28589,7 +28924,7 @@
                 <a:ea typeface="Consolas"/>
                 <a:cs typeface="Consolas"/>
               </a:rPr>
-              <a:t>COPY --chown=app:app package*.json ./</a:t>
+              <a:t>COPY --chown=app:app package.json package-lock.json ./</a:t>
             </a:r>
             <a:endParaRPr sz="1100"/>
           </a:p>
@@ -28609,7 +28944,29 @@
                 <a:ea typeface="Consolas"/>
                 <a:cs typeface="Consolas"/>
               </a:rPr>
-              <a:t>RUN npm ci --only=production &amp;&amp; npm cache clean --force</a:t>
+              <a:t>RUN </a:t>
+            </a:r>
+            <a:r>
+              <a:rPr sz="1100">
+                <a:solidFill>
+                  <a:srgbClr val="E2E8F0"/>
+                </a:solidFill>
+                <a:latin typeface="Consolas"/>
+                <a:ea typeface="Consolas"/>
+                <a:cs typeface="Consolas"/>
+              </a:rPr>
+              <a:t>npm ci --omit=dev</a:t>
+            </a:r>
+            <a:r>
+              <a:rPr sz="1100">
+                <a:solidFill>
+                  <a:srgbClr val="E2E8F0"/>
+                </a:solidFill>
+                <a:latin typeface="Consolas"/>
+                <a:ea typeface="Consolas"/>
+                <a:cs typeface="Consolas"/>
+              </a:rPr>
+              <a:t> &amp;&amp; npm cache clean --force</a:t>
             </a:r>
             <a:endParaRPr sz="1100"/>
           </a:p>
@@ -28716,7 +29073,7 @@
                 <a:ea typeface="Consolas"/>
                 <a:cs typeface="Consolas"/>
               </a:rPr>
-              <a:t># 5. HEALTHCHECK supaya orchestrator tahu app sehat</a:t>
+              <a:t># 5. Probe aplikasi; wget tersedia pada base Alpine ini</a:t>
             </a:r>
             <a:endParaRPr sz="1100"/>
           </a:p>
@@ -28974,7 +29331,7 @@
           <p:nvPr/>
         </p:nvPicPr>
         <p:blipFill>
-          <a:blip xmlns:r="http://schemas.openxmlformats.org/officeDocument/2006/relationships" xmlns:a="http://schemas.openxmlformats.org/drawingml/2006/main" r:embed="Rc35d5d8402284f3d"/>
+          <a:blip xmlns:r="http://schemas.openxmlformats.org/officeDocument/2006/relationships" xmlns:a="http://schemas.openxmlformats.org/drawingml/2006/main" r:embed="R89c8abd859e74291"/>
           <a:stretch xmlns:a="http://schemas.openxmlformats.org/drawingml/2006/main">
             <a:fillRect l="0" t="0" r="0" b="0"/>
           </a:stretch>
@@ -28998,7 +29355,7 @@
           <p:nvPr/>
         </p:nvPicPr>
         <p:blipFill>
-          <a:blip xmlns:r="http://schemas.openxmlformats.org/officeDocument/2006/relationships" xmlns:a="http://schemas.openxmlformats.org/drawingml/2006/main" r:embed="Ra6cf77fa06524896"/>
+          <a:blip xmlns:r="http://schemas.openxmlformats.org/officeDocument/2006/relationships" xmlns:a="http://schemas.openxmlformats.org/drawingml/2006/main" r:embed="R04ebc6aa0ec144dc"/>
           <a:stretch xmlns:a="http://schemas.openxmlformats.org/drawingml/2006/main">
             <a:fillRect l="0" t="0" r="0" b="0"/>
           </a:stretch>
@@ -30008,7 +30365,7 @@
                 <a:ea typeface="Calibri"/>
                 <a:cs typeface="Calibri"/>
               </a:rPr>
-              <a:t>Commercial. Bagus integrasi GitHub PR. Free tier untuk personal use.</a:t>
+              <a:t>Integrasi scanner dan GitHub PR. Periksa paket serta kuota resmi.</a:t>
             </a:r>
             <a:endParaRPr sz="1100"/>
           </a:p>
@@ -30830,18 +31187,7 @@
                 <a:ea typeface="Consolas"/>
                 <a:cs typeface="Consolas"/>
               </a:rPr>
-              <a:t>$ </a:t>
-            </a:r>
-            <a:r>
-              <a:rPr sz="1100">
-                <a:solidFill>
-                  <a:srgbClr val="E2E8F0"/>
-                </a:solidFill>
-                <a:latin typeface="Consolas"/>
-                <a:ea typeface="Consolas"/>
-                <a:cs typeface="Consolas"/>
-              </a:rPr>
-              <a:t>trivy image --severity HIGH,CRITICAL myapp:1.0</a:t>
+              <a:t>Jumlah CVE berubah menurut image dan database scanner.</a:t>
             </a:r>
             <a:endParaRPr sz="1100"/>
           </a:p>
@@ -30861,7 +31207,7 @@
                 <a:ea typeface="Consolas"/>
                 <a:cs typeface="Consolas"/>
               </a:rPr>
-              <a:t>Total: 23 (HIGH: 18, CRITICAL: 5)   &lt;- fix sebelum deploy ke prod</a:t>
+              <a:t>Tinjau severity, paket, versi perbaikan, dan relevansi risiko.</a:t>
             </a:r>
             <a:endParaRPr sz="1100"/>
           </a:p>
@@ -31030,7 +31376,7 @@
           <p:nvPr/>
         </p:nvPicPr>
         <p:blipFill>
-          <a:blip xmlns:r="http://schemas.openxmlformats.org/officeDocument/2006/relationships" xmlns:a="http://schemas.openxmlformats.org/drawingml/2006/main" r:embed="R17af36d9996a4b93"/>
+          <a:blip xmlns:r="http://schemas.openxmlformats.org/officeDocument/2006/relationships" xmlns:a="http://schemas.openxmlformats.org/drawingml/2006/main" r:embed="R57196091af464fd9"/>
           <a:stretch xmlns:a="http://schemas.openxmlformats.org/drawingml/2006/main">
             <a:fillRect l="0" t="0" r="0" b="0"/>
           </a:stretch>
@@ -31054,7 +31400,7 @@
           <p:nvPr/>
         </p:nvPicPr>
         <p:blipFill>
-          <a:blip xmlns:r="http://schemas.openxmlformats.org/officeDocument/2006/relationships" xmlns:a="http://schemas.openxmlformats.org/drawingml/2006/main" r:embed="R6b51151a02f84dbe"/>
+          <a:blip xmlns:r="http://schemas.openxmlformats.org/officeDocument/2006/relationships" xmlns:a="http://schemas.openxmlformats.org/drawingml/2006/main" r:embed="R4ac4685e8fab4dae"/>
           <a:stretch xmlns:a="http://schemas.openxmlformats.org/drawingml/2006/main">
             <a:fillRect l="0" t="0" r="0" b="0"/>
           </a:stretch>
@@ -31346,7 +31692,7 @@
           <p:nvPr/>
         </p:nvPicPr>
         <p:blipFill>
-          <a:blip xmlns:r="http://schemas.openxmlformats.org/officeDocument/2006/relationships" xmlns:a="http://schemas.openxmlformats.org/drawingml/2006/main" r:embed="Rfd70b6432f274a0f"/>
+          <a:blip xmlns:r="http://schemas.openxmlformats.org/officeDocument/2006/relationships" xmlns:a="http://schemas.openxmlformats.org/drawingml/2006/main" r:embed="Rc9f2686278a548ba"/>
           <a:stretch xmlns:a="http://schemas.openxmlformats.org/drawingml/2006/main">
             <a:fillRect l="0" t="0" r="0" b="0"/>
           </a:stretch>
@@ -31447,7 +31793,7 @@
                 <a:ea typeface="Calibri"/>
                 <a:cs typeface="Calibri"/>
               </a:rPr>
-              <a:t>Dockerfile produksi untuk aplikasi web (Node.js, Python) dengan struktur clean.</a:t>
+              <a:t>Dockerfile aplikasi web Node.js/Python yang dapat dibangun dan diuji.</a:t>
             </a:r>
             <a:endParaRPr sz="1200"/>
           </a:p>
@@ -31607,7 +31953,7 @@
           <p:nvPr/>
         </p:nvPicPr>
         <p:blipFill>
-          <a:blip xmlns:r="http://schemas.openxmlformats.org/officeDocument/2006/relationships" xmlns:a="http://schemas.openxmlformats.org/drawingml/2006/main" r:embed="Rc191aa8fd13d47ed"/>
+          <a:blip xmlns:r="http://schemas.openxmlformats.org/officeDocument/2006/relationships" xmlns:a="http://schemas.openxmlformats.org/drawingml/2006/main" r:embed="R55068bc1df9f46a9"/>
           <a:stretch xmlns:a="http://schemas.openxmlformats.org/drawingml/2006/main">
             <a:fillRect l="0" t="0" r="0" b="0"/>
           </a:stretch>
@@ -31868,7 +32214,7 @@
           <p:nvPr/>
         </p:nvPicPr>
         <p:blipFill>
-          <a:blip xmlns:r="http://schemas.openxmlformats.org/officeDocument/2006/relationships" xmlns:a="http://schemas.openxmlformats.org/drawingml/2006/main" r:embed="R1c14cf0de332493e"/>
+          <a:blip xmlns:r="http://schemas.openxmlformats.org/officeDocument/2006/relationships" xmlns:a="http://schemas.openxmlformats.org/drawingml/2006/main" r:embed="Rdf1eca45b7334b22"/>
           <a:stretch xmlns:a="http://schemas.openxmlformats.org/drawingml/2006/main">
             <a:fillRect l="0" t="0" r="0" b="0"/>
           </a:stretch>
@@ -31969,7 +32315,7 @@
                 <a:ea typeface="Calibri"/>
                 <a:cs typeface="Calibri"/>
               </a:rPr>
-              <a:t>ukuran image pakai alpine + multi-stage build (1.2 GB -&gt; 150 MB).</a:t>
+              <a:t>pilihan base image dan multi-stage. Ukur ukuran serta uji kompatibilitasnya.</a:t>
             </a:r>
             <a:endParaRPr sz="1200"/>
           </a:p>
@@ -32129,7 +32475,7 @@
           <p:nvPr/>
         </p:nvPicPr>
         <p:blipFill>
-          <a:blip xmlns:r="http://schemas.openxmlformats.org/officeDocument/2006/relationships" xmlns:a="http://schemas.openxmlformats.org/drawingml/2006/main" r:embed="Re437b6b559004e96"/>
+          <a:blip xmlns:r="http://schemas.openxmlformats.org/officeDocument/2006/relationships" xmlns:a="http://schemas.openxmlformats.org/drawingml/2006/main" r:embed="R82d18444390e4d3b"/>
           <a:stretch xmlns:a="http://schemas.openxmlformats.org/drawingml/2006/main">
             <a:fillRect l="0" t="0" r="0" b="0"/>
           </a:stretch>
@@ -32276,18 +32622,7 @@
                 <a:ea typeface="Calibri"/>
                 <a:cs typeface="Calibri"/>
               </a:rPr>
-              <a:t>Sesi ini mendukung:  </a:t>
-            </a:r>
-            <a:r>
-              <a:rPr sz="1100" b="1" i="1">
-                <a:solidFill>
-                  <a:srgbClr val="002677"/>
-                </a:solidFill>
-                <a:latin typeface="Calibri"/>
-                <a:ea typeface="Calibri"/>
-                <a:cs typeface="Calibri"/>
-              </a:rPr>
-              <a:t>LO2 (Apply – build production-grade Docker images)  +  LO1 (Analyze – pilih base image &amp; optimasi strategy)</a:t>
+              <a:t>Capaian utama RPS: LO2 Design (C3). Pilihan base image juga melatih analisis LO1.</a:t>
             </a:r>
             <a:endParaRPr sz="1100"/>
           </a:p>
@@ -32456,7 +32791,7 @@
           <p:nvPr/>
         </p:nvPicPr>
         <p:blipFill>
-          <a:blip xmlns:r="http://schemas.openxmlformats.org/officeDocument/2006/relationships" xmlns:a="http://schemas.openxmlformats.org/drawingml/2006/main" r:embed="R9f6a0b8ba86b4123"/>
+          <a:blip xmlns:r="http://schemas.openxmlformats.org/officeDocument/2006/relationships" xmlns:a="http://schemas.openxmlformats.org/drawingml/2006/main" r:embed="Reffe73bab49740ee"/>
           <a:stretch xmlns:a="http://schemas.openxmlformats.org/drawingml/2006/main">
             <a:fillRect l="0" t="0" r="0" b="0"/>
           </a:stretch>
@@ -32480,7 +32815,7 @@
           <p:nvPr/>
         </p:nvPicPr>
         <p:blipFill>
-          <a:blip xmlns:r="http://schemas.openxmlformats.org/officeDocument/2006/relationships" xmlns:a="http://schemas.openxmlformats.org/drawingml/2006/main" r:embed="Rb57969791fd34421"/>
+          <a:blip xmlns:r="http://schemas.openxmlformats.org/officeDocument/2006/relationships" xmlns:a="http://schemas.openxmlformats.org/drawingml/2006/main" r:embed="Ra8310b4dd7a64aba"/>
           <a:stretch xmlns:a="http://schemas.openxmlformats.org/drawingml/2006/main">
             <a:fillRect l="0" t="0" r="0" b="0"/>
           </a:stretch>
@@ -32612,7 +32947,7 @@
                 <a:ea typeface="Calibri"/>
                 <a:cs typeface="Calibri"/>
               </a:rPr>
-              <a:t>Print, tempel di samping laptop</a:t>
+              <a:t>Ringkasan Bash/Dockerfile; placeholder &lt;...&gt; harus diganti</a:t>
             </a:r>
             <a:endParaRPr sz="1200"/>
           </a:p>
@@ -33034,7 +33369,7 @@
                 <a:ea typeface="Consolas"/>
                 <a:cs typeface="Consolas"/>
               </a:rPr>
-              <a:t>docker build -t name:tag .</a:t>
+              <a:t>docker build -t app:1 .</a:t>
             </a:r>
             <a:endParaRPr sz="1100"/>
           </a:p>
@@ -33054,7 +33389,7 @@
                 <a:ea typeface="Consolas"/>
                 <a:cs typeface="Consolas"/>
               </a:rPr>
-              <a:t>docker build --no-cache .</a:t>
+              <a:t>docker build --pull \</a:t>
             </a:r>
             <a:endParaRPr sz="1100"/>
           </a:p>
@@ -33074,7 +33409,47 @@
                 <a:ea typeface="Consolas"/>
                 <a:cs typeface="Consolas"/>
               </a:rPr>
-              <a:t>docker build --build-arg K=V .</a:t>
+              <a:t>  --no-cache .</a:t>
+            </a:r>
+            <a:endParaRPr sz="1100"/>
+          </a:p>
+          <a:p xmlns:a="http://schemas.openxmlformats.org/drawingml/2006/main">
+            <a:pPr marL="0" indent="0">
+              <a:spcAft>
+                <a:spcPts val="300"/>
+              </a:spcAft>
+              <a:buNone/>
+            </a:pPr>
+            <a:r>
+              <a:rPr sz="1100">
+                <a:solidFill>
+                  <a:srgbClr val="1E293B"/>
+                </a:solidFill>
+                <a:latin typeface="Consolas"/>
+                <a:ea typeface="Consolas"/>
+                <a:cs typeface="Consolas"/>
+              </a:rPr>
+              <a:t>docker build \</a:t>
+            </a:r>
+            <a:endParaRPr sz="1100"/>
+          </a:p>
+          <a:p xmlns:a="http://schemas.openxmlformats.org/drawingml/2006/main">
+            <a:pPr marL="0" indent="0">
+              <a:spcAft>
+                <a:spcPts val="300"/>
+              </a:spcAft>
+              <a:buNone/>
+            </a:pPr>
+            <a:r>
+              <a:rPr sz="1100">
+                <a:solidFill>
+                  <a:srgbClr val="1E293B"/>
+                </a:solidFill>
+                <a:latin typeface="Consolas"/>
+                <a:ea typeface="Consolas"/>
+                <a:cs typeface="Consolas"/>
+              </a:rPr>
+              <a:t>  --build-arg K=V .</a:t>
             </a:r>
             <a:endParaRPr sz="1100"/>
           </a:p>
@@ -33335,7 +33710,7 @@
                 <a:ea typeface="Consolas"/>
                 <a:cs typeface="Consolas"/>
               </a:rPr>
-              <a:t>COPY --from=builder</a:t>
+              <a:t>COPY --from=builder \</a:t>
             </a:r>
             <a:endParaRPr sz="1100"/>
           </a:p>
@@ -33355,7 +33730,7 @@
                 <a:ea typeface="Consolas"/>
                 <a:cs typeface="Consolas"/>
               </a:rPr>
-              <a:t>Stage 1 = full deps</a:t>
+              <a:t>  /app/dist ./dist</a:t>
             </a:r>
             <a:endParaRPr sz="1100"/>
           </a:p>
@@ -33375,7 +33750,7 @@
                 <a:ea typeface="Consolas"/>
                 <a:cs typeface="Consolas"/>
               </a:rPr>
-              <a:t>Stage 2 = runtime only</a:t>
+              <a:t>Build -&gt; runtime</a:t>
             </a:r>
             <a:endParaRPr sz="1100"/>
           </a:p>
@@ -33395,7 +33770,7 @@
                 <a:ea typeface="Consolas"/>
                 <a:cs typeface="Consolas"/>
               </a:rPr>
-              <a:t>Image size kecil</a:t>
+              <a:t>Ukur image hasilnya</a:t>
             </a:r>
             <a:endParaRPr sz="1100"/>
           </a:p>
@@ -33556,7 +33931,7 @@
                 <a:ea typeface="Consolas"/>
                 <a:cs typeface="Consolas"/>
               </a:rPr>
-              <a:t>FROM (jarang ubah)</a:t>
+              <a:t>FROM &lt;base&gt;</a:t>
             </a:r>
             <a:endParaRPr sz="1100"/>
           </a:p>
@@ -33576,7 +33951,7 @@
                 <a:ea typeface="Consolas"/>
                 <a:cs typeface="Consolas"/>
               </a:rPr>
-              <a:t>WORKDIR + ARG</a:t>
+              <a:t>WORKDIR /app</a:t>
             </a:r>
             <a:endParaRPr sz="1100"/>
           </a:p>
@@ -33596,7 +33971,7 @@
                 <a:ea typeface="Consolas"/>
                 <a:cs typeface="Consolas"/>
               </a:rPr>
-              <a:t>COPY package*.json</a:t>
+              <a:t>COPY package*.json ./</a:t>
             </a:r>
             <a:endParaRPr sz="1100"/>
           </a:p>
@@ -33636,7 +34011,7 @@
                 <a:ea typeface="Consolas"/>
                 <a:cs typeface="Consolas"/>
               </a:rPr>
-              <a:t>COPY . . (sering ubah)</a:t>
+              <a:t>COPY . .</a:t>
             </a:r>
             <a:endParaRPr sz="1100"/>
           </a:p>
@@ -33656,7 +34031,7 @@
                 <a:ea typeface="Consolas"/>
                 <a:cs typeface="Consolas"/>
               </a:rPr>
-              <a:t>CMD</a:t>
+              <a:t>CMD ["node","server.js"]</a:t>
             </a:r>
             <a:endParaRPr sz="1100"/>
           </a:p>
@@ -33917,7 +34292,7 @@
                 <a:ea typeface="Consolas"/>
                 <a:cs typeface="Consolas"/>
               </a:rPr>
-              <a:t>Pin all versions</a:t>
+              <a:t>Lockfile + base digest</a:t>
             </a:r>
             <a:endParaRPr sz="1100"/>
           </a:p>
@@ -34869,7 +35244,7 @@
           <p:nvPr/>
         </p:nvPicPr>
         <p:blipFill>
-          <a:blip xmlns:r="http://schemas.openxmlformats.org/officeDocument/2006/relationships" xmlns:a="http://schemas.openxmlformats.org/drawingml/2006/main" r:embed="Rd2d71a3e7f494d0b"/>
+          <a:blip xmlns:r="http://schemas.openxmlformats.org/officeDocument/2006/relationships" xmlns:a="http://schemas.openxmlformats.org/drawingml/2006/main" r:embed="Rd4467360edc146bf"/>
           <a:stretch xmlns:a="http://schemas.openxmlformats.org/drawingml/2006/main">
             <a:fillRect l="0" t="0" r="0" b="0"/>
           </a:stretch>
@@ -34893,7 +35268,7 @@
           <p:nvPr/>
         </p:nvPicPr>
         <p:blipFill>
-          <a:blip xmlns:r="http://schemas.openxmlformats.org/officeDocument/2006/relationships" xmlns:a="http://schemas.openxmlformats.org/drawingml/2006/main" r:embed="Rfac9e8aa94b8431d"/>
+          <a:blip xmlns:r="http://schemas.openxmlformats.org/officeDocument/2006/relationships" xmlns:a="http://schemas.openxmlformats.org/drawingml/2006/main" r:embed="Read4a86b16874001"/>
           <a:stretch xmlns:a="http://schemas.openxmlformats.org/drawingml/2006/main">
             <a:fillRect l="0" t="0" r="0" b="0"/>
           </a:stretch>
@@ -35196,7 +35571,7 @@
                 <a:ea typeface="Calibri"/>
                 <a:cs typeface="Calibri"/>
               </a:rPr>
-              <a:t>Dockerfile = blueprint. 14 instruksi, 8 yang paling sering dipakai.</a:t>
+              <a:t>Dockerfile mendefinisikan build. Sesi ini membahas 14 instruksi inti.</a:t>
             </a:r>
             <a:endParaRPr sz="1050"/>
           </a:p>
@@ -35321,7 +35696,7 @@
                 <a:ea typeface="Calibri"/>
                 <a:cs typeface="Calibri"/>
               </a:rPr>
-              <a:t>RUN = build time. CMD = default runtime. ENTRYPOINT = wajib runtime.</a:t>
+              <a:t>RUN saat build. CMD/ENTRYPOINT memberi command dan argumen default runtime.</a:t>
             </a:r>
             <a:endParaRPr sz="1050"/>
           </a:p>
@@ -35571,7 +35946,7 @@
                 <a:ea typeface="Calibri"/>
                 <a:cs typeface="Calibri"/>
               </a:rPr>
-              <a:t>.dockerignore = wajib. Hemat build context + cegah secret leak.</a:t>
+              <a:t>.dockerignore membatasi context. Kecualikan .env dari COPY.</a:t>
             </a:r>
             <a:endParaRPr sz="1050"/>
           </a:p>
@@ -35994,7 +36369,7 @@
           <p:nvPr/>
         </p:nvPicPr>
         <p:blipFill>
-          <a:blip xmlns:r="http://schemas.openxmlformats.org/officeDocument/2006/relationships" xmlns:a="http://schemas.openxmlformats.org/drawingml/2006/main" r:embed="Ra8125c67707d4fb6"/>
+          <a:blip xmlns:r="http://schemas.openxmlformats.org/officeDocument/2006/relationships" xmlns:a="http://schemas.openxmlformats.org/drawingml/2006/main" r:embed="R7f2ed2ef8ce74b68"/>
           <a:stretch xmlns:a="http://schemas.openxmlformats.org/drawingml/2006/main">
             <a:fillRect l="0" t="0" r="0" b="0"/>
           </a:stretch>
@@ -36256,7 +36631,7 @@
           <p:nvPr/>
         </p:nvPicPr>
         <p:blipFill>
-          <a:blip xmlns:r="http://schemas.openxmlformats.org/officeDocument/2006/relationships" xmlns:a="http://schemas.openxmlformats.org/drawingml/2006/main" r:embed="R341aca28d4d04fe3"/>
+          <a:blip xmlns:r="http://schemas.openxmlformats.org/officeDocument/2006/relationships" xmlns:a="http://schemas.openxmlformats.org/drawingml/2006/main" r:embed="R97c8c9a65cce41c5"/>
           <a:stretch xmlns:a="http://schemas.openxmlformats.org/drawingml/2006/main">
             <a:fillRect l="0" t="0" r="0" b="0"/>
           </a:stretch>
@@ -36451,7 +36826,7 @@
           <p:nvPr/>
         </p:nvPicPr>
         <p:blipFill>
-          <a:blip xmlns:r="http://schemas.openxmlformats.org/officeDocument/2006/relationships" xmlns:a="http://schemas.openxmlformats.org/drawingml/2006/main" r:embed="Re286973f95c34856"/>
+          <a:blip xmlns:r="http://schemas.openxmlformats.org/officeDocument/2006/relationships" xmlns:a="http://schemas.openxmlformats.org/drawingml/2006/main" r:embed="R8b39c03d585846b4"/>
           <a:stretch xmlns:a="http://schemas.openxmlformats.org/drawingml/2006/main">
             <a:fillRect l="0" t="0" r="0" b="0"/>
           </a:stretch>
@@ -36631,40 +37006,7 @@
                 <a:ea typeface="Calibri"/>
                 <a:cs typeface="Calibri"/>
               </a:rPr>
-              <a:t>Sesi ini mendukung:  </a:t>
-            </a:r>
-            <a:r>
-              <a:rPr sz="1100" b="1">
-                <a:solidFill>
-                  <a:srgbClr val="FFFFFF"/>
-                </a:solidFill>
-                <a:latin typeface="Calibri"/>
-                <a:ea typeface="Calibri"/>
-                <a:cs typeface="Calibri"/>
-              </a:rPr>
-              <a:t>LO2 (Apply)</a:t>
-            </a:r>
-            <a:r>
-              <a:rPr sz="1100">
-                <a:solidFill>
-                  <a:srgbClr val="FED7AA"/>
-                </a:solidFill>
-                <a:latin typeface="Calibri"/>
-                <a:ea typeface="Calibri"/>
-                <a:cs typeface="Calibri"/>
-              </a:rPr>
-              <a:t>  +  </a:t>
-            </a:r>
-            <a:r>
-              <a:rPr sz="1100" b="1">
-                <a:solidFill>
-                  <a:srgbClr val="FFFFFF"/>
-                </a:solidFill>
-                <a:latin typeface="Calibri"/>
-                <a:ea typeface="Calibri"/>
-                <a:cs typeface="Calibri"/>
-              </a:rPr>
-              <a:t>LO1 (Analyze)</a:t>
+              <a:t>Capaian utama RPS: LO2 Design (C3). Lab 05 adalah latihan formatif untuk proyek kelompok.</a:t>
             </a:r>
             <a:endParaRPr sz="1100"/>
           </a:p>
@@ -37068,7 +37410,7 @@
                 <a:latin typeface="Calibri"/>
                 <a:ea typeface="Calibri"/>
                 <a:cs typeface="Calibri"/>
-                <a:hlinkClick xmlns:r="http://schemas.openxmlformats.org/officeDocument/2006/relationships" r:id="Ra6afe85543f54fe5"/>
+                <a:hlinkClick xmlns:r="http://schemas.openxmlformats.org/officeDocument/2006/relationships" r:id="R6b0d1dd099da42a1"/>
               </a:rPr>
               <a:t>SeedFlora/meet5CloudService</a:t>
             </a:r>
@@ -37135,7 +37477,7 @@
                 <a:latin typeface="Calibri"/>
                 <a:ea typeface="Calibri"/>
                 <a:cs typeface="Calibri"/>
-                <a:hlinkClick xmlns:r="http://schemas.openxmlformats.org/officeDocument/2006/relationships" r:id="R5675b3366bd040d6"/>
+                <a:hlinkClick xmlns:r="http://schemas.openxmlformats.org/officeDocument/2006/relationships" r:id="R18b83e4300274284"/>
               </a:rPr>
               <a:t>SeedFlora/meet5CloudService</a:t>
             </a:r>
@@ -37216,6 +37558,7 @@
           <a:lstStyle xmlns:a="http://schemas.openxmlformats.org/drawingml/2006/main"/>
           <a:p xmlns:a="http://schemas.openxmlformats.org/drawingml/2006/main">
             <a:pPr>
+              <a:buNone/>
               <a:defRPr sz="1050" b="0">
                 <a:solidFill>
                   <a:srgbClr val="666666"/>
@@ -37273,6 +37616,7 @@
           <a:lstStyle xmlns:a="http://schemas.openxmlformats.org/drawingml/2006/main"/>
           <a:p xmlns:a="http://schemas.openxmlformats.org/drawingml/2006/main">
             <a:pPr>
+              <a:buNone/>
               <a:defRPr sz="2925" b="1">
                 <a:solidFill>
                   <a:srgbClr val="064C8C"/>
@@ -37291,7 +37635,7 @@
                 <a:ea typeface="Arial"/>
                 <a:cs typeface="Arial"/>
               </a:rPr>
-              <a:t>Dari Dockerfile ke Lab 05</a:t>
+              <a:t>Kasus kerja dan Lab 05</a:t>
             </a:r>
           </a:p>
         </p:txBody>
@@ -37330,6 +37674,7 @@
           <a:lstStyle xmlns:a="http://schemas.openxmlformats.org/drawingml/2006/main"/>
           <a:p xmlns:a="http://schemas.openxmlformats.org/drawingml/2006/main">
             <a:pPr>
+              <a:buNone/>
               <a:defRPr sz="1650" b="0">
                 <a:solidFill>
                   <a:srgbClr val="243746"/>
@@ -37387,6 +37732,7 @@
           <a:lstStyle xmlns:a="http://schemas.openxmlformats.org/drawingml/2006/main"/>
           <a:p xmlns:a="http://schemas.openxmlformats.org/drawingml/2006/main">
             <a:pPr>
+              <a:buNone/>
               <a:defRPr sz="1725" b="1">
                 <a:solidFill>
                   <a:srgbClr val="0A3678"/>
@@ -37444,6 +37790,7 @@
           <a:lstStyle xmlns:a="http://schemas.openxmlformats.org/drawingml/2006/main"/>
           <a:p xmlns:a="http://schemas.openxmlformats.org/drawingml/2006/main">
             <a:pPr>
+              <a:buNone/>
               <a:defRPr sz="1575" b="0">
                 <a:solidFill>
                   <a:srgbClr val="243746"/>
@@ -37501,6 +37848,7 @@
           <a:lstStyle xmlns:a="http://schemas.openxmlformats.org/drawingml/2006/main"/>
           <a:p xmlns:a="http://schemas.openxmlformats.org/drawingml/2006/main">
             <a:pPr>
+              <a:buNone/>
               <a:defRPr sz="1425" b="1">
                 <a:solidFill>
                   <a:srgbClr val="0969AD"/>
@@ -37518,7 +37866,7 @@
                 <a:latin typeface="Arial"/>
                 <a:ea typeface="Arial"/>
                 <a:cs typeface="Arial"/>
-                <a:hlinkClick xmlns:r="http://schemas.openxmlformats.org/officeDocument/2006/relationships" r:id="R2f3330a897f142be"/>
+                <a:hlinkClick xmlns:r="http://schemas.openxmlformats.org/officeDocument/2006/relationships" r:id="Rbeed9d1ef4834c2e"/>
               </a:rPr>
               <a:t>Bacaan: Writing a Dockerfile (Docker Docs)</a:t>
             </a:r>
@@ -37559,6 +37907,7 @@
           <a:lstStyle xmlns:a="http://schemas.openxmlformats.org/drawingml/2006/main"/>
           <a:p xmlns:a="http://schemas.openxmlformats.org/drawingml/2006/main">
             <a:pPr>
+              <a:buNone/>
               <a:defRPr sz="1425" b="1">
                 <a:solidFill>
                   <a:srgbClr val="0969AD"/>
@@ -37576,7 +37925,7 @@
                 <a:latin typeface="Arial"/>
                 <a:ea typeface="Arial"/>
                 <a:cs typeface="Arial"/>
-                <a:hlinkClick xmlns:r="http://schemas.openxmlformats.org/officeDocument/2006/relationships" r:id="R2c7c92ac1f344c0c"/>
+                <a:hlinkClick xmlns:r="http://schemas.openxmlformats.org/officeDocument/2006/relationships" r:id="R42b528a2a3404bd4"/>
               </a:rPr>
               <a:t>Video: Docker Intro and Overview, mulai 29:57</a:t>
             </a:r>
@@ -37617,6 +37966,7 @@
           <a:lstStyle xmlns:a="http://schemas.openxmlformats.org/drawingml/2006/main"/>
           <a:p xmlns:a="http://schemas.openxmlformats.org/drawingml/2006/main">
             <a:pPr>
+              <a:buNone/>
               <a:defRPr sz="1425" b="1">
                 <a:solidFill>
                   <a:srgbClr val="0969AD"/>
@@ -37634,7 +37984,7 @@
                 <a:latin typeface="Arial"/>
                 <a:ea typeface="Arial"/>
                 <a:cs typeface="Arial"/>
-                <a:hlinkClick xmlns:r="http://schemas.openxmlformats.org/officeDocument/2006/relationships" r:id="R23b1c7a14fbc4dcb"/>
+                <a:hlinkClick xmlns:r="http://schemas.openxmlformats.org/officeDocument/2006/relationships" r:id="Rd2c83151e5a64a55"/>
               </a:rPr>
               <a:t>Buka repo Lab 05: SeedFlora/meet5CloudService</a:t>
             </a:r>
@@ -37675,6 +38025,7 @@
           <a:lstStyle xmlns:a="http://schemas.openxmlformats.org/drawingml/2006/main"/>
           <a:p xmlns:a="http://schemas.openxmlformats.org/drawingml/2006/main">
             <a:pPr>
+              <a:buNone/>
               <a:defRPr sz="1200" b="0">
                 <a:solidFill>
                   <a:srgbClr val="566270"/>
@@ -37700,14 +38051,14 @@
       </p:sp>
       <p:pic>
         <p:nvPicPr>
-          <p:cNvPr id="20" name=""/>
+          <p:cNvPr id="22" name=""/>
           <p:cNvPicPr>
             <a:picLocks xmlns:a="http://schemas.openxmlformats.org/drawingml/2006/main" noChangeAspect="1"/>
           </p:cNvPicPr>
           <p:nvPr/>
         </p:nvPicPr>
         <p:blipFill>
-          <a:blip xmlns:r="http://schemas.openxmlformats.org/officeDocument/2006/relationships" xmlns:a="http://schemas.openxmlformats.org/drawingml/2006/main" r:embed="R4943cd78051b4053"/>
+          <a:blip xmlns:r="http://schemas.openxmlformats.org/officeDocument/2006/relationships" xmlns:a="http://schemas.openxmlformats.org/drawingml/2006/main" r:embed="R84a0263fd47b4c35"/>
           <a:stretch xmlns:a="http://schemas.openxmlformats.org/drawingml/2006/main"/>
         </p:blipFill>
         <p:spPr>
@@ -37724,6 +38075,1185 @@
     <p:extLst>
       <p:ext uri="{BB962C8B-B14F-4D97-AF65-F5344CB8AC3E}">
         <p14:creationId xmlns:p14="http://schemas.microsoft.com/office/powerpoint/2010/main" val="76754379"/>
+      </p:ext>
+    </p:extLst>
+  </p:cSld>
+</p:sld>
+</file>
+
+<file path=ppt/slides/slide34.xml><?xml version="1.0" encoding="utf-8"?>
+<p:sld xmlns:p="http://schemas.openxmlformats.org/presentationml/2006/main">
+  <p:cSld>
+    <p:bg>
+      <p:bgPr>
+        <a:solidFill xmlns:a="http://schemas.openxmlformats.org/drawingml/2006/main">
+          <a:srgbClr val="FFFFFF"/>
+        </a:solidFill>
+      </p:bgPr>
+    </p:bg>
+    <p:spTree>
+      <p:nvGrpSpPr>
+        <p:cNvPr id="1" name=""/>
+        <p:cNvGrpSpPr/>
+        <p:nvPr/>
+      </p:nvGrpSpPr>
+      <p:grpSpPr>
+        <a:xfrm xmlns:a="http://schemas.openxmlformats.org/drawingml/2006/main"/>
+      </p:grpSpPr>
+      <p:sp>
+        <p:nvSpPr>
+          <p:cNvPr id="8" name="">
+            <a:extLst xmlns:a="http://schemas.openxmlformats.org/drawingml/2006/main">
+              <a:ext uri="{FF2B5EF4-FFF2-40B4-BE49-F238E27FC236}">
+                <a16:creationId xmlns:a16="http://schemas.microsoft.com/office/drawing/2014/main" id="{BAF52888-6985-47BF-8BAC-33D4DE0855D3}"/>
+              </a:ext>
+            </a:extLst>
+          </p:cNvPr>
+          <p:cNvSpPr>
+            <a:spLocks xmlns:a="http://schemas.openxmlformats.org/drawingml/2006/main" noGrp="1"/>
+          </p:cNvSpPr>
+          <p:nvPr/>
+        </p:nvSpPr>
+        <p:spPr>
+          <a:xfrm xmlns:a="http://schemas.openxmlformats.org/drawingml/2006/main">
+            <a:off x="457200" y="323850"/>
+            <a:ext cx="11239500" cy="514350"/>
+          </a:xfrm>
+          <a:prstGeom xmlns:a="http://schemas.openxmlformats.org/drawingml/2006/main" prst="rect">
+            <a:avLst/>
+          </a:prstGeom>
+          <a:noFill xmlns:a="http://schemas.openxmlformats.org/drawingml/2006/main"/>
+          <a:ln xmlns:a="http://schemas.openxmlformats.org/drawingml/2006/main" w="0">
+            <a:noFill/>
+          </a:ln>
+        </p:spPr>
+        <p:txBody>
+          <a:bodyPr xmlns:a="http://schemas.openxmlformats.org/drawingml/2006/main" lIns="0" tIns="0" rIns="0" bIns="0">
+            <a:noAutofit/>
+          </a:bodyPr>
+          <a:lstStyle xmlns:a="http://schemas.openxmlformats.org/drawingml/2006/main"/>
+          <a:p xmlns:a="http://schemas.openxmlformats.org/drawingml/2006/main">
+            <a:pPr>
+              <a:defRPr sz="2550" b="1">
+                <a:solidFill>
+                  <a:srgbClr val="1673C6"/>
+                </a:solidFill>
+                <a:latin typeface="Arial"/>
+                <a:ea typeface="Arial"/>
+                <a:cs typeface="Arial"/>
+              </a:defRPr>
+            </a:pPr>
+            <a:r>
+              <a:rPr sz="2550" b="1">
+                <a:solidFill>
+                  <a:srgbClr val="1673C6"/>
+                </a:solidFill>
+                <a:latin typeface="Arial"/>
+                <a:ea typeface="Arial"/>
+                <a:cs typeface="Arial"/>
+              </a:rPr>
+              <a:t>Dockerfile FastAPI pada Lab 05</a:t>
+            </a:r>
+          </a:p>
+        </p:txBody>
+      </p:sp>
+      <p:sp>
+        <p:nvSpPr>
+          <p:cNvPr id="2" name="">
+            <a:extLst xmlns:a="http://schemas.openxmlformats.org/drawingml/2006/main">
+              <a:ext uri="{FF2B5EF4-FFF2-40B4-BE49-F238E27FC236}">
+                <a16:creationId xmlns:a16="http://schemas.microsoft.com/office/drawing/2014/main" id="{B803ED82-138B-4A90-A14D-DBC684293B7E}"/>
+              </a:ext>
+            </a:extLst>
+          </p:cNvPr>
+          <p:cNvSpPr>
+            <a:spLocks xmlns:a="http://schemas.openxmlformats.org/drawingml/2006/main" noGrp="1"/>
+          </p:cNvSpPr>
+          <p:nvPr/>
+        </p:nvSpPr>
+        <p:spPr>
+          <a:xfrm xmlns:a="http://schemas.openxmlformats.org/drawingml/2006/main">
+            <a:off x="457200" y="933450"/>
+            <a:ext cx="11239500" cy="419100"/>
+          </a:xfrm>
+          <a:prstGeom xmlns:a="http://schemas.openxmlformats.org/drawingml/2006/main" prst="rect">
+            <a:avLst/>
+          </a:prstGeom>
+          <a:noFill xmlns:a="http://schemas.openxmlformats.org/drawingml/2006/main"/>
+          <a:ln xmlns:a="http://schemas.openxmlformats.org/drawingml/2006/main" w="0">
+            <a:noFill/>
+          </a:ln>
+        </p:spPr>
+        <p:txBody>
+          <a:bodyPr xmlns:a="http://schemas.openxmlformats.org/drawingml/2006/main" lIns="0" tIns="0" rIns="0" bIns="0">
+            <a:noAutofit/>
+          </a:bodyPr>
+          <a:lstStyle xmlns:a="http://schemas.openxmlformats.org/drawingml/2006/main"/>
+          <a:p xmlns:a="http://schemas.openxmlformats.org/drawingml/2006/main">
+            <a:pPr>
+              <a:defRPr sz="1425" b="0">
+                <a:solidFill>
+                  <a:srgbClr val="64748B"/>
+                </a:solidFill>
+                <a:latin typeface="Arial"/>
+                <a:ea typeface="Arial"/>
+                <a:cs typeface="Arial"/>
+              </a:defRPr>
+            </a:pPr>
+            <a:r>
+              <a:rPr sz="1425" b="0">
+                <a:solidFill>
+                  <a:srgbClr val="64748B"/>
+                </a:solidFill>
+                <a:latin typeface="Arial"/>
+                <a:ea typeface="Arial"/>
+                <a:cs typeface="Arial"/>
+              </a:rPr>
+              <a:t>Builder memasang dependency. Runtime menjalankan API sebagai UID 10001.</a:t>
+            </a:r>
+          </a:p>
+        </p:txBody>
+      </p:sp>
+      <p:pic>
+        <p:nvPicPr>
+          <p:cNvPr id="10" name=""/>
+          <p:cNvPicPr>
+            <a:picLocks xmlns:a="http://schemas.openxmlformats.org/drawingml/2006/main" noChangeAspect="1"/>
+          </p:cNvPicPr>
+          <p:nvPr/>
+        </p:nvPicPr>
+        <p:blipFill>
+          <a:blip xmlns:r="http://schemas.openxmlformats.org/officeDocument/2006/relationships" xmlns:a="http://schemas.openxmlformats.org/drawingml/2006/main" r:embed="R578c5492717c405b"/>
+          <a:stretch xmlns:a="http://schemas.openxmlformats.org/drawingml/2006/main"/>
+        </p:blipFill>
+        <p:spPr>
+          <a:xfrm xmlns:a="http://schemas.openxmlformats.org/drawingml/2006/main">
+            <a:off x="467783" y="1428750"/>
+            <a:ext cx="11218333" cy="4038600"/>
+          </a:xfrm>
+          <a:prstGeom xmlns:a="http://schemas.openxmlformats.org/drawingml/2006/main" prst="rect">
+            <a:avLst/>
+          </a:prstGeom>
+        </p:spPr>
+      </p:pic>
+      <p:sp>
+        <p:nvSpPr>
+          <p:cNvPr id="4" name="">
+            <a:extLst xmlns:a="http://schemas.openxmlformats.org/drawingml/2006/main">
+              <a:ext uri="{FF2B5EF4-FFF2-40B4-BE49-F238E27FC236}">
+                <a16:creationId xmlns:a16="http://schemas.microsoft.com/office/drawing/2014/main" id="{539F44A9-4719-4C67-893A-3655A0D6B8E3}"/>
+              </a:ext>
+            </a:extLst>
+          </p:cNvPr>
+          <p:cNvSpPr>
+            <a:spLocks xmlns:a="http://schemas.openxmlformats.org/drawingml/2006/main" noGrp="1"/>
+          </p:cNvSpPr>
+          <p:nvPr/>
+        </p:nvSpPr>
+        <p:spPr>
+          <a:xfrm xmlns:a="http://schemas.openxmlformats.org/drawingml/2006/main">
+            <a:off x="457200" y="5619750"/>
+            <a:ext cx="11239500" cy="323850"/>
+          </a:xfrm>
+          <a:prstGeom xmlns:a="http://schemas.openxmlformats.org/drawingml/2006/main" prst="rect">
+            <a:avLst/>
+          </a:prstGeom>
+          <a:noFill xmlns:a="http://schemas.openxmlformats.org/drawingml/2006/main"/>
+          <a:ln xmlns:a="http://schemas.openxmlformats.org/drawingml/2006/main" w="0">
+            <a:noFill/>
+          </a:ln>
+        </p:spPr>
+        <p:txBody>
+          <a:bodyPr xmlns:a="http://schemas.openxmlformats.org/drawingml/2006/main" lIns="0" tIns="0" rIns="0" bIns="0">
+            <a:noAutofit/>
+          </a:bodyPr>
+          <a:lstStyle xmlns:a="http://schemas.openxmlformats.org/drawingml/2006/main"/>
+          <a:p xmlns:a="http://schemas.openxmlformats.org/drawingml/2006/main">
+            <a:pPr>
+              <a:defRPr sz="1350" b="0">
+                <a:solidFill>
+                  <a:srgbClr val="243746"/>
+                </a:solidFill>
+                <a:latin typeface="Consolas"/>
+                <a:ea typeface="Consolas"/>
+                <a:cs typeface="Consolas"/>
+              </a:defRPr>
+            </a:pPr>
+            <a:r>
+              <a:rPr sz="1350" b="0">
+                <a:solidFill>
+                  <a:srgbClr val="243746"/>
+                </a:solidFill>
+                <a:latin typeface="Consolas"/>
+                <a:ea typeface="Consolas"/>
+                <a:cs typeface="Consolas"/>
+              </a:rPr>
+              <a:t>docker build -t cloud-notes-api:lab05 .</a:t>
+            </a:r>
+          </a:p>
+        </p:txBody>
+      </p:sp>
+      <p:sp>
+        <p:nvSpPr>
+          <p:cNvPr id="5" name="">
+            <a:extLst xmlns:a="http://schemas.openxmlformats.org/drawingml/2006/main">
+              <a:ext uri="{FF2B5EF4-FFF2-40B4-BE49-F238E27FC236}">
+                <a16:creationId xmlns:a16="http://schemas.microsoft.com/office/drawing/2014/main" id="{AF780982-7964-40AC-9753-9B30C5DDF58B}"/>
+              </a:ext>
+            </a:extLst>
+          </p:cNvPr>
+          <p:cNvSpPr>
+            <a:spLocks xmlns:a="http://schemas.openxmlformats.org/drawingml/2006/main" noGrp="1"/>
+          </p:cNvSpPr>
+          <p:nvPr/>
+        </p:nvSpPr>
+        <p:spPr>
+          <a:xfrm xmlns:a="http://schemas.openxmlformats.org/drawingml/2006/main">
+            <a:off x="457200" y="6029325"/>
+            <a:ext cx="11239500" cy="419100"/>
+          </a:xfrm>
+          <a:prstGeom xmlns:a="http://schemas.openxmlformats.org/drawingml/2006/main" prst="rect">
+            <a:avLst/>
+          </a:prstGeom>
+          <a:noFill xmlns:a="http://schemas.openxmlformats.org/drawingml/2006/main"/>
+          <a:ln xmlns:a="http://schemas.openxmlformats.org/drawingml/2006/main" w="0">
+            <a:noFill/>
+          </a:ln>
+        </p:spPr>
+        <p:txBody>
+          <a:bodyPr xmlns:a="http://schemas.openxmlformats.org/drawingml/2006/main" lIns="0" tIns="0" rIns="0" bIns="0">
+            <a:noAutofit/>
+          </a:bodyPr>
+          <a:lstStyle xmlns:a="http://schemas.openxmlformats.org/drawingml/2006/main"/>
+          <a:p xmlns:a="http://schemas.openxmlformats.org/drawingml/2006/main">
+            <a:pPr>
+              <a:defRPr sz="1425" b="0">
+                <a:solidFill>
+                  <a:srgbClr val="243746"/>
+                </a:solidFill>
+                <a:latin typeface="Arial"/>
+                <a:ea typeface="Arial"/>
+                <a:cs typeface="Arial"/>
+              </a:defRPr>
+            </a:pPr>
+            <a:r>
+              <a:rPr sz="1425" b="0">
+                <a:solidFill>
+                  <a:srgbClr val="243746"/>
+                </a:solidFill>
+                <a:latin typeface="Arial"/>
+                <a:ea typeface="Arial"/>
+                <a:cs typeface="Arial"/>
+              </a:rPr>
+              <a:t>COPY --from memindahkan venv. EXPOSE 8000 adalah metadata. CMD listen 0.0.0.0 di dalam container.</a:t>
+            </a:r>
+          </a:p>
+        </p:txBody>
+      </p:sp>
+      <p:sp>
+        <p:nvSpPr>
+          <p:cNvPr id="6" name="">
+            <a:extLst xmlns:a="http://schemas.openxmlformats.org/drawingml/2006/main">
+              <a:ext uri="{FF2B5EF4-FFF2-40B4-BE49-F238E27FC236}">
+                <a16:creationId xmlns:a16="http://schemas.microsoft.com/office/drawing/2014/main" id="{63681E88-FD87-4CFF-A496-237DE13DC114}"/>
+              </a:ext>
+            </a:extLst>
+          </p:cNvPr>
+          <p:cNvSpPr>
+            <a:spLocks xmlns:a="http://schemas.openxmlformats.org/drawingml/2006/main" noGrp="1"/>
+          </p:cNvSpPr>
+          <p:nvPr/>
+        </p:nvSpPr>
+        <p:spPr>
+          <a:xfrm xmlns:a="http://schemas.openxmlformats.org/drawingml/2006/main">
+            <a:off x="457200" y="6553200"/>
+            <a:ext cx="10001250" cy="238125"/>
+          </a:xfrm>
+          <a:prstGeom xmlns:a="http://schemas.openxmlformats.org/drawingml/2006/main" prst="rect">
+            <a:avLst/>
+          </a:prstGeom>
+          <a:noFill xmlns:a="http://schemas.openxmlformats.org/drawingml/2006/main"/>
+          <a:ln xmlns:a="http://schemas.openxmlformats.org/drawingml/2006/main" w="0">
+            <a:noFill/>
+          </a:ln>
+        </p:spPr>
+        <p:txBody>
+          <a:bodyPr xmlns:a="http://schemas.openxmlformats.org/drawingml/2006/main" lIns="0" tIns="0" rIns="0" bIns="0">
+            <a:noAutofit/>
+          </a:bodyPr>
+          <a:lstStyle xmlns:a="http://schemas.openxmlformats.org/drawingml/2006/main"/>
+          <a:p xmlns:a="http://schemas.openxmlformats.org/drawingml/2006/main">
+            <a:pPr>
+              <a:defRPr sz="975" b="0">
+                <a:solidFill>
+                  <a:srgbClr val="64748B"/>
+                </a:solidFill>
+                <a:latin typeface="Arial"/>
+                <a:ea typeface="Arial"/>
+                <a:cs typeface="Arial"/>
+              </a:defRPr>
+            </a:pPr>
+            <a:r>
+              <a:rPr sz="975" b="0">
+                <a:solidFill>
+                  <a:srgbClr val="64748B"/>
+                </a:solidFill>
+                <a:latin typeface="Arial"/>
+                <a:ea typeface="Arial"/>
+                <a:cs typeface="Arial"/>
+              </a:rPr>
+              <a:t>BINUS UNIVERSITY  |  Cloud Services  |  Pertemuan 5</a:t>
+            </a:r>
+          </a:p>
+        </p:txBody>
+      </p:sp>
+      <p:sp>
+        <p:nvSpPr>
+          <p:cNvPr id="7" name="">
+            <a:extLst xmlns:a="http://schemas.openxmlformats.org/drawingml/2006/main">
+              <a:ext uri="{FF2B5EF4-FFF2-40B4-BE49-F238E27FC236}">
+                <a16:creationId xmlns:a16="http://schemas.microsoft.com/office/drawing/2014/main" id="{34E6C16B-4946-46EC-B7D1-238E635B6832}"/>
+              </a:ext>
+            </a:extLst>
+          </p:cNvPr>
+          <p:cNvSpPr>
+            <a:spLocks xmlns:a="http://schemas.openxmlformats.org/drawingml/2006/main" noGrp="1"/>
+          </p:cNvSpPr>
+          <p:nvPr/>
+        </p:nvSpPr>
+        <p:spPr>
+          <a:xfrm xmlns:a="http://schemas.openxmlformats.org/drawingml/2006/main">
+            <a:off x="11239500" y="6553200"/>
+            <a:ext cx="476250" cy="238125"/>
+          </a:xfrm>
+          <a:prstGeom xmlns:a="http://schemas.openxmlformats.org/drawingml/2006/main" prst="rect">
+            <a:avLst/>
+          </a:prstGeom>
+          <a:noFill xmlns:a="http://schemas.openxmlformats.org/drawingml/2006/main"/>
+          <a:ln xmlns:a="http://schemas.openxmlformats.org/drawingml/2006/main" w="0">
+            <a:noFill/>
+          </a:ln>
+        </p:spPr>
+        <p:txBody>
+          <a:bodyPr xmlns:a="http://schemas.openxmlformats.org/drawingml/2006/main" lIns="0" tIns="0" rIns="0" bIns="0">
+            <a:noAutofit/>
+          </a:bodyPr>
+          <a:lstStyle xmlns:a="http://schemas.openxmlformats.org/drawingml/2006/main"/>
+          <a:p xmlns:a="http://schemas.openxmlformats.org/drawingml/2006/main">
+            <a:pPr>
+              <a:defRPr sz="975" b="0">
+                <a:solidFill>
+                  <a:srgbClr val="64748B"/>
+                </a:solidFill>
+                <a:latin typeface="Arial"/>
+                <a:ea typeface="Arial"/>
+                <a:cs typeface="Arial"/>
+              </a:defRPr>
+            </a:pPr>
+            <a:r>
+              <a:rPr sz="975" b="0">
+                <a:solidFill>
+                  <a:srgbClr val="64748B"/>
+                </a:solidFill>
+                <a:latin typeface="Arial"/>
+                <a:ea typeface="Arial"/>
+                <a:cs typeface="Arial"/>
+              </a:rPr>
+              <a:t>34</a:t>
+            </a:r>
+          </a:p>
+        </p:txBody>
+      </p:sp>
+    </p:spTree>
+    <p:extLst>
+      <p:ext uri="{BB962C8B-B14F-4D97-AF65-F5344CB8AC3E}">
+        <p14:creationId xmlns:p14="http://schemas.microsoft.com/office/powerpoint/2010/main" val="689290480"/>
+      </p:ext>
+    </p:extLst>
+  </p:cSld>
+</p:sld>
+</file>
+
+<file path=ppt/slides/slide35.xml><?xml version="1.0" encoding="utf-8"?>
+<p:sld xmlns:p="http://schemas.openxmlformats.org/presentationml/2006/main">
+  <p:cSld>
+    <p:bg>
+      <p:bgPr>
+        <a:solidFill xmlns:a="http://schemas.openxmlformats.org/drawingml/2006/main">
+          <a:srgbClr val="FFFFFF"/>
+        </a:solidFill>
+      </p:bgPr>
+    </p:bg>
+    <p:spTree>
+      <p:nvGrpSpPr>
+        <p:cNvPr id="1" name=""/>
+        <p:cNvGrpSpPr/>
+        <p:nvPr/>
+      </p:nvGrpSpPr>
+      <p:grpSpPr>
+        <a:xfrm xmlns:a="http://schemas.openxmlformats.org/drawingml/2006/main"/>
+      </p:grpSpPr>
+      <p:sp>
+        <p:nvSpPr>
+          <p:cNvPr id="8" name="">
+            <a:extLst xmlns:a="http://schemas.openxmlformats.org/drawingml/2006/main">
+              <a:ext uri="{FF2B5EF4-FFF2-40B4-BE49-F238E27FC236}">
+                <a16:creationId xmlns:a16="http://schemas.microsoft.com/office/drawing/2014/main" id="{4B48C811-9AC6-4729-B848-CE40BAE87B2F}"/>
+              </a:ext>
+            </a:extLst>
+          </p:cNvPr>
+          <p:cNvSpPr>
+            <a:spLocks xmlns:a="http://schemas.openxmlformats.org/drawingml/2006/main" noGrp="1"/>
+          </p:cNvSpPr>
+          <p:nvPr/>
+        </p:nvSpPr>
+        <p:spPr>
+          <a:xfrm xmlns:a="http://schemas.openxmlformats.org/drawingml/2006/main">
+            <a:off x="457200" y="323850"/>
+            <a:ext cx="11239500" cy="514350"/>
+          </a:xfrm>
+          <a:prstGeom xmlns:a="http://schemas.openxmlformats.org/drawingml/2006/main" prst="rect">
+            <a:avLst/>
+          </a:prstGeom>
+          <a:noFill xmlns:a="http://schemas.openxmlformats.org/drawingml/2006/main"/>
+          <a:ln xmlns:a="http://schemas.openxmlformats.org/drawingml/2006/main" w="0">
+            <a:noFill/>
+          </a:ln>
+        </p:spPr>
+        <p:txBody>
+          <a:bodyPr xmlns:a="http://schemas.openxmlformats.org/drawingml/2006/main" lIns="0" tIns="0" rIns="0" bIns="0">
+            <a:noAutofit/>
+          </a:bodyPr>
+          <a:lstStyle xmlns:a="http://schemas.openxmlformats.org/drawingml/2006/main"/>
+          <a:p xmlns:a="http://schemas.openxmlformats.org/drawingml/2006/main">
+            <a:pPr>
+              <a:defRPr sz="2550" b="1">
+                <a:solidFill>
+                  <a:srgbClr val="1673C6"/>
+                </a:solidFill>
+                <a:latin typeface="Arial"/>
+                <a:ea typeface="Arial"/>
+                <a:cs typeface="Arial"/>
+              </a:defRPr>
+            </a:pPr>
+            <a:r>
+              <a:rPr sz="2550" b="1">
+                <a:solidFill>
+                  <a:srgbClr val="1673C6"/>
+                </a:solidFill>
+                <a:latin typeface="Arial"/>
+                <a:ea typeface="Arial"/>
+                <a:cs typeface="Arial"/>
+              </a:rPr>
+              <a:t>Uji perilaku image Lab 05</a:t>
+            </a:r>
+          </a:p>
+        </p:txBody>
+      </p:sp>
+      <p:sp>
+        <p:nvSpPr>
+          <p:cNvPr id="2" name="">
+            <a:extLst xmlns:a="http://schemas.openxmlformats.org/drawingml/2006/main">
+              <a:ext uri="{FF2B5EF4-FFF2-40B4-BE49-F238E27FC236}">
+                <a16:creationId xmlns:a16="http://schemas.microsoft.com/office/drawing/2014/main" id="{24126A61-11AB-47A3-BB90-9DE8C6BDB9B6}"/>
+              </a:ext>
+            </a:extLst>
+          </p:cNvPr>
+          <p:cNvSpPr>
+            <a:spLocks xmlns:a="http://schemas.openxmlformats.org/drawingml/2006/main" noGrp="1"/>
+          </p:cNvSpPr>
+          <p:nvPr/>
+        </p:nvSpPr>
+        <p:spPr>
+          <a:xfrm xmlns:a="http://schemas.openxmlformats.org/drawingml/2006/main">
+            <a:off x="457200" y="933450"/>
+            <a:ext cx="11239500" cy="419100"/>
+          </a:xfrm>
+          <a:prstGeom xmlns:a="http://schemas.openxmlformats.org/drawingml/2006/main" prst="rect">
+            <a:avLst/>
+          </a:prstGeom>
+          <a:noFill xmlns:a="http://schemas.openxmlformats.org/drawingml/2006/main"/>
+          <a:ln xmlns:a="http://schemas.openxmlformats.org/drawingml/2006/main" w="0">
+            <a:noFill/>
+          </a:ln>
+        </p:spPr>
+        <p:txBody>
+          <a:bodyPr xmlns:a="http://schemas.openxmlformats.org/drawingml/2006/main" lIns="0" tIns="0" rIns="0" bIns="0">
+            <a:noAutofit/>
+          </a:bodyPr>
+          <a:lstStyle xmlns:a="http://schemas.openxmlformats.org/drawingml/2006/main"/>
+          <a:p xmlns:a="http://schemas.openxmlformats.org/drawingml/2006/main">
+            <a:pPr>
+              <a:defRPr sz="1425" b="0">
+                <a:solidFill>
+                  <a:srgbClr val="64748B"/>
+                </a:solidFill>
+                <a:latin typeface="Arial"/>
+                <a:ea typeface="Arial"/>
+                <a:cs typeface="Arial"/>
+              </a:defRPr>
+            </a:pPr>
+            <a:r>
+              <a:rPr sz="1425" b="0">
+                <a:solidFill>
+                  <a:srgbClr val="64748B"/>
+                </a:solidFill>
+                <a:latin typeface="Arial"/>
+                <a:ea typeface="Arial"/>
+                <a:cs typeface="Arial"/>
+              </a:rPr>
+              <a:t>Bukti HTTP dibaca bersama konfigurasi container dan batas penyimpanan memori.</a:t>
+            </a:r>
+          </a:p>
+        </p:txBody>
+      </p:sp>
+      <p:pic>
+        <p:nvPicPr>
+          <p:cNvPr id="10" name=""/>
+          <p:cNvPicPr>
+            <a:picLocks xmlns:a="http://schemas.openxmlformats.org/drawingml/2006/main" noChangeAspect="1"/>
+          </p:cNvPicPr>
+          <p:nvPr/>
+        </p:nvPicPr>
+        <p:blipFill>
+          <a:blip xmlns:r="http://schemas.openxmlformats.org/officeDocument/2006/relationships" xmlns:a="http://schemas.openxmlformats.org/drawingml/2006/main" r:embed="Rd77fda316e5849be"/>
+          <a:stretch xmlns:a="http://schemas.openxmlformats.org/drawingml/2006/main"/>
+        </p:blipFill>
+        <p:spPr>
+          <a:xfrm xmlns:a="http://schemas.openxmlformats.org/drawingml/2006/main">
+            <a:off x="457200" y="1574800"/>
+            <a:ext cx="11239500" cy="3746500"/>
+          </a:xfrm>
+          <a:prstGeom xmlns:a="http://schemas.openxmlformats.org/drawingml/2006/main" prst="rect">
+            <a:avLst/>
+          </a:prstGeom>
+        </p:spPr>
+      </p:pic>
+      <p:sp>
+        <p:nvSpPr>
+          <p:cNvPr id="4" name="">
+            <a:extLst xmlns:a="http://schemas.openxmlformats.org/drawingml/2006/main">
+              <a:ext uri="{FF2B5EF4-FFF2-40B4-BE49-F238E27FC236}">
+                <a16:creationId xmlns:a16="http://schemas.microsoft.com/office/drawing/2014/main" id="{94DB6793-6D6F-4D3A-9922-F90DA459E5E8}"/>
+              </a:ext>
+            </a:extLst>
+          </p:cNvPr>
+          <p:cNvSpPr>
+            <a:spLocks xmlns:a="http://schemas.openxmlformats.org/drawingml/2006/main" noGrp="1"/>
+          </p:cNvSpPr>
+          <p:nvPr/>
+        </p:nvSpPr>
+        <p:spPr>
+          <a:xfrm xmlns:a="http://schemas.openxmlformats.org/drawingml/2006/main">
+            <a:off x="457200" y="5619750"/>
+            <a:ext cx="11239500" cy="323850"/>
+          </a:xfrm>
+          <a:prstGeom xmlns:a="http://schemas.openxmlformats.org/drawingml/2006/main" prst="rect">
+            <a:avLst/>
+          </a:prstGeom>
+          <a:noFill xmlns:a="http://schemas.openxmlformats.org/drawingml/2006/main"/>
+          <a:ln xmlns:a="http://schemas.openxmlformats.org/drawingml/2006/main" w="0">
+            <a:noFill/>
+          </a:ln>
+        </p:spPr>
+        <p:txBody>
+          <a:bodyPr xmlns:a="http://schemas.openxmlformats.org/drawingml/2006/main" lIns="0" tIns="0" rIns="0" bIns="0">
+            <a:noAutofit/>
+          </a:bodyPr>
+          <a:lstStyle xmlns:a="http://schemas.openxmlformats.org/drawingml/2006/main"/>
+          <a:p xmlns:a="http://schemas.openxmlformats.org/drawingml/2006/main">
+            <a:pPr>
+              <a:defRPr sz="1350" b="0">
+                <a:solidFill>
+                  <a:srgbClr val="243746"/>
+                </a:solidFill>
+                <a:latin typeface="Consolas"/>
+                <a:ea typeface="Consolas"/>
+                <a:cs typeface="Consolas"/>
+              </a:defRPr>
+            </a:pPr>
+            <a:r>
+              <a:rPr sz="1350" b="0">
+                <a:solidFill>
+                  <a:srgbClr val="243746"/>
+                </a:solidFill>
+                <a:latin typeface="Consolas"/>
+                <a:ea typeface="Consolas"/>
+                <a:cs typeface="Consolas"/>
+              </a:rPr>
+              <a:t>docker run -d -p 127.0.0.1:8000:8000 -e APP_ENV=classroom cloud-notes-api:lab05</a:t>
+            </a:r>
+          </a:p>
+        </p:txBody>
+      </p:sp>
+      <p:sp>
+        <p:nvSpPr>
+          <p:cNvPr id="5" name="">
+            <a:extLst xmlns:a="http://schemas.openxmlformats.org/drawingml/2006/main">
+              <a:ext uri="{FF2B5EF4-FFF2-40B4-BE49-F238E27FC236}">
+                <a16:creationId xmlns:a16="http://schemas.microsoft.com/office/drawing/2014/main" id="{51FCE197-A29A-4910-9A4B-FC286C1F3330}"/>
+              </a:ext>
+            </a:extLst>
+          </p:cNvPr>
+          <p:cNvSpPr>
+            <a:spLocks xmlns:a="http://schemas.openxmlformats.org/drawingml/2006/main" noGrp="1"/>
+          </p:cNvSpPr>
+          <p:nvPr/>
+        </p:nvSpPr>
+        <p:spPr>
+          <a:xfrm xmlns:a="http://schemas.openxmlformats.org/drawingml/2006/main">
+            <a:off x="457200" y="6029325"/>
+            <a:ext cx="11239500" cy="419100"/>
+          </a:xfrm>
+          <a:prstGeom xmlns:a="http://schemas.openxmlformats.org/drawingml/2006/main" prst="rect">
+            <a:avLst/>
+          </a:prstGeom>
+          <a:noFill xmlns:a="http://schemas.openxmlformats.org/drawingml/2006/main"/>
+          <a:ln xmlns:a="http://schemas.openxmlformats.org/drawingml/2006/main" w="0">
+            <a:noFill/>
+          </a:ln>
+        </p:spPr>
+        <p:txBody>
+          <a:bodyPr xmlns:a="http://schemas.openxmlformats.org/drawingml/2006/main" lIns="0" tIns="0" rIns="0" bIns="0">
+            <a:noAutofit/>
+          </a:bodyPr>
+          <a:lstStyle xmlns:a="http://schemas.openxmlformats.org/drawingml/2006/main"/>
+          <a:p xmlns:a="http://schemas.openxmlformats.org/drawingml/2006/main">
+            <a:pPr>
+              <a:defRPr sz="1425" b="0">
+                <a:solidFill>
+                  <a:srgbClr val="243746"/>
+                </a:solidFill>
+                <a:latin typeface="Arial"/>
+                <a:ea typeface="Arial"/>
+                <a:cs typeface="Arial"/>
+              </a:defRPr>
+            </a:pPr>
+            <a:r>
+              <a:rPr sz="1425" b="0">
+                <a:solidFill>
+                  <a:srgbClr val="243746"/>
+                </a:solidFill>
+                <a:latin typeface="Arial"/>
+                <a:ea typeface="Arial"/>
+                <a:cs typeface="Arial"/>
+              </a:rPr>
+              <a:t>/health 200, POST /notes 201, input kosong 422. Restart proses menghapus data memori. Lab 06 menambahkan database.</a:t>
+            </a:r>
+          </a:p>
+        </p:txBody>
+      </p:sp>
+      <p:sp>
+        <p:nvSpPr>
+          <p:cNvPr id="6" name="">
+            <a:extLst xmlns:a="http://schemas.openxmlformats.org/drawingml/2006/main">
+              <a:ext uri="{FF2B5EF4-FFF2-40B4-BE49-F238E27FC236}">
+                <a16:creationId xmlns:a16="http://schemas.microsoft.com/office/drawing/2014/main" id="{E265807F-53E3-4408-A0C2-9F343B4EB739}"/>
+              </a:ext>
+            </a:extLst>
+          </p:cNvPr>
+          <p:cNvSpPr>
+            <a:spLocks xmlns:a="http://schemas.openxmlformats.org/drawingml/2006/main" noGrp="1"/>
+          </p:cNvSpPr>
+          <p:nvPr/>
+        </p:nvSpPr>
+        <p:spPr>
+          <a:xfrm xmlns:a="http://schemas.openxmlformats.org/drawingml/2006/main">
+            <a:off x="457200" y="6553200"/>
+            <a:ext cx="10001250" cy="238125"/>
+          </a:xfrm>
+          <a:prstGeom xmlns:a="http://schemas.openxmlformats.org/drawingml/2006/main" prst="rect">
+            <a:avLst/>
+          </a:prstGeom>
+          <a:noFill xmlns:a="http://schemas.openxmlformats.org/drawingml/2006/main"/>
+          <a:ln xmlns:a="http://schemas.openxmlformats.org/drawingml/2006/main" w="0">
+            <a:noFill/>
+          </a:ln>
+        </p:spPr>
+        <p:txBody>
+          <a:bodyPr xmlns:a="http://schemas.openxmlformats.org/drawingml/2006/main" lIns="0" tIns="0" rIns="0" bIns="0">
+            <a:noAutofit/>
+          </a:bodyPr>
+          <a:lstStyle xmlns:a="http://schemas.openxmlformats.org/drawingml/2006/main"/>
+          <a:p xmlns:a="http://schemas.openxmlformats.org/drawingml/2006/main">
+            <a:pPr>
+              <a:defRPr sz="975" b="0">
+                <a:solidFill>
+                  <a:srgbClr val="64748B"/>
+                </a:solidFill>
+                <a:latin typeface="Arial"/>
+                <a:ea typeface="Arial"/>
+                <a:cs typeface="Arial"/>
+              </a:defRPr>
+            </a:pPr>
+            <a:r>
+              <a:rPr sz="975" b="0">
+                <a:solidFill>
+                  <a:srgbClr val="64748B"/>
+                </a:solidFill>
+                <a:latin typeface="Arial"/>
+                <a:ea typeface="Arial"/>
+                <a:cs typeface="Arial"/>
+              </a:rPr>
+              <a:t>BINUS UNIVERSITY  |  Cloud Services  |  Pertemuan 5</a:t>
+            </a:r>
+          </a:p>
+        </p:txBody>
+      </p:sp>
+      <p:sp>
+        <p:nvSpPr>
+          <p:cNvPr id="7" name="">
+            <a:extLst xmlns:a="http://schemas.openxmlformats.org/drawingml/2006/main">
+              <a:ext uri="{FF2B5EF4-FFF2-40B4-BE49-F238E27FC236}">
+                <a16:creationId xmlns:a16="http://schemas.microsoft.com/office/drawing/2014/main" id="{F8CCED7C-E993-46DC-8385-3AAC72F72921}"/>
+              </a:ext>
+            </a:extLst>
+          </p:cNvPr>
+          <p:cNvSpPr>
+            <a:spLocks xmlns:a="http://schemas.openxmlformats.org/drawingml/2006/main" noGrp="1"/>
+          </p:cNvSpPr>
+          <p:nvPr/>
+        </p:nvSpPr>
+        <p:spPr>
+          <a:xfrm xmlns:a="http://schemas.openxmlformats.org/drawingml/2006/main">
+            <a:off x="11239500" y="6553200"/>
+            <a:ext cx="476250" cy="238125"/>
+          </a:xfrm>
+          <a:prstGeom xmlns:a="http://schemas.openxmlformats.org/drawingml/2006/main" prst="rect">
+            <a:avLst/>
+          </a:prstGeom>
+          <a:noFill xmlns:a="http://schemas.openxmlformats.org/drawingml/2006/main"/>
+          <a:ln xmlns:a="http://schemas.openxmlformats.org/drawingml/2006/main" w="0">
+            <a:noFill/>
+          </a:ln>
+        </p:spPr>
+        <p:txBody>
+          <a:bodyPr xmlns:a="http://schemas.openxmlformats.org/drawingml/2006/main" lIns="0" tIns="0" rIns="0" bIns="0">
+            <a:noAutofit/>
+          </a:bodyPr>
+          <a:lstStyle xmlns:a="http://schemas.openxmlformats.org/drawingml/2006/main"/>
+          <a:p xmlns:a="http://schemas.openxmlformats.org/drawingml/2006/main">
+            <a:pPr>
+              <a:defRPr sz="975" b="0">
+                <a:solidFill>
+                  <a:srgbClr val="64748B"/>
+                </a:solidFill>
+                <a:latin typeface="Arial"/>
+                <a:ea typeface="Arial"/>
+                <a:cs typeface="Arial"/>
+              </a:defRPr>
+            </a:pPr>
+            <a:r>
+              <a:rPr sz="975" b="0">
+                <a:solidFill>
+                  <a:srgbClr val="64748B"/>
+                </a:solidFill>
+                <a:latin typeface="Arial"/>
+                <a:ea typeface="Arial"/>
+                <a:cs typeface="Arial"/>
+              </a:rPr>
+              <a:t>35</a:t>
+            </a:r>
+          </a:p>
+        </p:txBody>
+      </p:sp>
+    </p:spTree>
+    <p:extLst>
+      <p:ext uri="{BB962C8B-B14F-4D97-AF65-F5344CB8AC3E}">
+        <p14:creationId xmlns:p14="http://schemas.microsoft.com/office/powerpoint/2010/main" val="214394452"/>
+      </p:ext>
+    </p:extLst>
+  </p:cSld>
+</p:sld>
+</file>
+
+<file path=ppt/slides/slide36.xml><?xml version="1.0" encoding="utf-8"?>
+<p:sld xmlns:p="http://schemas.openxmlformats.org/presentationml/2006/main">
+  <p:cSld>
+    <p:bg>
+      <p:bgPr>
+        <a:solidFill xmlns:a="http://schemas.openxmlformats.org/drawingml/2006/main">
+          <a:srgbClr val="FFFFFF"/>
+        </a:solidFill>
+      </p:bgPr>
+    </p:bg>
+    <p:spTree>
+      <p:nvGrpSpPr>
+        <p:cNvPr id="1" name=""/>
+        <p:cNvGrpSpPr/>
+        <p:nvPr/>
+      </p:nvGrpSpPr>
+      <p:grpSpPr>
+        <a:xfrm xmlns:a="http://schemas.openxmlformats.org/drawingml/2006/main"/>
+      </p:grpSpPr>
+      <p:sp>
+        <p:nvSpPr>
+          <p:cNvPr id="8" name="">
+            <a:extLst xmlns:a="http://schemas.openxmlformats.org/drawingml/2006/main">
+              <a:ext uri="{FF2B5EF4-FFF2-40B4-BE49-F238E27FC236}">
+                <a16:creationId xmlns:a16="http://schemas.microsoft.com/office/drawing/2014/main" id="{13E12D7E-2EC4-4AF5-B00B-AD11C07ECA97}"/>
+              </a:ext>
+            </a:extLst>
+          </p:cNvPr>
+          <p:cNvSpPr>
+            <a:spLocks xmlns:a="http://schemas.openxmlformats.org/drawingml/2006/main" noGrp="1"/>
+          </p:cNvSpPr>
+          <p:nvPr/>
+        </p:nvSpPr>
+        <p:spPr>
+          <a:xfrm xmlns:a="http://schemas.openxmlformats.org/drawingml/2006/main">
+            <a:off x="457200" y="323850"/>
+            <a:ext cx="11239500" cy="514350"/>
+          </a:xfrm>
+          <a:prstGeom xmlns:a="http://schemas.openxmlformats.org/drawingml/2006/main" prst="rect">
+            <a:avLst/>
+          </a:prstGeom>
+          <a:noFill xmlns:a="http://schemas.openxmlformats.org/drawingml/2006/main"/>
+          <a:ln xmlns:a="http://schemas.openxmlformats.org/drawingml/2006/main" w="0">
+            <a:noFill/>
+          </a:ln>
+        </p:spPr>
+        <p:txBody>
+          <a:bodyPr xmlns:a="http://schemas.openxmlformats.org/drawingml/2006/main" lIns="0" tIns="0" rIns="0" bIns="0">
+            <a:noAutofit/>
+          </a:bodyPr>
+          <a:lstStyle xmlns:a="http://schemas.openxmlformats.org/drawingml/2006/main"/>
+          <a:p xmlns:a="http://schemas.openxmlformats.org/drawingml/2006/main">
+            <a:pPr>
+              <a:defRPr sz="2550" b="1">
+                <a:solidFill>
+                  <a:srgbClr val="1673C6"/>
+                </a:solidFill>
+                <a:latin typeface="Arial"/>
+                <a:ea typeface="Arial"/>
+                <a:cs typeface="Arial"/>
+              </a:defRPr>
+            </a:pPr>
+            <a:r>
+              <a:rPr sz="2550" b="1">
+                <a:solidFill>
+                  <a:srgbClr val="1673C6"/>
+                </a:solidFill>
+                <a:latin typeface="Arial"/>
+                <a:ea typeface="Arial"/>
+                <a:cs typeface="Arial"/>
+              </a:rPr>
+              <a:t>Swagger: uji API dari browser</a:t>
+            </a:r>
+          </a:p>
+        </p:txBody>
+      </p:sp>
+      <p:sp>
+        <p:nvSpPr>
+          <p:cNvPr id="2" name="">
+            <a:extLst xmlns:a="http://schemas.openxmlformats.org/drawingml/2006/main">
+              <a:ext uri="{FF2B5EF4-FFF2-40B4-BE49-F238E27FC236}">
+                <a16:creationId xmlns:a16="http://schemas.microsoft.com/office/drawing/2014/main" id="{7E175314-E285-4AE3-8E97-99C2039346A6}"/>
+              </a:ext>
+            </a:extLst>
+          </p:cNvPr>
+          <p:cNvSpPr>
+            <a:spLocks xmlns:a="http://schemas.openxmlformats.org/drawingml/2006/main" noGrp="1"/>
+          </p:cNvSpPr>
+          <p:nvPr/>
+        </p:nvSpPr>
+        <p:spPr>
+          <a:xfrm xmlns:a="http://schemas.openxmlformats.org/drawingml/2006/main">
+            <a:off x="457200" y="933450"/>
+            <a:ext cx="11239500" cy="419100"/>
+          </a:xfrm>
+          <a:prstGeom xmlns:a="http://schemas.openxmlformats.org/drawingml/2006/main" prst="rect">
+            <a:avLst/>
+          </a:prstGeom>
+          <a:noFill xmlns:a="http://schemas.openxmlformats.org/drawingml/2006/main"/>
+          <a:ln xmlns:a="http://schemas.openxmlformats.org/drawingml/2006/main" w="0">
+            <a:noFill/>
+          </a:ln>
+        </p:spPr>
+        <p:txBody>
+          <a:bodyPr xmlns:a="http://schemas.openxmlformats.org/drawingml/2006/main" lIns="0" tIns="0" rIns="0" bIns="0">
+            <a:noAutofit/>
+          </a:bodyPr>
+          <a:lstStyle xmlns:a="http://schemas.openxmlformats.org/drawingml/2006/main"/>
+          <a:p xmlns:a="http://schemas.openxmlformats.org/drawingml/2006/main">
+            <a:pPr>
+              <a:defRPr sz="1425" b="0">
+                <a:solidFill>
+                  <a:srgbClr val="64748B"/>
+                </a:solidFill>
+                <a:latin typeface="Arial"/>
+                <a:ea typeface="Arial"/>
+                <a:cs typeface="Arial"/>
+              </a:defRPr>
+            </a:pPr>
+            <a:r>
+              <a:rPr sz="1425" b="0">
+                <a:solidFill>
+                  <a:srgbClr val="64748B"/>
+                </a:solidFill>
+                <a:latin typeface="Arial"/>
+                <a:ea typeface="Arial"/>
+                <a:cs typeface="Arial"/>
+              </a:rPr>
+              <a:t>Buka /docs, pilih GET /health, klik Try it out, lalu Execute.</a:t>
+            </a:r>
+          </a:p>
+        </p:txBody>
+      </p:sp>
+      <p:pic>
+        <p:nvPicPr>
+          <p:cNvPr id="10" name=""/>
+          <p:cNvPicPr>
+            <a:picLocks xmlns:a="http://schemas.openxmlformats.org/drawingml/2006/main" noChangeAspect="1"/>
+          </p:cNvPicPr>
+          <p:nvPr/>
+        </p:nvPicPr>
+        <p:blipFill>
+          <a:blip xmlns:r="http://schemas.openxmlformats.org/officeDocument/2006/relationships" xmlns:a="http://schemas.openxmlformats.org/drawingml/2006/main" r:embed="Rd57566871e83478f"/>
+          <a:stretch xmlns:a="http://schemas.openxmlformats.org/drawingml/2006/main"/>
+        </p:blipFill>
+        <p:spPr>
+          <a:xfrm xmlns:a="http://schemas.openxmlformats.org/drawingml/2006/main">
+            <a:off x="1900109" y="1428750"/>
+            <a:ext cx="8353681" cy="4038600"/>
+          </a:xfrm>
+          <a:prstGeom xmlns:a="http://schemas.openxmlformats.org/drawingml/2006/main" prst="rect">
+            <a:avLst/>
+          </a:prstGeom>
+        </p:spPr>
+      </p:pic>
+      <p:sp>
+        <p:nvSpPr>
+          <p:cNvPr id="4" name="">
+            <a:extLst xmlns:a="http://schemas.openxmlformats.org/drawingml/2006/main">
+              <a:ext uri="{FF2B5EF4-FFF2-40B4-BE49-F238E27FC236}">
+                <a16:creationId xmlns:a16="http://schemas.microsoft.com/office/drawing/2014/main" id="{EFB6201D-86B6-43DF-B107-07201459BB33}"/>
+              </a:ext>
+            </a:extLst>
+          </p:cNvPr>
+          <p:cNvSpPr>
+            <a:spLocks xmlns:a="http://schemas.openxmlformats.org/drawingml/2006/main" noGrp="1"/>
+          </p:cNvSpPr>
+          <p:nvPr/>
+        </p:nvSpPr>
+        <p:spPr>
+          <a:xfrm xmlns:a="http://schemas.openxmlformats.org/drawingml/2006/main">
+            <a:off x="457200" y="5619750"/>
+            <a:ext cx="11239500" cy="323850"/>
+          </a:xfrm>
+          <a:prstGeom xmlns:a="http://schemas.openxmlformats.org/drawingml/2006/main" prst="rect">
+            <a:avLst/>
+          </a:prstGeom>
+          <a:noFill xmlns:a="http://schemas.openxmlformats.org/drawingml/2006/main"/>
+          <a:ln xmlns:a="http://schemas.openxmlformats.org/drawingml/2006/main" w="0">
+            <a:noFill/>
+          </a:ln>
+        </p:spPr>
+        <p:txBody>
+          <a:bodyPr xmlns:a="http://schemas.openxmlformats.org/drawingml/2006/main" lIns="0" tIns="0" rIns="0" bIns="0">
+            <a:noAutofit/>
+          </a:bodyPr>
+          <a:lstStyle xmlns:a="http://schemas.openxmlformats.org/drawingml/2006/main"/>
+          <a:p xmlns:a="http://schemas.openxmlformats.org/drawingml/2006/main">
+            <a:pPr>
+              <a:defRPr sz="1350" b="0">
+                <a:solidFill>
+                  <a:srgbClr val="243746"/>
+                </a:solidFill>
+                <a:latin typeface="Consolas"/>
+                <a:ea typeface="Consolas"/>
+                <a:cs typeface="Consolas"/>
+              </a:defRPr>
+            </a:pPr>
+            <a:r>
+              <a:rPr sz="1350" b="0">
+                <a:solidFill>
+                  <a:srgbClr val="243746"/>
+                </a:solidFill>
+                <a:latin typeface="Consolas"/>
+                <a:ea typeface="Consolas"/>
+                <a:cs typeface="Consolas"/>
+              </a:rPr>
+              <a:t>curl -i http://127.0.0.1:18005/health</a:t>
+            </a:r>
+          </a:p>
+        </p:txBody>
+      </p:sp>
+      <p:sp>
+        <p:nvSpPr>
+          <p:cNvPr id="5" name="">
+            <a:extLst xmlns:a="http://schemas.openxmlformats.org/drawingml/2006/main">
+              <a:ext uri="{FF2B5EF4-FFF2-40B4-BE49-F238E27FC236}">
+                <a16:creationId xmlns:a16="http://schemas.microsoft.com/office/drawing/2014/main" id="{9FED1140-D8B9-4B74-8C43-312C331B4AEC}"/>
+              </a:ext>
+            </a:extLst>
+          </p:cNvPr>
+          <p:cNvSpPr>
+            <a:spLocks xmlns:a="http://schemas.openxmlformats.org/drawingml/2006/main" noGrp="1"/>
+          </p:cNvSpPr>
+          <p:nvPr/>
+        </p:nvSpPr>
+        <p:spPr>
+          <a:xfrm xmlns:a="http://schemas.openxmlformats.org/drawingml/2006/main">
+            <a:off x="457200" y="6029325"/>
+            <a:ext cx="11239500" cy="419100"/>
+          </a:xfrm>
+          <a:prstGeom xmlns:a="http://schemas.openxmlformats.org/drawingml/2006/main" prst="rect">
+            <a:avLst/>
+          </a:prstGeom>
+          <a:noFill xmlns:a="http://schemas.openxmlformats.org/drawingml/2006/main"/>
+          <a:ln xmlns:a="http://schemas.openxmlformats.org/drawingml/2006/main" w="0">
+            <a:noFill/>
+          </a:ln>
+        </p:spPr>
+        <p:txBody>
+          <a:bodyPr xmlns:a="http://schemas.openxmlformats.org/drawingml/2006/main" lIns="0" tIns="0" rIns="0" bIns="0">
+            <a:noAutofit/>
+          </a:bodyPr>
+          <a:lstStyle xmlns:a="http://schemas.openxmlformats.org/drawingml/2006/main"/>
+          <a:p xmlns:a="http://schemas.openxmlformats.org/drawingml/2006/main">
+            <a:pPr>
+              <a:defRPr sz="1425" b="0">
+                <a:solidFill>
+                  <a:srgbClr val="243746"/>
+                </a:solidFill>
+                <a:latin typeface="Arial"/>
+                <a:ea typeface="Arial"/>
+                <a:cs typeface="Arial"/>
+              </a:defRPr>
+            </a:pPr>
+            <a:r>
+              <a:rPr sz="1425" b="0">
+                <a:solidFill>
+                  <a:srgbClr val="243746"/>
+                </a:solidFill>
+                <a:latin typeface="Arial"/>
+                <a:ea typeface="Arial"/>
+                <a:cs typeface="Arial"/>
+              </a:rPr>
+              <a:t>HTTP 200 dan status ok membuktikan endpoint dapat diakses. Port host 18005 dipakai untuk uji ini; container tetap 8000.</a:t>
+            </a:r>
+          </a:p>
+        </p:txBody>
+      </p:sp>
+      <p:sp>
+        <p:nvSpPr>
+          <p:cNvPr id="6" name="">
+            <a:extLst xmlns:a="http://schemas.openxmlformats.org/drawingml/2006/main">
+              <a:ext uri="{FF2B5EF4-FFF2-40B4-BE49-F238E27FC236}">
+                <a16:creationId xmlns:a16="http://schemas.microsoft.com/office/drawing/2014/main" id="{C5E88454-CF4C-4DF3-B379-BFB280A55A2F}"/>
+              </a:ext>
+            </a:extLst>
+          </p:cNvPr>
+          <p:cNvSpPr>
+            <a:spLocks xmlns:a="http://schemas.openxmlformats.org/drawingml/2006/main" noGrp="1"/>
+          </p:cNvSpPr>
+          <p:nvPr/>
+        </p:nvSpPr>
+        <p:spPr>
+          <a:xfrm xmlns:a="http://schemas.openxmlformats.org/drawingml/2006/main">
+            <a:off x="457200" y="6553200"/>
+            <a:ext cx="10001250" cy="238125"/>
+          </a:xfrm>
+          <a:prstGeom xmlns:a="http://schemas.openxmlformats.org/drawingml/2006/main" prst="rect">
+            <a:avLst/>
+          </a:prstGeom>
+          <a:noFill xmlns:a="http://schemas.openxmlformats.org/drawingml/2006/main"/>
+          <a:ln xmlns:a="http://schemas.openxmlformats.org/drawingml/2006/main" w="0">
+            <a:noFill/>
+          </a:ln>
+        </p:spPr>
+        <p:txBody>
+          <a:bodyPr xmlns:a="http://schemas.openxmlformats.org/drawingml/2006/main" lIns="0" tIns="0" rIns="0" bIns="0">
+            <a:noAutofit/>
+          </a:bodyPr>
+          <a:lstStyle xmlns:a="http://schemas.openxmlformats.org/drawingml/2006/main"/>
+          <a:p xmlns:a="http://schemas.openxmlformats.org/drawingml/2006/main">
+            <a:pPr>
+              <a:defRPr sz="975" b="0">
+                <a:solidFill>
+                  <a:srgbClr val="64748B"/>
+                </a:solidFill>
+                <a:latin typeface="Arial"/>
+                <a:ea typeface="Arial"/>
+                <a:cs typeface="Arial"/>
+              </a:defRPr>
+            </a:pPr>
+            <a:r>
+              <a:rPr sz="975" b="0">
+                <a:solidFill>
+                  <a:srgbClr val="64748B"/>
+                </a:solidFill>
+                <a:latin typeface="Arial"/>
+                <a:ea typeface="Arial"/>
+                <a:cs typeface="Arial"/>
+              </a:rPr>
+              <a:t>BINUS UNIVERSITY  |  Cloud Services  |  Pertemuan 5</a:t>
+            </a:r>
+          </a:p>
+        </p:txBody>
+      </p:sp>
+      <p:sp>
+        <p:nvSpPr>
+          <p:cNvPr id="7" name="">
+            <a:extLst xmlns:a="http://schemas.openxmlformats.org/drawingml/2006/main">
+              <a:ext uri="{FF2B5EF4-FFF2-40B4-BE49-F238E27FC236}">
+                <a16:creationId xmlns:a16="http://schemas.microsoft.com/office/drawing/2014/main" id="{FAF63B0C-FB69-4A1A-A4FB-9262064FF1E7}"/>
+              </a:ext>
+            </a:extLst>
+          </p:cNvPr>
+          <p:cNvSpPr>
+            <a:spLocks xmlns:a="http://schemas.openxmlformats.org/drawingml/2006/main" noGrp="1"/>
+          </p:cNvSpPr>
+          <p:nvPr/>
+        </p:nvSpPr>
+        <p:spPr>
+          <a:xfrm xmlns:a="http://schemas.openxmlformats.org/drawingml/2006/main">
+            <a:off x="11239500" y="6553200"/>
+            <a:ext cx="476250" cy="238125"/>
+          </a:xfrm>
+          <a:prstGeom xmlns:a="http://schemas.openxmlformats.org/drawingml/2006/main" prst="rect">
+            <a:avLst/>
+          </a:prstGeom>
+          <a:noFill xmlns:a="http://schemas.openxmlformats.org/drawingml/2006/main"/>
+          <a:ln xmlns:a="http://schemas.openxmlformats.org/drawingml/2006/main" w="0">
+            <a:noFill/>
+          </a:ln>
+        </p:spPr>
+        <p:txBody>
+          <a:bodyPr xmlns:a="http://schemas.openxmlformats.org/drawingml/2006/main" lIns="0" tIns="0" rIns="0" bIns="0">
+            <a:noAutofit/>
+          </a:bodyPr>
+          <a:lstStyle xmlns:a="http://schemas.openxmlformats.org/drawingml/2006/main"/>
+          <a:p xmlns:a="http://schemas.openxmlformats.org/drawingml/2006/main">
+            <a:pPr>
+              <a:defRPr sz="975" b="0">
+                <a:solidFill>
+                  <a:srgbClr val="64748B"/>
+                </a:solidFill>
+                <a:latin typeface="Arial"/>
+                <a:ea typeface="Arial"/>
+                <a:cs typeface="Arial"/>
+              </a:defRPr>
+            </a:pPr>
+            <a:r>
+              <a:rPr sz="975" b="0">
+                <a:solidFill>
+                  <a:srgbClr val="64748B"/>
+                </a:solidFill>
+                <a:latin typeface="Arial"/>
+                <a:ea typeface="Arial"/>
+                <a:cs typeface="Arial"/>
+              </a:rPr>
+              <a:t>36</a:t>
+            </a:r>
+          </a:p>
+        </p:txBody>
+      </p:sp>
+    </p:spTree>
+    <p:extLst>
+      <p:ext uri="{BB962C8B-B14F-4D97-AF65-F5344CB8AC3E}">
+        <p14:creationId xmlns:p14="http://schemas.microsoft.com/office/powerpoint/2010/main" val="937515043"/>
       </p:ext>
     </p:extLst>
   </p:cSld>
@@ -37997,7 +39527,7 @@
           <p:nvPr/>
         </p:nvPicPr>
         <p:blipFill>
-          <a:blip xmlns:r="http://schemas.openxmlformats.org/officeDocument/2006/relationships" xmlns:a="http://schemas.openxmlformats.org/drawingml/2006/main" r:embed="R15dcb1cb988c430f"/>
+          <a:blip xmlns:r="http://schemas.openxmlformats.org/officeDocument/2006/relationships" xmlns:a="http://schemas.openxmlformats.org/drawingml/2006/main" r:embed="Rae8d1c14dab94886"/>
           <a:stretch xmlns:a="http://schemas.openxmlformats.org/drawingml/2006/main">
             <a:fillRect l="0" t="0" r="0" b="0"/>
           </a:stretch>
@@ -38021,7 +39551,7 @@
           <p:nvPr/>
         </p:nvPicPr>
         <p:blipFill>
-          <a:blip xmlns:r="http://schemas.openxmlformats.org/officeDocument/2006/relationships" xmlns:a="http://schemas.openxmlformats.org/drawingml/2006/main" r:embed="R021162573a5e4656"/>
+          <a:blip xmlns:r="http://schemas.openxmlformats.org/officeDocument/2006/relationships" xmlns:a="http://schemas.openxmlformats.org/drawingml/2006/main" r:embed="Rad5619fcff8648af"/>
           <a:stretch xmlns:a="http://schemas.openxmlformats.org/drawingml/2006/main">
             <a:fillRect l="0" t="0" r="0" b="0"/>
           </a:stretch>
@@ -38387,7 +39917,7 @@
           <p:nvPr/>
         </p:nvPicPr>
         <p:blipFill>
-          <a:blip xmlns:r="http://schemas.openxmlformats.org/officeDocument/2006/relationships" xmlns:a="http://schemas.openxmlformats.org/drawingml/2006/main" r:embed="Rcd7240a9e6cc44eb"/>
+          <a:blip xmlns:r="http://schemas.openxmlformats.org/officeDocument/2006/relationships" xmlns:a="http://schemas.openxmlformats.org/drawingml/2006/main" r:embed="R18fae9570f7944d5"/>
           <a:stretch xmlns:a="http://schemas.openxmlformats.org/drawingml/2006/main">
             <a:fillRect l="0" t="0" r="0" b="0"/>
           </a:stretch>
@@ -38411,7 +39941,7 @@
           <p:nvPr/>
         </p:nvPicPr>
         <p:blipFill>
-          <a:blip xmlns:r="http://schemas.openxmlformats.org/officeDocument/2006/relationships" xmlns:a="http://schemas.openxmlformats.org/drawingml/2006/main" r:embed="R1242ff4470704a48"/>
+          <a:blip xmlns:r="http://schemas.openxmlformats.org/officeDocument/2006/relationships" xmlns:a="http://schemas.openxmlformats.org/drawingml/2006/main" r:embed="R8d661ef920b24498"/>
           <a:stretch xmlns:a="http://schemas.openxmlformats.org/drawingml/2006/main">
             <a:fillRect l="0" t="0" r="0" b="0"/>
           </a:stretch>
@@ -38591,7 +40121,7 @@
           <p:nvPr/>
         </p:nvPicPr>
         <p:blipFill>
-          <a:blip xmlns:r="http://schemas.openxmlformats.org/officeDocument/2006/relationships" xmlns:a="http://schemas.openxmlformats.org/drawingml/2006/main" r:embed="R65cf18bbeb354f2d"/>
+          <a:blip xmlns:r="http://schemas.openxmlformats.org/officeDocument/2006/relationships" xmlns:a="http://schemas.openxmlformats.org/drawingml/2006/main" r:embed="Rc82b54f3d816478d"/>
           <a:stretch xmlns:a="http://schemas.openxmlformats.org/drawingml/2006/main">
             <a:fillRect l="0" t="0" r="0" b="0"/>
           </a:stretch>
@@ -38692,7 +40222,7 @@
                 <a:ea typeface="Calibri"/>
                 <a:cs typeface="Calibri"/>
               </a:rPr>
-              <a:t>Filename: 'Dockerfile' (tanpa ekstensi, capital D). Tiap baris jadi 1 layer di image yang dihasilkan.</a:t>
+              <a:t>Nama default: Dockerfile. RUN/COPY/ADD mengubah filesystem. CMD/ENV menyimpan konfigurasi image.</a:t>
             </a:r>
             <a:endParaRPr sz="1200"/>
           </a:p>
@@ -38865,7 +40395,7 @@
           <p:nvPr/>
         </p:nvPicPr>
         <p:blipFill>
-          <a:blip xmlns:r="http://schemas.openxmlformats.org/officeDocument/2006/relationships" xmlns:a="http://schemas.openxmlformats.org/drawingml/2006/main" r:embed="R65cf18bbeb354f2d"/>
+          <a:blip xmlns:r="http://schemas.openxmlformats.org/officeDocument/2006/relationships" xmlns:a="http://schemas.openxmlformats.org/drawingml/2006/main" r:embed="Rc82b54f3d816478d"/>
           <a:stretch xmlns:a="http://schemas.openxmlformats.org/drawingml/2006/main">
             <a:fillRect l="0" t="0" r="0" b="0"/>
           </a:stretch>
@@ -39097,7 +40627,7 @@
           <p:nvPr/>
         </p:nvPicPr>
         <p:blipFill>
-          <a:blip xmlns:r="http://schemas.openxmlformats.org/officeDocument/2006/relationships" xmlns:a="http://schemas.openxmlformats.org/drawingml/2006/main" r:embed="R4ff0995483034463"/>
+          <a:blip xmlns:r="http://schemas.openxmlformats.org/officeDocument/2006/relationships" xmlns:a="http://schemas.openxmlformats.org/drawingml/2006/main" r:embed="R2891419b12c141c7"/>
           <a:stretch xmlns:a="http://schemas.openxmlformats.org/drawingml/2006/main">
             <a:fillRect l="0" t="0" r="0" b="0"/>
           </a:stretch>
@@ -39312,7 +40842,7 @@
           <p:nvPr/>
         </p:nvPicPr>
         <p:blipFill>
-          <a:blip xmlns:r="http://schemas.openxmlformats.org/officeDocument/2006/relationships" xmlns:a="http://schemas.openxmlformats.org/drawingml/2006/main" r:embed="R2381c4f121cd4d5b"/>
+          <a:blip xmlns:r="http://schemas.openxmlformats.org/officeDocument/2006/relationships" xmlns:a="http://schemas.openxmlformats.org/drawingml/2006/main" r:embed="Rc25b402a3707493c"/>
           <a:stretch xmlns:a="http://schemas.openxmlformats.org/drawingml/2006/main">
             <a:fillRect l="0" t="0" r="0" b="0"/>
           </a:stretch>
@@ -39544,7 +41074,7 @@
           <p:nvPr/>
         </p:nvPicPr>
         <p:blipFill>
-          <a:blip xmlns:r="http://schemas.openxmlformats.org/officeDocument/2006/relationships" xmlns:a="http://schemas.openxmlformats.org/drawingml/2006/main" r:embed="Rdbff661750e44095"/>
+          <a:blip xmlns:r="http://schemas.openxmlformats.org/officeDocument/2006/relationships" xmlns:a="http://schemas.openxmlformats.org/drawingml/2006/main" r:embed="Rd59b3bd8677649c8"/>
           <a:stretch xmlns:a="http://schemas.openxmlformats.org/drawingml/2006/main">
             <a:fillRect l="0" t="0" r="0" b="0"/>
           </a:stretch>
@@ -39759,7 +41289,7 @@
           <p:nvPr/>
         </p:nvPicPr>
         <p:blipFill>
-          <a:blip xmlns:r="http://schemas.openxmlformats.org/officeDocument/2006/relationships" xmlns:a="http://schemas.openxmlformats.org/drawingml/2006/main" r:embed="R5406b19db6054819"/>
+          <a:blip xmlns:r="http://schemas.openxmlformats.org/officeDocument/2006/relationships" xmlns:a="http://schemas.openxmlformats.org/drawingml/2006/main" r:embed="Re1ace2caa055482a"/>
           <a:stretch xmlns:a="http://schemas.openxmlformats.org/drawingml/2006/main">
             <a:fillRect l="0" t="0" r="0" b="0"/>
           </a:stretch>
@@ -39877,29 +41407,7 @@
                 <a:ea typeface="Calibri"/>
                 <a:cs typeface="Calibri"/>
               </a:rPr>
-              <a:t>Filosofi: </a:t>
-            </a:r>
-            <a:r>
-              <a:rPr sz="1100" i="1">
-                <a:solidFill>
-                  <a:srgbClr val="1E293B"/>
-                </a:solidFill>
-                <a:latin typeface="Calibri"/>
-                <a:ea typeface="Calibri"/>
-                <a:cs typeface="Calibri"/>
-              </a:rPr>
-              <a:t>satu image = satu aplikasi. Reproducible: </a:t>
-            </a:r>
-            <a:r>
-              <a:rPr sz="1100" b="1" i="1">
-                <a:solidFill>
-                  <a:srgbClr val="002677"/>
-                </a:solidFill>
-                <a:latin typeface="Calibri"/>
-                <a:ea typeface="Calibri"/>
-                <a:cs typeface="Calibri"/>
-              </a:rPr>
-              <a:t>kalau Dockerfile sama, hasilnya identik di mana pun di-build.</a:t>
+              <a:t>Hasil build juga bergantung pada base image, dependency, platform, dan context. Lockfile serta digest membantu mengendalikan input.</a:t>
             </a:r>
             <a:endParaRPr sz="1100"/>
           </a:p>
@@ -40068,7 +41576,7 @@
           <p:nvPr/>
         </p:nvPicPr>
         <p:blipFill>
-          <a:blip xmlns:r="http://schemas.openxmlformats.org/officeDocument/2006/relationships" xmlns:a="http://schemas.openxmlformats.org/drawingml/2006/main" r:embed="R4d1b41c19c924dd9"/>
+          <a:blip xmlns:r="http://schemas.openxmlformats.org/officeDocument/2006/relationships" xmlns:a="http://schemas.openxmlformats.org/drawingml/2006/main" r:embed="Rcbd08d45d1c244bb"/>
           <a:stretch xmlns:a="http://schemas.openxmlformats.org/drawingml/2006/main">
             <a:fillRect l="0" t="0" r="0" b="0"/>
           </a:stretch>
@@ -40092,7 +41600,7 @@
           <p:nvPr/>
         </p:nvPicPr>
         <p:blipFill>
-          <a:blip xmlns:r="http://schemas.openxmlformats.org/officeDocument/2006/relationships" xmlns:a="http://schemas.openxmlformats.org/drawingml/2006/main" r:embed="R3509278ec8c8433a"/>
+          <a:blip xmlns:r="http://schemas.openxmlformats.org/officeDocument/2006/relationships" xmlns:a="http://schemas.openxmlformats.org/drawingml/2006/main" r:embed="R645ac0f16b9447b8"/>
           <a:stretch xmlns:a="http://schemas.openxmlformats.org/drawingml/2006/main">
             <a:fillRect l="0" t="0" r="0" b="0"/>
           </a:stretch>
@@ -40178,7 +41686,7 @@
                 <a:ea typeface="Calibri"/>
                 <a:cs typeface="Calibri"/>
               </a:rPr>
-              <a:t>14 Dockerfile Instructions</a:t>
+              <a:t>14 Instruksi Inti Dockerfile</a:t>
             </a:r>
             <a:endParaRPr sz="2200"/>
           </a:p>
@@ -40224,7 +41732,7 @@
                 <a:ea typeface="Calibri"/>
                 <a:cs typeface="Calibri"/>
               </a:rPr>
-              <a:t>Semua yang akan kita pakai - dikelompokkan per fungsi</a:t>
+              <a:t>Subset untuk sesi ini, dikelompokkan menurut fungsi</a:t>
             </a:r>
             <a:endParaRPr sz="1200"/>
           </a:p>
@@ -41982,7 +43490,7 @@
                 <a:ea typeface="Calibri"/>
                 <a:cs typeface="Calibri"/>
               </a:rPr>
-              <a:t>Wajib di-jalankan saat run</a:t>
+              <a:t>Executable default saat run</a:t>
             </a:r>
             <a:endParaRPr sz="1000"/>
           </a:p>
@@ -42568,7 +44076,7 @@
                 <a:ea typeface="Calibri"/>
                 <a:cs typeface="Calibri"/>
               </a:rPr>
-              <a:t>Set non-root user</a:t>
+              <a:t>Set user/UID untuk RUN dan run</a:t>
             </a:r>
             <a:endParaRPr sz="1000"/>
           </a:p>
@@ -42930,29 +44438,7 @@
                 <a:ea typeface="Calibri"/>
                 <a:cs typeface="Calibri"/>
               </a:rPr>
-              <a:t>Wajib hafal: </a:t>
-            </a:r>
-            <a:r>
-              <a:rPr sz="1100" b="1" i="1">
-                <a:solidFill>
-                  <a:srgbClr val="002677"/>
-                </a:solidFill>
-                <a:latin typeface="Consolas"/>
-                <a:ea typeface="Consolas"/>
-                <a:cs typeface="Consolas"/>
-              </a:rPr>
-              <a:t>FROM, RUN, COPY, WORKDIR, ENV, EXPOSE, USER, CMD/ENTRYPOINT</a:t>
-            </a:r>
-            <a:r>
-              <a:rPr sz="1100" i="1">
-                <a:solidFill>
-                  <a:srgbClr val="1E293B"/>
-                </a:solidFill>
-                <a:latin typeface="Calibri"/>
-                <a:ea typeface="Calibri"/>
-                <a:cs typeface="Calibri"/>
-              </a:rPr>
-              <a:t>  -  90% Dockerfile cuma pakai 8 instruksi ini.</a:t>
+              <a:t>Fokus sesi: FROM, RUN, COPY, WORKDIR, ENV, EXPOSE, USER, CMD, ENTRYPOINT. Reference memuat instruksi lain.</a:t>
             </a:r>
             <a:endParaRPr sz="1100"/>
           </a:p>
@@ -43121,7 +44607,7 @@
           <p:nvPr/>
         </p:nvPicPr>
         <p:blipFill>
-          <a:blip xmlns:r="http://schemas.openxmlformats.org/officeDocument/2006/relationships" xmlns:a="http://schemas.openxmlformats.org/drawingml/2006/main" r:embed="Rbb07bb795b044ce3"/>
+          <a:blip xmlns:r="http://schemas.openxmlformats.org/officeDocument/2006/relationships" xmlns:a="http://schemas.openxmlformats.org/drawingml/2006/main" r:embed="R8c91df1ef2e34cf8"/>
           <a:stretch xmlns:a="http://schemas.openxmlformats.org/drawingml/2006/main">
             <a:fillRect l="0" t="0" r="0" b="0"/>
           </a:stretch>
@@ -43145,7 +44631,7 @@
           <p:nvPr/>
         </p:nvPicPr>
         <p:blipFill>
-          <a:blip xmlns:r="http://schemas.openxmlformats.org/officeDocument/2006/relationships" xmlns:a="http://schemas.openxmlformats.org/drawingml/2006/main" r:embed="Rdcd8f7e59c814ddb"/>
+          <a:blip xmlns:r="http://schemas.openxmlformats.org/officeDocument/2006/relationships" xmlns:a="http://schemas.openxmlformats.org/drawingml/2006/main" r:embed="Rd779349d06cd4f27"/>
           <a:stretch xmlns:a="http://schemas.openxmlformats.org/drawingml/2006/main">
             <a:fillRect l="0" t="0" r="0" b="0"/>
           </a:stretch>
@@ -43277,7 +44763,7 @@
                 <a:ea typeface="Calibri"/>
                 <a:cs typeface="Calibri"/>
               </a:rPr>
-              <a:t>8 baris, jadi image yang bisa di-deploy</a:t>
+              <a:t>Contoh Node.js mandiri: lockfile tersedia, server listen 0.0.0.0</a:t>
             </a:r>
             <a:endParaRPr sz="1200"/>
           </a:p>
@@ -43568,7 +45054,7 @@
                 <a:ea typeface="Consolas"/>
                 <a:cs typeface="Consolas"/>
               </a:rPr>
-              <a:t>node:20-alpine</a:t>
+              <a:t>node:24-alpine</a:t>
             </a:r>
             <a:endParaRPr sz="1200"/>
           </a:p>
@@ -43677,18 +45163,7 @@
                 <a:ea typeface="Consolas"/>
                 <a:cs typeface="Consolas"/>
               </a:rPr>
-              <a:t>COPY </a:t>
-            </a:r>
-            <a:r>
-              <a:rPr sz="1200">
-                <a:solidFill>
-                  <a:srgbClr val="E2E8F0"/>
-                </a:solidFill>
-                <a:latin typeface="Consolas"/>
-                <a:ea typeface="Consolas"/>
-                <a:cs typeface="Consolas"/>
-              </a:rPr>
-              <a:t>package*.json ./</a:t>
+              <a:t>COPY package.json package-lock.json ./</a:t>
             </a:r>
             <a:endParaRPr sz="1200"/>
           </a:p>
@@ -43719,7 +45194,7 @@
                 <a:ea typeface="Consolas"/>
                 <a:cs typeface="Consolas"/>
               </a:rPr>
-              <a:t>npm ci --only=production</a:t>
+              <a:t>npm ci --omit=dev</a:t>
             </a:r>
             <a:endParaRPr sz="1200"/>
           </a:p>
@@ -44112,7 +45587,9 @@
           <a:noFill xmlns:a="http://schemas.openxmlformats.org/drawingml/2006/main"/>
         </p:spPr>
         <p:txBody>
-          <a:bodyPr xmlns:a="http://schemas.openxmlformats.org/drawingml/2006/main" wrap="square" lIns="0" tIns="0" rIns="0" bIns="0" anchor="t"/>
+          <a:bodyPr xmlns:a="http://schemas.openxmlformats.org/drawingml/2006/main" wrap="square" lIns="0" tIns="0" rIns="0" bIns="0" anchor="t">
+            <a:noAutofit/>
+          </a:bodyPr>
           <a:lstStyle xmlns:a="http://schemas.openxmlformats.org/drawingml/2006/main"/>
           <a:p xmlns:a="http://schemas.openxmlformats.org/drawingml/2006/main">
             <a:pPr marL="0" indent="0">
@@ -44120,17 +45597,25 @@
                 <a:spcPts val="200"/>
               </a:spcAft>
               <a:buNone/>
-            </a:pPr>
-            <a:r>
-              <a:rPr sz="1100">
-                <a:solidFill>
-                  <a:srgbClr val="94A3B8"/>
+              <a:defRPr sz="1200">
+                <a:solidFill>
+                  <a:srgbClr val="E5E7EB"/>
                 </a:solidFill>
                 <a:latin typeface="Consolas"/>
                 <a:ea typeface="Consolas"/>
                 <a:cs typeface="Consolas"/>
-              </a:rPr>
-              <a:t># Build image dari Dockerfile</a:t>
+              </a:defRPr>
+            </a:pPr>
+            <a:r>
+              <a:rPr sz="1200">
+                <a:solidFill>
+                  <a:srgbClr val="E5E7EB"/>
+                </a:solidFill>
+                <a:latin typeface="Consolas"/>
+                <a:ea typeface="Consolas"/>
+                <a:cs typeface="Consolas"/>
+              </a:rPr>
+              <a:t># Perintah contoh Node.js</a:t>
             </a:r>
             <a:endParaRPr sz="1100"/>
           </a:p>
@@ -44140,22 +45625,19 @@
                 <a:spcPts val="200"/>
               </a:spcAft>
               <a:buNone/>
-            </a:pPr>
-            <a:r>
-              <a:rPr sz="1100">
-                <a:solidFill>
-                  <a:srgbClr val="10B981"/>
+              <a:defRPr sz="1200">
+                <a:solidFill>
+                  <a:srgbClr val="E5E7EB"/>
                 </a:solidFill>
                 <a:latin typeface="Consolas"/>
                 <a:ea typeface="Consolas"/>
                 <a:cs typeface="Consolas"/>
-              </a:rPr>
-              <a:t>$ </a:t>
-            </a:r>
-            <a:r>
-              <a:rPr sz="1100">
-                <a:solidFill>
-                  <a:srgbClr val="E2E8F0"/>
+              </a:defRPr>
+            </a:pPr>
+            <a:r>
+              <a:rPr sz="1200">
+                <a:solidFill>
+                  <a:srgbClr val="E5E7EB"/>
                 </a:solidFill>
                 <a:latin typeface="Consolas"/>
                 <a:ea typeface="Consolas"/>
@@ -44181,7 +45663,7 @@
                 <a:ea typeface="Consolas"/>
                 <a:cs typeface="Consolas"/>
               </a:rPr>
-              <a:t>[+] Building 12.4s (10/10) FINISHED</a:t>
+              <a:t/>
             </a:r>
             <a:endParaRPr sz="1100"/>
           </a:p>
@@ -44191,17 +45673,25 @@
                 <a:spcPts val="200"/>
               </a:spcAft>
               <a:buNone/>
-            </a:pPr>
-            <a:r>
-              <a:rPr sz="1100">
-                <a:solidFill>
-                  <a:srgbClr val="94A3B8"/>
+              <a:defRPr sz="1200">
+                <a:solidFill>
+                  <a:srgbClr val="E5E7EB"/>
                 </a:solidFill>
                 <a:latin typeface="Consolas"/>
                 <a:ea typeface="Consolas"/>
                 <a:cs typeface="Consolas"/>
-              </a:rPr>
-              <a:t>=&gt; [1/5] FROM node:20-alpine</a:t>
+              </a:defRPr>
+            </a:pPr>
+            <a:r>
+              <a:rPr sz="1200">
+                <a:solidFill>
+                  <a:srgbClr val="E5E7EB"/>
+                </a:solidFill>
+                <a:latin typeface="Consolas"/>
+                <a:ea typeface="Consolas"/>
+                <a:cs typeface="Consolas"/>
+              </a:rPr>
+              <a:t># Batasi port ke localhost</a:t>
             </a:r>
             <a:endParaRPr sz="1100"/>
           </a:p>
@@ -44211,17 +45701,25 @@
                 <a:spcPts val="200"/>
               </a:spcAft>
               <a:buNone/>
-            </a:pPr>
-            <a:r>
-              <a:rPr sz="1100">
-                <a:solidFill>
-                  <a:srgbClr val="94A3B8"/>
+              <a:defRPr sz="1200">
+                <a:solidFill>
+                  <a:srgbClr val="E5E7EB"/>
                 </a:solidFill>
                 <a:latin typeface="Consolas"/>
                 <a:ea typeface="Consolas"/>
                 <a:cs typeface="Consolas"/>
-              </a:rPr>
-              <a:t>=&gt; [2/5] WORKDIR /usr/src/app</a:t>
+              </a:defRPr>
+            </a:pPr>
+            <a:r>
+              <a:rPr sz="1200">
+                <a:solidFill>
+                  <a:srgbClr val="E5E7EB"/>
+                </a:solidFill>
+                <a:latin typeface="Consolas"/>
+                <a:ea typeface="Consolas"/>
+                <a:cs typeface="Consolas"/>
+              </a:rPr>
+              <a:t>docker run -d --name node-demo \</a:t>
             </a:r>
             <a:endParaRPr sz="1100"/>
           </a:p>
@@ -44231,17 +45729,25 @@
                 <a:spcPts val="200"/>
               </a:spcAft>
               <a:buNone/>
-            </a:pPr>
-            <a:r>
-              <a:rPr sz="1100">
-                <a:solidFill>
-                  <a:srgbClr val="94A3B8"/>
+              <a:defRPr sz="1200">
+                <a:solidFill>
+                  <a:srgbClr val="E5E7EB"/>
                 </a:solidFill>
                 <a:latin typeface="Consolas"/>
                 <a:ea typeface="Consolas"/>
                 <a:cs typeface="Consolas"/>
-              </a:rPr>
-              <a:t>=&gt; [3/5] COPY package*.json ./</a:t>
+              </a:defRPr>
+            </a:pPr>
+            <a:r>
+              <a:rPr sz="1200">
+                <a:solidFill>
+                  <a:srgbClr val="E5E7EB"/>
+                </a:solidFill>
+                <a:latin typeface="Consolas"/>
+                <a:ea typeface="Consolas"/>
+                <a:cs typeface="Consolas"/>
+              </a:rPr>
+              <a:t>  -p 127.0.0.1:3000:3000 myapp:1.0</a:t>
             </a:r>
             <a:endParaRPr sz="1100"/>
           </a:p>
@@ -44261,7 +45767,7 @@
                 <a:ea typeface="Consolas"/>
                 <a:cs typeface="Consolas"/>
               </a:rPr>
-              <a:t>=&gt; [4/5] RUN npm ci --only=production</a:t>
+              <a:t/>
             </a:r>
             <a:endParaRPr sz="1100"/>
           </a:p>
@@ -44271,17 +45777,25 @@
                 <a:spcPts val="200"/>
               </a:spcAft>
               <a:buNone/>
-            </a:pPr>
-            <a:r>
-              <a:rPr sz="1100">
-                <a:solidFill>
-                  <a:srgbClr val="94A3B8"/>
+              <a:defRPr sz="1200">
+                <a:solidFill>
+                  <a:srgbClr val="E5E7EB"/>
                 </a:solidFill>
                 <a:latin typeface="Consolas"/>
                 <a:ea typeface="Consolas"/>
                 <a:cs typeface="Consolas"/>
-              </a:rPr>
-              <a:t>=&gt; [5/5] COPY . .</a:t>
+              </a:defRPr>
+            </a:pPr>
+            <a:r>
+              <a:rPr sz="1200">
+                <a:solidFill>
+                  <a:srgbClr val="E5E7EB"/>
+                </a:solidFill>
+                <a:latin typeface="Consolas"/>
+                <a:ea typeface="Consolas"/>
+                <a:cs typeface="Consolas"/>
+              </a:rPr>
+              <a:t># Uji lalu bersihkan container demo</a:t>
             </a:r>
             <a:endParaRPr sz="1100"/>
           </a:p>
@@ -44291,17 +45805,25 @@
                 <a:spcPts val="200"/>
               </a:spcAft>
               <a:buNone/>
-            </a:pPr>
-            <a:r>
-              <a:rPr sz="1100">
-                <a:solidFill>
-                  <a:srgbClr val="10B981"/>
+              <a:defRPr sz="1200">
+                <a:solidFill>
+                  <a:srgbClr val="E5E7EB"/>
                 </a:solidFill>
                 <a:latin typeface="Consolas"/>
                 <a:ea typeface="Consolas"/>
                 <a:cs typeface="Consolas"/>
-              </a:rPr>
-              <a:t>=&gt; exporting to image, sha256:a8b3c2...</a:t>
+              </a:defRPr>
+            </a:pPr>
+            <a:r>
+              <a:rPr sz="1200">
+                <a:solidFill>
+                  <a:srgbClr val="E5E7EB"/>
+                </a:solidFill>
+                <a:latin typeface="Consolas"/>
+                <a:ea typeface="Consolas"/>
+                <a:cs typeface="Consolas"/>
+              </a:rPr>
+              <a:t>curl http://127.0.0.1:3000</a:t>
             </a:r>
             <a:endParaRPr sz="1100"/>
           </a:p>
@@ -44311,7 +45833,26 @@
                 <a:spcPts val="200"/>
               </a:spcAft>
               <a:buNone/>
-            </a:pPr>
+              <a:defRPr sz="1200">
+                <a:solidFill>
+                  <a:srgbClr val="E5E7EB"/>
+                </a:solidFill>
+                <a:latin typeface="Consolas"/>
+                <a:ea typeface="Consolas"/>
+                <a:cs typeface="Consolas"/>
+              </a:defRPr>
+            </a:pPr>
+            <a:r>
+              <a:rPr sz="1200">
+                <a:solidFill>
+                  <a:srgbClr val="E5E7EB"/>
+                </a:solidFill>
+                <a:latin typeface="Consolas"/>
+                <a:ea typeface="Consolas"/>
+                <a:cs typeface="Consolas"/>
+              </a:rPr>
+              <a:t>docker rm -f node-demo</a:t>
+            </a:r>
             <a:endParaRPr sz="1100"/>
           </a:p>
           <a:p xmlns:a="http://schemas.openxmlformats.org/drawingml/2006/main">
@@ -44330,7 +45871,7 @@
                 <a:ea typeface="Consolas"/>
                 <a:cs typeface="Consolas"/>
               </a:rPr>
-              <a:t># Run container</a:t>
+              <a:t/>
             </a:r>
             <a:endParaRPr sz="1100"/>
           </a:p>
@@ -44340,28 +45881,25 @@
                 <a:spcPts val="200"/>
               </a:spcAft>
               <a:buNone/>
-            </a:pPr>
-            <a:r>
-              <a:rPr sz="1100">
-                <a:solidFill>
-                  <a:srgbClr val="10B981"/>
+              <a:defRPr sz="1200">
+                <a:solidFill>
+                  <a:srgbClr val="E5E7EB"/>
                 </a:solidFill>
                 <a:latin typeface="Consolas"/>
                 <a:ea typeface="Consolas"/>
                 <a:cs typeface="Consolas"/>
-              </a:rPr>
-              <a:t>$ </a:t>
-            </a:r>
-            <a:r>
-              <a:rPr sz="1100">
-                <a:solidFill>
-                  <a:srgbClr val="E2E8F0"/>
+              </a:defRPr>
+            </a:pPr>
+            <a:r>
+              <a:rPr sz="1200">
+                <a:solidFill>
+                  <a:srgbClr val="E5E7EB"/>
                 </a:solidFill>
                 <a:latin typeface="Consolas"/>
                 <a:ea typeface="Consolas"/>
                 <a:cs typeface="Consolas"/>
               </a:rPr>
-              <a:t>docker run -d -p 3000:3000 myapp:1.0</a:t>
+              <a:t># Kode: examples/theory-node</a:t>
             </a:r>
             <a:endParaRPr sz="1100"/>
           </a:p>
@@ -44371,77 +45909,25 @@
                 <a:spcPts val="200"/>
               </a:spcAft>
               <a:buNone/>
-            </a:pPr>
-            <a:endParaRPr sz="1100"/>
-          </a:p>
-          <a:p xmlns:a="http://schemas.openxmlformats.org/drawingml/2006/main">
-            <a:pPr marL="0" indent="0">
-              <a:spcAft>
-                <a:spcPts val="200"/>
-              </a:spcAft>
-              <a:buNone/>
-            </a:pPr>
-            <a:r>
-              <a:rPr sz="1100">
-                <a:solidFill>
-                  <a:srgbClr val="94A3B8"/>
+              <a:defRPr sz="1200">
+                <a:solidFill>
+                  <a:srgbClr val="E5E7EB"/>
                 </a:solidFill>
                 <a:latin typeface="Consolas"/>
                 <a:ea typeface="Consolas"/>
                 <a:cs typeface="Consolas"/>
-              </a:rPr>
-              <a:t># Test</a:t>
-            </a:r>
-            <a:endParaRPr sz="1100"/>
-          </a:p>
-          <a:p xmlns:a="http://schemas.openxmlformats.org/drawingml/2006/main">
-            <a:pPr marL="0" indent="0">
-              <a:spcAft>
-                <a:spcPts val="200"/>
-              </a:spcAft>
-              <a:buNone/>
-            </a:pPr>
-            <a:r>
-              <a:rPr sz="1100">
-                <a:solidFill>
-                  <a:srgbClr val="10B981"/>
+              </a:defRPr>
+            </a:pPr>
+            <a:r>
+              <a:rPr sz="1200">
+                <a:solidFill>
+                  <a:srgbClr val="E5E7EB"/>
                 </a:solidFill>
                 <a:latin typeface="Consolas"/>
                 <a:ea typeface="Consolas"/>
                 <a:cs typeface="Consolas"/>
               </a:rPr>
-              <a:t>$ </a:t>
-            </a:r>
-            <a:r>
-              <a:rPr sz="1100">
-                <a:solidFill>
-                  <a:srgbClr val="E2E8F0"/>
-                </a:solidFill>
-                <a:latin typeface="Consolas"/>
-                <a:ea typeface="Consolas"/>
-                <a:cs typeface="Consolas"/>
-              </a:rPr>
-              <a:t>curl localhost:3000</a:t>
-            </a:r>
-            <a:endParaRPr sz="1100"/>
-          </a:p>
-          <a:p xmlns:a="http://schemas.openxmlformats.org/drawingml/2006/main">
-            <a:pPr marL="0" indent="0">
-              <a:spcAft>
-                <a:spcPts val="200"/>
-              </a:spcAft>
-              <a:buNone/>
-            </a:pPr>
-            <a:r>
-              <a:rPr sz="1100">
-                <a:solidFill>
-                  <a:srgbClr val="10B981"/>
-                </a:solidFill>
-                <a:latin typeface="Consolas"/>
-                <a:ea typeface="Consolas"/>
-                <a:cs typeface="Consolas"/>
-              </a:rPr>
-              <a:t>Hello from Docker!</a:t>
+              <a:t># Lab 05 memakai FastAPI pada port 8000.</a:t>
             </a:r>
             <a:endParaRPr sz="1100"/>
           </a:p>
@@ -44724,7 +46210,7 @@
           <p:nvPr/>
         </p:nvPicPr>
         <p:blipFill>
-          <a:blip xmlns:r="http://schemas.openxmlformats.org/officeDocument/2006/relationships" xmlns:a="http://schemas.openxmlformats.org/drawingml/2006/main" r:embed="Refa37968a72a4276"/>
+          <a:blip xmlns:r="http://schemas.openxmlformats.org/officeDocument/2006/relationships" xmlns:a="http://schemas.openxmlformats.org/drawingml/2006/main" r:embed="R18dbbcc4feee47b5"/>
           <a:stretch xmlns:a="http://schemas.openxmlformats.org/drawingml/2006/main">
             <a:fillRect l="0" t="0" r="0" b="0"/>
           </a:stretch>
@@ -44748,7 +46234,7 @@
           <p:nvPr/>
         </p:nvPicPr>
         <p:blipFill>
-          <a:blip xmlns:r="http://schemas.openxmlformats.org/officeDocument/2006/relationships" xmlns:a="http://schemas.openxmlformats.org/drawingml/2006/main" r:embed="Ra6d3941ebcba46a1"/>
+          <a:blip xmlns:r="http://schemas.openxmlformats.org/officeDocument/2006/relationships" xmlns:a="http://schemas.openxmlformats.org/drawingml/2006/main" r:embed="Rfdaa669dbd124f30"/>
           <a:stretch xmlns:a="http://schemas.openxmlformats.org/drawingml/2006/main">
             <a:fillRect l="0" t="0" r="0" b="0"/>
           </a:stretch>
@@ -45114,7 +46600,7 @@
           <p:nvPr/>
         </p:nvPicPr>
         <p:blipFill>
-          <a:blip xmlns:r="http://schemas.openxmlformats.org/officeDocument/2006/relationships" xmlns:a="http://schemas.openxmlformats.org/drawingml/2006/main" r:embed="Ra607483f93af416a"/>
+          <a:blip xmlns:r="http://schemas.openxmlformats.org/officeDocument/2006/relationships" xmlns:a="http://schemas.openxmlformats.org/drawingml/2006/main" r:embed="Rfcbf4af7c40e4942"/>
           <a:stretch xmlns:a="http://schemas.openxmlformats.org/drawingml/2006/main">
             <a:fillRect l="0" t="0" r="0" b="0"/>
           </a:stretch>
@@ -45138,7 +46624,7 @@
           <p:nvPr/>
         </p:nvPicPr>
         <p:blipFill>
-          <a:blip xmlns:r="http://schemas.openxmlformats.org/officeDocument/2006/relationships" xmlns:a="http://schemas.openxmlformats.org/drawingml/2006/main" r:embed="Ra1d6dd698e5c4101"/>
+          <a:blip xmlns:r="http://schemas.openxmlformats.org/officeDocument/2006/relationships" xmlns:a="http://schemas.openxmlformats.org/drawingml/2006/main" r:embed="R75b84cfef1334f53"/>
           <a:stretch xmlns:a="http://schemas.openxmlformats.org/drawingml/2006/main">
             <a:fillRect l="0" t="0" r="0" b="0"/>
           </a:stretch>
@@ -45270,7 +46756,7 @@
                 <a:ea typeface="Calibri"/>
                 <a:cs typeface="Calibri"/>
               </a:rPr>
-              <a:t>Instruksi pertama di setiap Dockerfile - tentukan starting point</a:t>
+              <a:t>FROM memulai setiap stage build</a:t>
             </a:r>
             <a:endParaRPr sz="1200"/>
           </a:p>
@@ -45349,35 +46835,7 @@
                 <a:ea typeface="Consolas"/>
                 <a:cs typeface="Consolas"/>
               </a:rPr>
-              <a:t>FROM &lt;image&gt;:&lt;tag&gt;</a:t>
-            </a:r>
-            <a:r>
-              <a:rPr sz="1300">
-                <a:solidFill>
-                  <a:srgbClr val="FFFFFF"/>
-                </a:solidFill>
-                <a:latin typeface="Calibri"/>
-                <a:ea typeface="Calibri"/>
-                <a:cs typeface="Calibri"/>
-              </a:rPr>
-              <a:t>  -  satu Dockerfile bisa punya banyak FROM (multi-stage build).</a:t>
-            </a:r>
-            <a:endParaRPr sz="1600"/>
-          </a:p>
-          <a:p xmlns:a="http://schemas.openxmlformats.org/drawingml/2006/main">
-            <a:pPr marL="0" indent="0">
-              <a:buNone/>
-            </a:pPr>
-            <a:r>
-              <a:rPr sz="1100" i="1">
-                <a:solidFill>
-                  <a:srgbClr val="FFE0B2"/>
-                </a:solidFill>
-                <a:latin typeface="Calibri"/>
-                <a:ea typeface="Calibri"/>
-                <a:cs typeface="Calibri"/>
-              </a:rPr>
-              <a:t>Wajib di baris pertama. Image dasar yang jadi fondasi semua layer di atasnya.</a:t>
+              <a:t>Komentar, parser directive, dan ARG global dapat mendahului FROM.</a:t>
             </a:r>
             <a:endParaRPr sz="1600"/>
           </a:p>
@@ -45471,7 +46929,7 @@
           <p:nvPr/>
         </p:nvPicPr>
         <p:blipFill>
-          <a:blip xmlns:r="http://schemas.openxmlformats.org/officeDocument/2006/relationships" xmlns:a="http://schemas.openxmlformats.org/drawingml/2006/main" r:embed="R7a092f94d9d44cd1"/>
+          <a:blip xmlns:r="http://schemas.openxmlformats.org/officeDocument/2006/relationships" xmlns:a="http://schemas.openxmlformats.org/drawingml/2006/main" r:embed="R7ced531726e04ced"/>
           <a:stretch xmlns:a="http://schemas.openxmlformats.org/drawingml/2006/main">
             <a:fillRect l="0" t="0" r="0" b="0"/>
           </a:stretch>
@@ -45572,7 +47030,7 @@
                 <a:ea typeface="Calibri"/>
                 <a:cs typeface="Calibri"/>
               </a:rPr>
-              <a:t>node, python, nginx - sudah maintained Docker Inc. Aman &amp; ter-update.</a:t>
+              <a:t>Official Images mengikuti proses kurasi. Tetap cek pemelihara dan hasil scan.</a:t>
             </a:r>
             <a:endParaRPr sz="1000"/>
           </a:p>
@@ -45620,7 +47078,7 @@
           <p:nvPr/>
         </p:nvPicPr>
         <p:blipFill>
-          <a:blip xmlns:r="http://schemas.openxmlformats.org/officeDocument/2006/relationships" xmlns:a="http://schemas.openxmlformats.org/drawingml/2006/main" r:embed="R342714b4e76f4b24"/>
+          <a:blip xmlns:r="http://schemas.openxmlformats.org/officeDocument/2006/relationships" xmlns:a="http://schemas.openxmlformats.org/drawingml/2006/main" r:embed="Ra325df97e3c449cf"/>
           <a:stretch xmlns:a="http://schemas.openxmlformats.org/drawingml/2006/main">
             <a:fillRect l="0" t="0" r="0" b="0"/>
           </a:stretch>
@@ -45721,7 +47179,7 @@
                 <a:ea typeface="Calibri"/>
                 <a:cs typeface="Calibri"/>
               </a:rPr>
-              <a:t>node:20-alpine bukan node:latest. Reproducible &amp; predictable.</a:t>
+              <a:t>Tag versi membatasi perubahan. Pin digest bila perlu identitas konten yang tetap.</a:t>
             </a:r>
             <a:endParaRPr sz="1000"/>
           </a:p>
@@ -45769,7 +47227,7 @@
           <p:nvPr/>
         </p:nvPicPr>
         <p:blipFill>
-          <a:blip xmlns:r="http://schemas.openxmlformats.org/officeDocument/2006/relationships" xmlns:a="http://schemas.openxmlformats.org/drawingml/2006/main" r:embed="Ra9c12eb97a8d4f04"/>
+          <a:blip xmlns:r="http://schemas.openxmlformats.org/officeDocument/2006/relationships" xmlns:a="http://schemas.openxmlformats.org/drawingml/2006/main" r:embed="Re28ed61f4f1d402b"/>
           <a:stretch xmlns:a="http://schemas.openxmlformats.org/drawingml/2006/main">
             <a:fillRect l="0" t="0" r="0" b="0"/>
           </a:stretch>
@@ -45918,7 +47376,7 @@
           <p:nvPr/>
         </p:nvPicPr>
         <p:blipFill>
-          <a:blip xmlns:r="http://schemas.openxmlformats.org/officeDocument/2006/relationships" xmlns:a="http://schemas.openxmlformats.org/drawingml/2006/main" r:embed="R77b5151fd15f4770"/>
+          <a:blip xmlns:r="http://schemas.openxmlformats.org/officeDocument/2006/relationships" xmlns:a="http://schemas.openxmlformats.org/drawingml/2006/main" r:embed="R9507f705a74d498a"/>
           <a:stretch xmlns:a="http://schemas.openxmlformats.org/drawingml/2006/main">
             <a:fillRect l="0" t="0" r="0" b="0"/>
           </a:stretch>
@@ -46019,7 +47477,7 @@
                 <a:ea typeface="Calibri"/>
                 <a:cs typeface="Calibri"/>
               </a:rPr>
-              <a:t>Cek 'Official' badge + jumlah downloads di Docker Hub.</a:t>
+              <a:t>Periksa sumber Dockerfile, versi yang didukung, dan kebijakan pembaruan.</a:t>
             </a:r>
             <a:endParaRPr sz="1000"/>
           </a:p>
@@ -46261,7 +47719,9 @@
           <a:noFill xmlns:a="http://schemas.openxmlformats.org/drawingml/2006/main"/>
         </p:spPr>
         <p:txBody>
-          <a:bodyPr xmlns:a="http://schemas.openxmlformats.org/drawingml/2006/main" wrap="square" lIns="0" tIns="0" rIns="0" bIns="0" anchor="t"/>
+          <a:bodyPr xmlns:a="http://schemas.openxmlformats.org/drawingml/2006/main" wrap="square" lIns="0" tIns="0" rIns="0" bIns="0" anchor="t">
+            <a:noAutofit/>
+          </a:bodyPr>
           <a:lstStyle xmlns:a="http://schemas.openxmlformats.org/drawingml/2006/main"/>
           <a:p xmlns:a="http://schemas.openxmlformats.org/drawingml/2006/main">
             <a:pPr marL="0" indent="0">
@@ -46269,17 +47729,25 @@
                 <a:spcPts val="200"/>
               </a:spcAft>
               <a:buNone/>
-            </a:pPr>
-            <a:r>
-              <a:rPr sz="1100">
-                <a:solidFill>
-                  <a:srgbClr val="94A3B8"/>
+              <a:defRPr sz="1200">
+                <a:solidFill>
+                  <a:srgbClr val="E5E7EB"/>
                 </a:solidFill>
                 <a:latin typeface="Consolas"/>
                 <a:ea typeface="Consolas"/>
                 <a:cs typeface="Consolas"/>
-              </a:rPr>
-              <a:t>FROM node:20-alpine                # Recommended: pin major + alpine</a:t>
+              </a:defRPr>
+            </a:pPr>
+            <a:r>
+              <a:rPr sz="1200">
+                <a:solidFill>
+                  <a:srgbClr val="E5E7EB"/>
+                </a:solidFill>
+                <a:latin typeface="Consolas"/>
+                <a:ea typeface="Consolas"/>
+                <a:cs typeface="Consolas"/>
+              </a:rPr>
+              <a:t>FROM node:24-alpine             # uji dependensi musl</a:t>
             </a:r>
             <a:endParaRPr sz="1100"/>
           </a:p>
@@ -46289,17 +47757,25 @@
                 <a:spcPts val="200"/>
               </a:spcAft>
               <a:buNone/>
-            </a:pPr>
-            <a:r>
-              <a:rPr sz="1100">
-                <a:solidFill>
-                  <a:srgbClr val="94A3B8"/>
+              <a:defRPr sz="1200">
+                <a:solidFill>
+                  <a:srgbClr val="E5E7EB"/>
                 </a:solidFill>
                 <a:latin typeface="Consolas"/>
                 <a:ea typeface="Consolas"/>
                 <a:cs typeface="Consolas"/>
-              </a:rPr>
-              <a:t>FROM python:3.12-slim               # Slim Debian, no extra packages</a:t>
+              </a:defRPr>
+            </a:pPr>
+            <a:r>
+              <a:rPr sz="1200">
+                <a:solidFill>
+                  <a:srgbClr val="E5E7EB"/>
+                </a:solidFill>
+                <a:latin typeface="Consolas"/>
+                <a:ea typeface="Consolas"/>
+                <a:cs typeface="Consolas"/>
+              </a:rPr>
+              <a:t>FROM python:3.12-slim           # contoh Lab 05</a:t>
             </a:r>
             <a:endParaRPr sz="1100"/>
           </a:p>
@@ -46309,17 +47785,25 @@
                 <a:spcPts val="200"/>
               </a:spcAft>
               <a:buNone/>
-            </a:pPr>
-            <a:r>
-              <a:rPr sz="1100">
-                <a:solidFill>
-                  <a:srgbClr val="94A3B8"/>
+              <a:defRPr sz="1200">
+                <a:solidFill>
+                  <a:srgbClr val="E5E7EB"/>
                 </a:solidFill>
                 <a:latin typeface="Consolas"/>
                 <a:ea typeface="Consolas"/>
                 <a:cs typeface="Consolas"/>
-              </a:rPr>
-              <a:t>FROM gcr.io/distroless/static       # No shell, no package manager</a:t>
+              </a:defRPr>
+            </a:pPr>
+            <a:r>
+              <a:rPr sz="1200">
+                <a:solidFill>
+                  <a:srgbClr val="E5E7EB"/>
+                </a:solidFill>
+                <a:latin typeface="Consolas"/>
+                <a:ea typeface="Consolas"/>
+                <a:cs typeface="Consolas"/>
+              </a:rPr>
+              <a:t>FROM gcr.io/distroless/static-debian12</a:t>
             </a:r>
             <a:endParaRPr sz="1100"/>
           </a:p>
@@ -46329,17 +47813,25 @@
                 <a:spcPts val="200"/>
               </a:spcAft>
               <a:buNone/>
-            </a:pPr>
-            <a:r>
-              <a:rPr sz="1100">
-                <a:solidFill>
-                  <a:srgbClr val="94A3B8"/>
+              <a:defRPr sz="1200">
+                <a:solidFill>
+                  <a:srgbClr val="E5E7EB"/>
                 </a:solidFill>
                 <a:latin typeface="Consolas"/>
                 <a:ea typeface="Consolas"/>
                 <a:cs typeface="Consolas"/>
-              </a:rPr>
-              <a:t>FROM scratch                        # Empty - untuk binary statis (Go)</a:t>
+              </a:defRPr>
+            </a:pPr>
+            <a:r>
+              <a:rPr sz="1200">
+                <a:solidFill>
+                  <a:srgbClr val="E5E7EB"/>
+                </a:solidFill>
+                <a:latin typeface="Consolas"/>
+                <a:ea typeface="Consolas"/>
+                <a:cs typeface="Consolas"/>
+              </a:rPr>
+              <a:t>FROM scratch                   # binary statis</a:t>
             </a:r>
             <a:endParaRPr sz="1100"/>
           </a:p>
@@ -46349,17 +47841,25 @@
                 <a:spcPts val="200"/>
               </a:spcAft>
               <a:buNone/>
-            </a:pPr>
-            <a:r>
-              <a:rPr sz="1100">
-                <a:solidFill>
-                  <a:srgbClr val="EF4444"/>
+              <a:defRPr sz="1200">
+                <a:solidFill>
+                  <a:srgbClr val="E5E7EB"/>
                 </a:solidFill>
                 <a:latin typeface="Consolas"/>
                 <a:ea typeface="Consolas"/>
                 <a:cs typeface="Consolas"/>
-              </a:rPr>
-              <a:t>FROM node:latest                    # BAD: floating tag, tidak reproducible</a:t>
+              </a:defRPr>
+            </a:pPr>
+            <a:r>
+              <a:rPr sz="1200">
+                <a:solidFill>
+                  <a:srgbClr val="E5E7EB"/>
+                </a:solidFill>
+                <a:latin typeface="Consolas"/>
+                <a:ea typeface="Consolas"/>
+                <a:cs typeface="Consolas"/>
+              </a:rPr>
+              <a:t># Pin konten: image@sha256:&lt;digest-terverifikasi&gt;</a:t>
             </a:r>
             <a:endParaRPr sz="1100"/>
           </a:p>
